--- a/LabBook_020.pptx
+++ b/LabBook_020.pptx
@@ -5,17 +5,23 @@
     <p:sldMasterId id="2147483648" r:id="rId1"/>
   </p:sldMasterIdLst>
   <p:notesMasterIdLst>
-    <p:notesMasterId r:id="rId7"/>
+    <p:notesMasterId r:id="rId13"/>
   </p:notesMasterIdLst>
   <p:handoutMasterIdLst>
-    <p:handoutMasterId r:id="rId8"/>
+    <p:handoutMasterId r:id="rId14"/>
   </p:handoutMasterIdLst>
   <p:sldIdLst>
     <p:sldId id="256" r:id="rId2"/>
     <p:sldId id="289" r:id="rId3"/>
     <p:sldId id="290" r:id="rId4"/>
-    <p:sldId id="293" r:id="rId5"/>
-    <p:sldId id="288" r:id="rId6"/>
+    <p:sldId id="294" r:id="rId5"/>
+    <p:sldId id="295" r:id="rId6"/>
+    <p:sldId id="296" r:id="rId7"/>
+    <p:sldId id="297" r:id="rId8"/>
+    <p:sldId id="298" r:id="rId9"/>
+    <p:sldId id="293" r:id="rId10"/>
+    <p:sldId id="299" r:id="rId11"/>
+    <p:sldId id="288" r:id="rId12"/>
   </p:sldIdLst>
   <p:sldSz cx="12192000" cy="6858000"/>
   <p:notesSz cx="12192000" cy="6858000"/>
@@ -297,7 +303,7 @@
           <a:p>
             <a:fld id="{8438F8DC-35B0-48E6-A86E-42F1F08DD00F}" type="datetimeFigureOut">
               <a:rPr lang="es-ES" smtClean="0"/>
-              <a:t>03/02/2026</a:t>
+              <a:t>16/02/2026</a:t>
             </a:fld>
             <a:endParaRPr lang="es-ES"/>
           </a:p>
@@ -474,7 +480,7 @@
           <a:p>
             <a:fld id="{FACBDC12-F39B-4B97-8F4D-6734F9D366FF}" type="datetimeFigureOut">
               <a:rPr lang="es-ES" smtClean="0"/>
-              <a:t>03/02/2026</a:t>
+              <a:t>16/02/2026</a:t>
             </a:fld>
             <a:endParaRPr lang="es-ES"/>
           </a:p>
@@ -833,6 +839,546 @@
         <p:cNvPr id="1" name="">
           <a:extLst>
             <a:ext uri="{FF2B5EF4-FFF2-40B4-BE49-F238E27FC236}">
+              <a16:creationId xmlns:a16="http://schemas.microsoft.com/office/drawing/2014/main" id="{CF09AE8C-86E4-9BDD-0487-5417FD2EF5B6}"/>
+            </a:ext>
+          </a:extLst>
+        </p:cNvPr>
+        <p:cNvGrpSpPr/>
+        <p:nvPr/>
+      </p:nvGrpSpPr>
+      <p:grpSpPr>
+        <a:xfrm>
+          <a:off x="0" y="0"/>
+          <a:ext cx="0" cy="0"/>
+          <a:chOff x="0" y="0"/>
+          <a:chExt cx="0" cy="0"/>
+        </a:xfrm>
+      </p:grpSpPr>
+      <p:sp>
+        <p:nvSpPr>
+          <p:cNvPr id="2" name="Marcador de imagen de diapositiva 1">
+            <a:extLst>
+              <a:ext uri="{FF2B5EF4-FFF2-40B4-BE49-F238E27FC236}">
+                <a16:creationId xmlns:a16="http://schemas.microsoft.com/office/drawing/2014/main" id="{4028AB0D-664B-36EF-2929-024B3420EC35}"/>
+              </a:ext>
+            </a:extLst>
+          </p:cNvPr>
+          <p:cNvSpPr>
+            <a:spLocks noGrp="1" noRot="1" noChangeAspect="1"/>
+          </p:cNvSpPr>
+          <p:nvPr>
+            <p:ph type="sldImg"/>
+          </p:nvPr>
+        </p:nvSpPr>
+        <p:spPr/>
+      </p:sp>
+      <p:sp>
+        <p:nvSpPr>
+          <p:cNvPr id="3" name="Marcador de notas 2">
+            <a:extLst>
+              <a:ext uri="{FF2B5EF4-FFF2-40B4-BE49-F238E27FC236}">
+                <a16:creationId xmlns:a16="http://schemas.microsoft.com/office/drawing/2014/main" id="{1859E34F-AACB-46FA-AA96-77001746F172}"/>
+              </a:ext>
+            </a:extLst>
+          </p:cNvPr>
+          <p:cNvSpPr>
+            <a:spLocks noGrp="1"/>
+          </p:cNvSpPr>
+          <p:nvPr>
+            <p:ph type="body" idx="1"/>
+          </p:nvPr>
+        </p:nvSpPr>
+        <p:spPr/>
+        <p:txBody>
+          <a:bodyPr/>
+          <a:lstStyle/>
+          <a:p>
+            <a:endParaRPr lang="es-ES" dirty="0"/>
+          </a:p>
+        </p:txBody>
+      </p:sp>
+      <p:sp>
+        <p:nvSpPr>
+          <p:cNvPr id="4" name="Marcador de número de diapositiva 3">
+            <a:extLst>
+              <a:ext uri="{FF2B5EF4-FFF2-40B4-BE49-F238E27FC236}">
+                <a16:creationId xmlns:a16="http://schemas.microsoft.com/office/drawing/2014/main" id="{1328E11E-19E2-C905-6C7D-EABBEC50F470}"/>
+              </a:ext>
+            </a:extLst>
+          </p:cNvPr>
+          <p:cNvSpPr>
+            <a:spLocks noGrp="1"/>
+          </p:cNvSpPr>
+          <p:nvPr>
+            <p:ph type="sldNum" sz="quarter" idx="5"/>
+          </p:nvPr>
+        </p:nvSpPr>
+        <p:spPr/>
+        <p:txBody>
+          <a:bodyPr/>
+          <a:lstStyle/>
+          <a:p>
+            <a:fld id="{676223B9-C868-4436-87D9-1A3152E1157A}" type="slidenum">
+              <a:rPr lang="es-ES" smtClean="0"/>
+              <a:t>4</a:t>
+            </a:fld>
+            <a:endParaRPr lang="es-ES"/>
+          </a:p>
+        </p:txBody>
+      </p:sp>
+    </p:spTree>
+    <p:extLst>
+      <p:ext uri="{BB962C8B-B14F-4D97-AF65-F5344CB8AC3E}">
+        <p14:creationId xmlns:p14="http://schemas.microsoft.com/office/powerpoint/2010/main" val="2755238654"/>
+      </p:ext>
+    </p:extLst>
+  </p:cSld>
+  <p:clrMapOvr>
+    <a:masterClrMapping/>
+  </p:clrMapOvr>
+</p:notes>
+</file>
+
+<file path=ppt/notesSlides/notesSlide3.xml><?xml version="1.0" encoding="utf-8"?>
+<p:notes xmlns:a="http://schemas.openxmlformats.org/drawingml/2006/main" xmlns:r="http://schemas.openxmlformats.org/officeDocument/2006/relationships" xmlns:p="http://schemas.openxmlformats.org/presentationml/2006/main">
+  <p:cSld>
+    <p:spTree>
+      <p:nvGrpSpPr>
+        <p:cNvPr id="1" name="">
+          <a:extLst>
+            <a:ext uri="{FF2B5EF4-FFF2-40B4-BE49-F238E27FC236}">
+              <a16:creationId xmlns:a16="http://schemas.microsoft.com/office/drawing/2014/main" id="{A22FC40B-CF89-0DDD-793D-378A9710893F}"/>
+            </a:ext>
+          </a:extLst>
+        </p:cNvPr>
+        <p:cNvGrpSpPr/>
+        <p:nvPr/>
+      </p:nvGrpSpPr>
+      <p:grpSpPr>
+        <a:xfrm>
+          <a:off x="0" y="0"/>
+          <a:ext cx="0" cy="0"/>
+          <a:chOff x="0" y="0"/>
+          <a:chExt cx="0" cy="0"/>
+        </a:xfrm>
+      </p:grpSpPr>
+      <p:sp>
+        <p:nvSpPr>
+          <p:cNvPr id="2" name="Marcador de imagen de diapositiva 1">
+            <a:extLst>
+              <a:ext uri="{FF2B5EF4-FFF2-40B4-BE49-F238E27FC236}">
+                <a16:creationId xmlns:a16="http://schemas.microsoft.com/office/drawing/2014/main" id="{6BA6759C-278E-85CA-897A-A144543449DA}"/>
+              </a:ext>
+            </a:extLst>
+          </p:cNvPr>
+          <p:cNvSpPr>
+            <a:spLocks noGrp="1" noRot="1" noChangeAspect="1"/>
+          </p:cNvSpPr>
+          <p:nvPr>
+            <p:ph type="sldImg"/>
+          </p:nvPr>
+        </p:nvSpPr>
+        <p:spPr/>
+      </p:sp>
+      <p:sp>
+        <p:nvSpPr>
+          <p:cNvPr id="3" name="Marcador de notas 2">
+            <a:extLst>
+              <a:ext uri="{FF2B5EF4-FFF2-40B4-BE49-F238E27FC236}">
+                <a16:creationId xmlns:a16="http://schemas.microsoft.com/office/drawing/2014/main" id="{957EDA16-6684-E77A-6708-21B2156B3875}"/>
+              </a:ext>
+            </a:extLst>
+          </p:cNvPr>
+          <p:cNvSpPr>
+            <a:spLocks noGrp="1"/>
+          </p:cNvSpPr>
+          <p:nvPr>
+            <p:ph type="body" idx="1"/>
+          </p:nvPr>
+        </p:nvSpPr>
+        <p:spPr/>
+        <p:txBody>
+          <a:bodyPr/>
+          <a:lstStyle/>
+          <a:p>
+            <a:endParaRPr lang="es-ES" dirty="0"/>
+          </a:p>
+        </p:txBody>
+      </p:sp>
+      <p:sp>
+        <p:nvSpPr>
+          <p:cNvPr id="4" name="Marcador de número de diapositiva 3">
+            <a:extLst>
+              <a:ext uri="{FF2B5EF4-FFF2-40B4-BE49-F238E27FC236}">
+                <a16:creationId xmlns:a16="http://schemas.microsoft.com/office/drawing/2014/main" id="{1448EE06-2333-1512-96AC-54549ACE6E1B}"/>
+              </a:ext>
+            </a:extLst>
+          </p:cNvPr>
+          <p:cNvSpPr>
+            <a:spLocks noGrp="1"/>
+          </p:cNvSpPr>
+          <p:nvPr>
+            <p:ph type="sldNum" sz="quarter" idx="5"/>
+          </p:nvPr>
+        </p:nvSpPr>
+        <p:spPr/>
+        <p:txBody>
+          <a:bodyPr/>
+          <a:lstStyle/>
+          <a:p>
+            <a:fld id="{676223B9-C868-4436-87D9-1A3152E1157A}" type="slidenum">
+              <a:rPr lang="es-ES" smtClean="0"/>
+              <a:t>5</a:t>
+            </a:fld>
+            <a:endParaRPr lang="es-ES"/>
+          </a:p>
+        </p:txBody>
+      </p:sp>
+    </p:spTree>
+    <p:extLst>
+      <p:ext uri="{BB962C8B-B14F-4D97-AF65-F5344CB8AC3E}">
+        <p14:creationId xmlns:p14="http://schemas.microsoft.com/office/powerpoint/2010/main" val="3043514325"/>
+      </p:ext>
+    </p:extLst>
+  </p:cSld>
+  <p:clrMapOvr>
+    <a:masterClrMapping/>
+  </p:clrMapOvr>
+</p:notes>
+</file>
+
+<file path=ppt/notesSlides/notesSlide4.xml><?xml version="1.0" encoding="utf-8"?>
+<p:notes xmlns:a="http://schemas.openxmlformats.org/drawingml/2006/main" xmlns:r="http://schemas.openxmlformats.org/officeDocument/2006/relationships" xmlns:p="http://schemas.openxmlformats.org/presentationml/2006/main">
+  <p:cSld>
+    <p:spTree>
+      <p:nvGrpSpPr>
+        <p:cNvPr id="1" name="">
+          <a:extLst>
+            <a:ext uri="{FF2B5EF4-FFF2-40B4-BE49-F238E27FC236}">
+              <a16:creationId xmlns:a16="http://schemas.microsoft.com/office/drawing/2014/main" id="{83E42C5D-3C3E-CB3A-2AA6-7FD507D3D6C0}"/>
+            </a:ext>
+          </a:extLst>
+        </p:cNvPr>
+        <p:cNvGrpSpPr/>
+        <p:nvPr/>
+      </p:nvGrpSpPr>
+      <p:grpSpPr>
+        <a:xfrm>
+          <a:off x="0" y="0"/>
+          <a:ext cx="0" cy="0"/>
+          <a:chOff x="0" y="0"/>
+          <a:chExt cx="0" cy="0"/>
+        </a:xfrm>
+      </p:grpSpPr>
+      <p:sp>
+        <p:nvSpPr>
+          <p:cNvPr id="2" name="Marcador de imagen de diapositiva 1">
+            <a:extLst>
+              <a:ext uri="{FF2B5EF4-FFF2-40B4-BE49-F238E27FC236}">
+                <a16:creationId xmlns:a16="http://schemas.microsoft.com/office/drawing/2014/main" id="{618895C7-BCA1-367D-7C72-25A997EE562E}"/>
+              </a:ext>
+            </a:extLst>
+          </p:cNvPr>
+          <p:cNvSpPr>
+            <a:spLocks noGrp="1" noRot="1" noChangeAspect="1"/>
+          </p:cNvSpPr>
+          <p:nvPr>
+            <p:ph type="sldImg"/>
+          </p:nvPr>
+        </p:nvSpPr>
+        <p:spPr/>
+      </p:sp>
+      <p:sp>
+        <p:nvSpPr>
+          <p:cNvPr id="3" name="Marcador de notas 2">
+            <a:extLst>
+              <a:ext uri="{FF2B5EF4-FFF2-40B4-BE49-F238E27FC236}">
+                <a16:creationId xmlns:a16="http://schemas.microsoft.com/office/drawing/2014/main" id="{AD2C023C-AF6E-A9DC-B123-CD182F2FEAA2}"/>
+              </a:ext>
+            </a:extLst>
+          </p:cNvPr>
+          <p:cNvSpPr>
+            <a:spLocks noGrp="1"/>
+          </p:cNvSpPr>
+          <p:nvPr>
+            <p:ph type="body" idx="1"/>
+          </p:nvPr>
+        </p:nvSpPr>
+        <p:spPr/>
+        <p:txBody>
+          <a:bodyPr/>
+          <a:lstStyle/>
+          <a:p>
+            <a:endParaRPr lang="es-ES" dirty="0"/>
+          </a:p>
+        </p:txBody>
+      </p:sp>
+      <p:sp>
+        <p:nvSpPr>
+          <p:cNvPr id="4" name="Marcador de número de diapositiva 3">
+            <a:extLst>
+              <a:ext uri="{FF2B5EF4-FFF2-40B4-BE49-F238E27FC236}">
+                <a16:creationId xmlns:a16="http://schemas.microsoft.com/office/drawing/2014/main" id="{C169667C-4560-8A4F-B54B-EDDBE04FCBAD}"/>
+              </a:ext>
+            </a:extLst>
+          </p:cNvPr>
+          <p:cNvSpPr>
+            <a:spLocks noGrp="1"/>
+          </p:cNvSpPr>
+          <p:nvPr>
+            <p:ph type="sldNum" sz="quarter" idx="5"/>
+          </p:nvPr>
+        </p:nvSpPr>
+        <p:spPr/>
+        <p:txBody>
+          <a:bodyPr/>
+          <a:lstStyle/>
+          <a:p>
+            <a:fld id="{676223B9-C868-4436-87D9-1A3152E1157A}" type="slidenum">
+              <a:rPr lang="es-ES" smtClean="0"/>
+              <a:t>6</a:t>
+            </a:fld>
+            <a:endParaRPr lang="es-ES"/>
+          </a:p>
+        </p:txBody>
+      </p:sp>
+    </p:spTree>
+    <p:extLst>
+      <p:ext uri="{BB962C8B-B14F-4D97-AF65-F5344CB8AC3E}">
+        <p14:creationId xmlns:p14="http://schemas.microsoft.com/office/powerpoint/2010/main" val="268180898"/>
+      </p:ext>
+    </p:extLst>
+  </p:cSld>
+  <p:clrMapOvr>
+    <a:masterClrMapping/>
+  </p:clrMapOvr>
+</p:notes>
+</file>
+
+<file path=ppt/notesSlides/notesSlide5.xml><?xml version="1.0" encoding="utf-8"?>
+<p:notes xmlns:a="http://schemas.openxmlformats.org/drawingml/2006/main" xmlns:r="http://schemas.openxmlformats.org/officeDocument/2006/relationships" xmlns:p="http://schemas.openxmlformats.org/presentationml/2006/main">
+  <p:cSld>
+    <p:spTree>
+      <p:nvGrpSpPr>
+        <p:cNvPr id="1" name="">
+          <a:extLst>
+            <a:ext uri="{FF2B5EF4-FFF2-40B4-BE49-F238E27FC236}">
+              <a16:creationId xmlns:a16="http://schemas.microsoft.com/office/drawing/2014/main" id="{DD25C244-6E58-C489-EFB8-D7B47AF10EDD}"/>
+            </a:ext>
+          </a:extLst>
+        </p:cNvPr>
+        <p:cNvGrpSpPr/>
+        <p:nvPr/>
+      </p:nvGrpSpPr>
+      <p:grpSpPr>
+        <a:xfrm>
+          <a:off x="0" y="0"/>
+          <a:ext cx="0" cy="0"/>
+          <a:chOff x="0" y="0"/>
+          <a:chExt cx="0" cy="0"/>
+        </a:xfrm>
+      </p:grpSpPr>
+      <p:sp>
+        <p:nvSpPr>
+          <p:cNvPr id="2" name="Marcador de imagen de diapositiva 1">
+            <a:extLst>
+              <a:ext uri="{FF2B5EF4-FFF2-40B4-BE49-F238E27FC236}">
+                <a16:creationId xmlns:a16="http://schemas.microsoft.com/office/drawing/2014/main" id="{912D9892-BA86-6BFA-506E-C344B0988D43}"/>
+              </a:ext>
+            </a:extLst>
+          </p:cNvPr>
+          <p:cNvSpPr>
+            <a:spLocks noGrp="1" noRot="1" noChangeAspect="1"/>
+          </p:cNvSpPr>
+          <p:nvPr>
+            <p:ph type="sldImg"/>
+          </p:nvPr>
+        </p:nvSpPr>
+        <p:spPr/>
+      </p:sp>
+      <p:sp>
+        <p:nvSpPr>
+          <p:cNvPr id="3" name="Marcador de notas 2">
+            <a:extLst>
+              <a:ext uri="{FF2B5EF4-FFF2-40B4-BE49-F238E27FC236}">
+                <a16:creationId xmlns:a16="http://schemas.microsoft.com/office/drawing/2014/main" id="{34ADB3DF-1064-489C-552F-7A105AEC103F}"/>
+              </a:ext>
+            </a:extLst>
+          </p:cNvPr>
+          <p:cNvSpPr>
+            <a:spLocks noGrp="1"/>
+          </p:cNvSpPr>
+          <p:nvPr>
+            <p:ph type="body" idx="1"/>
+          </p:nvPr>
+        </p:nvSpPr>
+        <p:spPr/>
+        <p:txBody>
+          <a:bodyPr/>
+          <a:lstStyle/>
+          <a:p>
+            <a:endParaRPr lang="es-ES" dirty="0"/>
+          </a:p>
+        </p:txBody>
+      </p:sp>
+      <p:sp>
+        <p:nvSpPr>
+          <p:cNvPr id="4" name="Marcador de número de diapositiva 3">
+            <a:extLst>
+              <a:ext uri="{FF2B5EF4-FFF2-40B4-BE49-F238E27FC236}">
+                <a16:creationId xmlns:a16="http://schemas.microsoft.com/office/drawing/2014/main" id="{5AD7B904-D089-CE26-EDBF-F178B5470B84}"/>
+              </a:ext>
+            </a:extLst>
+          </p:cNvPr>
+          <p:cNvSpPr>
+            <a:spLocks noGrp="1"/>
+          </p:cNvSpPr>
+          <p:nvPr>
+            <p:ph type="sldNum" sz="quarter" idx="5"/>
+          </p:nvPr>
+        </p:nvSpPr>
+        <p:spPr/>
+        <p:txBody>
+          <a:bodyPr/>
+          <a:lstStyle/>
+          <a:p>
+            <a:fld id="{676223B9-C868-4436-87D9-1A3152E1157A}" type="slidenum">
+              <a:rPr lang="es-ES" smtClean="0"/>
+              <a:t>7</a:t>
+            </a:fld>
+            <a:endParaRPr lang="es-ES"/>
+          </a:p>
+        </p:txBody>
+      </p:sp>
+    </p:spTree>
+    <p:extLst>
+      <p:ext uri="{BB962C8B-B14F-4D97-AF65-F5344CB8AC3E}">
+        <p14:creationId xmlns:p14="http://schemas.microsoft.com/office/powerpoint/2010/main" val="2447591772"/>
+      </p:ext>
+    </p:extLst>
+  </p:cSld>
+  <p:clrMapOvr>
+    <a:masterClrMapping/>
+  </p:clrMapOvr>
+</p:notes>
+</file>
+
+<file path=ppt/notesSlides/notesSlide6.xml><?xml version="1.0" encoding="utf-8"?>
+<p:notes xmlns:a="http://schemas.openxmlformats.org/drawingml/2006/main" xmlns:r="http://schemas.openxmlformats.org/officeDocument/2006/relationships" xmlns:p="http://schemas.openxmlformats.org/presentationml/2006/main">
+  <p:cSld>
+    <p:spTree>
+      <p:nvGrpSpPr>
+        <p:cNvPr id="1" name="">
+          <a:extLst>
+            <a:ext uri="{FF2B5EF4-FFF2-40B4-BE49-F238E27FC236}">
+              <a16:creationId xmlns:a16="http://schemas.microsoft.com/office/drawing/2014/main" id="{FF4F0507-6EDA-299E-B0E2-15E6A5843311}"/>
+            </a:ext>
+          </a:extLst>
+        </p:cNvPr>
+        <p:cNvGrpSpPr/>
+        <p:nvPr/>
+      </p:nvGrpSpPr>
+      <p:grpSpPr>
+        <a:xfrm>
+          <a:off x="0" y="0"/>
+          <a:ext cx="0" cy="0"/>
+          <a:chOff x="0" y="0"/>
+          <a:chExt cx="0" cy="0"/>
+        </a:xfrm>
+      </p:grpSpPr>
+      <p:sp>
+        <p:nvSpPr>
+          <p:cNvPr id="2" name="Marcador de imagen de diapositiva 1">
+            <a:extLst>
+              <a:ext uri="{FF2B5EF4-FFF2-40B4-BE49-F238E27FC236}">
+                <a16:creationId xmlns:a16="http://schemas.microsoft.com/office/drawing/2014/main" id="{73528BD3-94B1-AF08-432D-1A5FBACA68B1}"/>
+              </a:ext>
+            </a:extLst>
+          </p:cNvPr>
+          <p:cNvSpPr>
+            <a:spLocks noGrp="1" noRot="1" noChangeAspect="1"/>
+          </p:cNvSpPr>
+          <p:nvPr>
+            <p:ph type="sldImg"/>
+          </p:nvPr>
+        </p:nvSpPr>
+        <p:spPr/>
+      </p:sp>
+      <p:sp>
+        <p:nvSpPr>
+          <p:cNvPr id="3" name="Marcador de notas 2">
+            <a:extLst>
+              <a:ext uri="{FF2B5EF4-FFF2-40B4-BE49-F238E27FC236}">
+                <a16:creationId xmlns:a16="http://schemas.microsoft.com/office/drawing/2014/main" id="{89F03A51-149B-C367-FEBE-0CEFC2077397}"/>
+              </a:ext>
+            </a:extLst>
+          </p:cNvPr>
+          <p:cNvSpPr>
+            <a:spLocks noGrp="1"/>
+          </p:cNvSpPr>
+          <p:nvPr>
+            <p:ph type="body" idx="1"/>
+          </p:nvPr>
+        </p:nvSpPr>
+        <p:spPr/>
+        <p:txBody>
+          <a:bodyPr/>
+          <a:lstStyle/>
+          <a:p>
+            <a:endParaRPr lang="es-ES" dirty="0"/>
+          </a:p>
+        </p:txBody>
+      </p:sp>
+      <p:sp>
+        <p:nvSpPr>
+          <p:cNvPr id="4" name="Marcador de número de diapositiva 3">
+            <a:extLst>
+              <a:ext uri="{FF2B5EF4-FFF2-40B4-BE49-F238E27FC236}">
+                <a16:creationId xmlns:a16="http://schemas.microsoft.com/office/drawing/2014/main" id="{2DDF5639-38FA-73EF-FE04-68D5ABF82205}"/>
+              </a:ext>
+            </a:extLst>
+          </p:cNvPr>
+          <p:cNvSpPr>
+            <a:spLocks noGrp="1"/>
+          </p:cNvSpPr>
+          <p:nvPr>
+            <p:ph type="sldNum" sz="quarter" idx="5"/>
+          </p:nvPr>
+        </p:nvSpPr>
+        <p:spPr/>
+        <p:txBody>
+          <a:bodyPr/>
+          <a:lstStyle/>
+          <a:p>
+            <a:fld id="{676223B9-C868-4436-87D9-1A3152E1157A}" type="slidenum">
+              <a:rPr lang="es-ES" smtClean="0"/>
+              <a:t>8</a:t>
+            </a:fld>
+            <a:endParaRPr lang="es-ES"/>
+          </a:p>
+        </p:txBody>
+      </p:sp>
+    </p:spTree>
+    <p:extLst>
+      <p:ext uri="{BB962C8B-B14F-4D97-AF65-F5344CB8AC3E}">
+        <p14:creationId xmlns:p14="http://schemas.microsoft.com/office/powerpoint/2010/main" val="2672071713"/>
+      </p:ext>
+    </p:extLst>
+  </p:cSld>
+  <p:clrMapOvr>
+    <a:masterClrMapping/>
+  </p:clrMapOvr>
+</p:notes>
+</file>
+
+<file path=ppt/notesSlides/notesSlide7.xml><?xml version="1.0" encoding="utf-8"?>
+<p:notes xmlns:a="http://schemas.openxmlformats.org/drawingml/2006/main" xmlns:r="http://schemas.openxmlformats.org/officeDocument/2006/relationships" xmlns:p="http://schemas.openxmlformats.org/presentationml/2006/main">
+  <p:cSld>
+    <p:spTree>
+      <p:nvGrpSpPr>
+        <p:cNvPr id="1" name="">
+          <a:extLst>
+            <a:ext uri="{FF2B5EF4-FFF2-40B4-BE49-F238E27FC236}">
               <a16:creationId xmlns:a16="http://schemas.microsoft.com/office/drawing/2014/main" id="{7B023B86-D15F-9CD8-C5EA-3EAAD8BACCF7}"/>
             </a:ext>
           </a:extLst>
@@ -914,7 +1460,7 @@
           <a:p>
             <a:fld id="{676223B9-C868-4436-87D9-1A3152E1157A}" type="slidenum">
               <a:rPr lang="es-ES" smtClean="0"/>
-              <a:t>4</a:t>
+              <a:t>9</a:t>
             </a:fld>
             <a:endParaRPr lang="es-ES"/>
           </a:p>
@@ -924,6 +1470,114 @@
     <p:extLst>
       <p:ext uri="{BB962C8B-B14F-4D97-AF65-F5344CB8AC3E}">
         <p14:creationId xmlns:p14="http://schemas.microsoft.com/office/powerpoint/2010/main" val="2917382716"/>
+      </p:ext>
+    </p:extLst>
+  </p:cSld>
+  <p:clrMapOvr>
+    <a:masterClrMapping/>
+  </p:clrMapOvr>
+</p:notes>
+</file>
+
+<file path=ppt/notesSlides/notesSlide8.xml><?xml version="1.0" encoding="utf-8"?>
+<p:notes xmlns:a="http://schemas.openxmlformats.org/drawingml/2006/main" xmlns:r="http://schemas.openxmlformats.org/officeDocument/2006/relationships" xmlns:p="http://schemas.openxmlformats.org/presentationml/2006/main">
+  <p:cSld>
+    <p:spTree>
+      <p:nvGrpSpPr>
+        <p:cNvPr id="1" name="">
+          <a:extLst>
+            <a:ext uri="{FF2B5EF4-FFF2-40B4-BE49-F238E27FC236}">
+              <a16:creationId xmlns:a16="http://schemas.microsoft.com/office/drawing/2014/main" id="{D0C37804-7496-6C61-3B08-E1AE437ACE6D}"/>
+            </a:ext>
+          </a:extLst>
+        </p:cNvPr>
+        <p:cNvGrpSpPr/>
+        <p:nvPr/>
+      </p:nvGrpSpPr>
+      <p:grpSpPr>
+        <a:xfrm>
+          <a:off x="0" y="0"/>
+          <a:ext cx="0" cy="0"/>
+          <a:chOff x="0" y="0"/>
+          <a:chExt cx="0" cy="0"/>
+        </a:xfrm>
+      </p:grpSpPr>
+      <p:sp>
+        <p:nvSpPr>
+          <p:cNvPr id="2" name="Marcador de imagen de diapositiva 1">
+            <a:extLst>
+              <a:ext uri="{FF2B5EF4-FFF2-40B4-BE49-F238E27FC236}">
+                <a16:creationId xmlns:a16="http://schemas.microsoft.com/office/drawing/2014/main" id="{0B8E2745-F647-BAB0-180E-574CFAAC41AF}"/>
+              </a:ext>
+            </a:extLst>
+          </p:cNvPr>
+          <p:cNvSpPr>
+            <a:spLocks noGrp="1" noRot="1" noChangeAspect="1"/>
+          </p:cNvSpPr>
+          <p:nvPr>
+            <p:ph type="sldImg"/>
+          </p:nvPr>
+        </p:nvSpPr>
+        <p:spPr/>
+      </p:sp>
+      <p:sp>
+        <p:nvSpPr>
+          <p:cNvPr id="3" name="Marcador de notas 2">
+            <a:extLst>
+              <a:ext uri="{FF2B5EF4-FFF2-40B4-BE49-F238E27FC236}">
+                <a16:creationId xmlns:a16="http://schemas.microsoft.com/office/drawing/2014/main" id="{0A896E71-C67E-8F07-1B66-3D183C25BD08}"/>
+              </a:ext>
+            </a:extLst>
+          </p:cNvPr>
+          <p:cNvSpPr>
+            <a:spLocks noGrp="1"/>
+          </p:cNvSpPr>
+          <p:nvPr>
+            <p:ph type="body" idx="1"/>
+          </p:nvPr>
+        </p:nvSpPr>
+        <p:spPr/>
+        <p:txBody>
+          <a:bodyPr/>
+          <a:lstStyle/>
+          <a:p>
+            <a:endParaRPr lang="es-ES" dirty="0"/>
+          </a:p>
+        </p:txBody>
+      </p:sp>
+      <p:sp>
+        <p:nvSpPr>
+          <p:cNvPr id="4" name="Marcador de número de diapositiva 3">
+            <a:extLst>
+              <a:ext uri="{FF2B5EF4-FFF2-40B4-BE49-F238E27FC236}">
+                <a16:creationId xmlns:a16="http://schemas.microsoft.com/office/drawing/2014/main" id="{5FE7FCB6-B7F0-5C93-519C-2CA4551CBDCA}"/>
+              </a:ext>
+            </a:extLst>
+          </p:cNvPr>
+          <p:cNvSpPr>
+            <a:spLocks noGrp="1"/>
+          </p:cNvSpPr>
+          <p:nvPr>
+            <p:ph type="sldNum" sz="quarter" idx="5"/>
+          </p:nvPr>
+        </p:nvSpPr>
+        <p:spPr/>
+        <p:txBody>
+          <a:bodyPr/>
+          <a:lstStyle/>
+          <a:p>
+            <a:fld id="{676223B9-C868-4436-87D9-1A3152E1157A}" type="slidenum">
+              <a:rPr lang="es-ES" smtClean="0"/>
+              <a:t>10</a:t>
+            </a:fld>
+            <a:endParaRPr lang="es-ES"/>
+          </a:p>
+        </p:txBody>
+      </p:sp>
+    </p:spTree>
+    <p:extLst>
+      <p:ext uri="{BB962C8B-B14F-4D97-AF65-F5344CB8AC3E}">
+        <p14:creationId xmlns:p14="http://schemas.microsoft.com/office/powerpoint/2010/main" val="2108796426"/>
       </p:ext>
     </p:extLst>
   </p:cSld>
@@ -2512,6 +3166,558 @@
             <a:fld id="{B6F15528-21DE-4FAA-801E-634DDDAF4B2B}" type="slidenum">
               <a:rPr lang="es-ES" smtClean="0"/>
               <a:t>1</a:t>
+            </a:fld>
+            <a:endParaRPr lang="es-ES"/>
+          </a:p>
+        </p:txBody>
+      </p:sp>
+    </p:spTree>
+  </p:cSld>
+  <p:clrMapOvr>
+    <a:masterClrMapping/>
+  </p:clrMapOvr>
+</p:sld>
+</file>
+
+<file path=ppt/slides/slide10.xml><?xml version="1.0" encoding="utf-8"?>
+<p:sld xmlns:a="http://schemas.openxmlformats.org/drawingml/2006/main" xmlns:r="http://schemas.openxmlformats.org/officeDocument/2006/relationships" xmlns:p="http://schemas.openxmlformats.org/presentationml/2006/main">
+  <p:cSld>
+    <p:spTree>
+      <p:nvGrpSpPr>
+        <p:cNvPr id="1" name="">
+          <a:extLst>
+            <a:ext uri="{FF2B5EF4-FFF2-40B4-BE49-F238E27FC236}">
+              <a16:creationId xmlns:a16="http://schemas.microsoft.com/office/drawing/2014/main" id="{9835CE10-D664-6953-B509-B579BD806D3B}"/>
+            </a:ext>
+          </a:extLst>
+        </p:cNvPr>
+        <p:cNvGrpSpPr/>
+        <p:nvPr/>
+      </p:nvGrpSpPr>
+      <p:grpSpPr>
+        <a:xfrm>
+          <a:off x="0" y="0"/>
+          <a:ext cx="0" cy="0"/>
+          <a:chOff x="0" y="0"/>
+          <a:chExt cx="0" cy="0"/>
+        </a:xfrm>
+      </p:grpSpPr>
+      <p:sp>
+        <p:nvSpPr>
+          <p:cNvPr id="16" name="object 16">
+            <a:extLst>
+              <a:ext uri="{FF2B5EF4-FFF2-40B4-BE49-F238E27FC236}">
+                <a16:creationId xmlns:a16="http://schemas.microsoft.com/office/drawing/2014/main" id="{D5922014-72B8-C10C-C2C4-057861F5497A}"/>
+              </a:ext>
+            </a:extLst>
+          </p:cNvPr>
+          <p:cNvSpPr txBox="1">
+            <a:spLocks noGrp="1"/>
+          </p:cNvSpPr>
+          <p:nvPr>
+            <p:ph type="title"/>
+          </p:nvPr>
+        </p:nvSpPr>
+        <p:spPr>
+          <a:xfrm>
+            <a:off x="685800" y="408883"/>
+            <a:ext cx="10994410" cy="397545"/>
+          </a:xfrm>
+          <a:prstGeom prst="rect">
+            <a:avLst/>
+          </a:prstGeom>
+        </p:spPr>
+        <p:txBody>
+          <a:bodyPr vert="horz" wrap="square" lIns="0" tIns="12700" rIns="0" bIns="0" rtlCol="0">
+            <a:spAutoFit/>
+          </a:bodyPr>
+          <a:lstStyle/>
+          <a:p>
+            <a:pPr marL="12700">
+              <a:lnSpc>
+                <a:spcPct val="100000"/>
+              </a:lnSpc>
+              <a:spcBef>
+                <a:spcPts val="100"/>
+              </a:spcBef>
+            </a:pPr>
+            <a:r>
+              <a:rPr lang="en-US" sz="2500" dirty="0"/>
+              <a:t>Learning outcome #2 – Multimode Interference (MMI) Coupler cross-section</a:t>
+            </a:r>
+            <a:endParaRPr lang="en-US" sz="2500" b="0" dirty="0">
+              <a:latin typeface="+mj-lt"/>
+              <a:cs typeface="Lucida Sans"/>
+            </a:endParaRPr>
+          </a:p>
+        </p:txBody>
+      </p:sp>
+      <p:pic>
+        <p:nvPicPr>
+          <p:cNvPr id="83" name="Gráfico 82">
+            <a:extLst>
+              <a:ext uri="{FF2B5EF4-FFF2-40B4-BE49-F238E27FC236}">
+                <a16:creationId xmlns:a16="http://schemas.microsoft.com/office/drawing/2014/main" id="{8BB32A78-55E1-251E-EA8E-3470D7F87018}"/>
+              </a:ext>
+            </a:extLst>
+          </p:cNvPr>
+          <p:cNvPicPr>
+            <a:picLocks noChangeAspect="1"/>
+          </p:cNvPicPr>
+          <p:nvPr/>
+        </p:nvPicPr>
+        <p:blipFill>
+          <a:blip r:embed="rId3">
+            <a:extLst>
+              <a:ext uri="{96DAC541-7B7A-43D3-8B79-37D633B846F1}">
+                <asvg:svgBlip xmlns:asvg="http://schemas.microsoft.com/office/drawing/2016/SVG/main" r:embed="rId4"/>
+              </a:ext>
+            </a:extLst>
+          </a:blip>
+          <a:stretch>
+            <a:fillRect/>
+          </a:stretch>
+        </p:blipFill>
+        <p:spPr>
+          <a:xfrm>
+            <a:off x="5045006" y="6356057"/>
+            <a:ext cx="6409575" cy="363174"/>
+          </a:xfrm>
+          <a:prstGeom prst="rect">
+            <a:avLst/>
+          </a:prstGeom>
+        </p:spPr>
+      </p:pic>
+      <p:sp>
+        <p:nvSpPr>
+          <p:cNvPr id="84" name="Marcador de número de diapositiva 83">
+            <a:extLst>
+              <a:ext uri="{FF2B5EF4-FFF2-40B4-BE49-F238E27FC236}">
+                <a16:creationId xmlns:a16="http://schemas.microsoft.com/office/drawing/2014/main" id="{0166890E-63B1-941E-E413-4581969BFC5C}"/>
+              </a:ext>
+            </a:extLst>
+          </p:cNvPr>
+          <p:cNvSpPr>
+            <a:spLocks noGrp="1"/>
+          </p:cNvSpPr>
+          <p:nvPr>
+            <p:ph type="sldNum" sz="quarter" idx="7"/>
+          </p:nvPr>
+        </p:nvSpPr>
+        <p:spPr/>
+        <p:txBody>
+          <a:bodyPr/>
+          <a:lstStyle/>
+          <a:p>
+            <a:fld id="{B6F15528-21DE-4FAA-801E-634DDDAF4B2B}" type="slidenum">
+              <a:rPr lang="es-ES" smtClean="0"/>
+              <a:t>10</a:t>
+            </a:fld>
+            <a:endParaRPr lang="es-ES"/>
+          </a:p>
+        </p:txBody>
+      </p:sp>
+      <p:sp>
+        <p:nvSpPr>
+          <p:cNvPr id="3" name="Marcador de pie de página 2">
+            <a:extLst>
+              <a:ext uri="{FF2B5EF4-FFF2-40B4-BE49-F238E27FC236}">
+                <a16:creationId xmlns:a16="http://schemas.microsoft.com/office/drawing/2014/main" id="{22D309BD-0315-4759-6D1C-7C0F8C441716}"/>
+              </a:ext>
+            </a:extLst>
+          </p:cNvPr>
+          <p:cNvSpPr>
+            <a:spLocks noGrp="1"/>
+          </p:cNvSpPr>
+          <p:nvPr>
+            <p:ph type="ftr" sz="quarter" idx="5"/>
+          </p:nvPr>
+        </p:nvSpPr>
+        <p:spPr/>
+        <p:txBody>
+          <a:bodyPr/>
+          <a:lstStyle/>
+          <a:p>
+            <a:pPr marL="12700">
+              <a:spcBef>
+                <a:spcPts val="15"/>
+              </a:spcBef>
+            </a:pPr>
+            <a:r>
+              <a:rPr lang="es-ES" spc="-5"/>
+              <a:t>LAB 0.2. COUPLERS</a:t>
+            </a:r>
+            <a:endParaRPr lang="es-ES" spc="-5" dirty="0"/>
+          </a:p>
+        </p:txBody>
+      </p:sp>
+      <p:sp>
+        <p:nvSpPr>
+          <p:cNvPr id="4" name="Marcador de texto 2">
+            <a:extLst>
+              <a:ext uri="{FF2B5EF4-FFF2-40B4-BE49-F238E27FC236}">
+                <a16:creationId xmlns:a16="http://schemas.microsoft.com/office/drawing/2014/main" id="{2FA91C40-EE7F-2B4B-07FC-CE9665D238B0}"/>
+              </a:ext>
+            </a:extLst>
+          </p:cNvPr>
+          <p:cNvSpPr txBox="1">
+            <a:spLocks/>
+          </p:cNvSpPr>
+          <p:nvPr/>
+        </p:nvSpPr>
+        <p:spPr>
+          <a:xfrm>
+            <a:off x="608012" y="1295400"/>
+            <a:ext cx="11048999" cy="4958137"/>
+          </a:xfrm>
+          <a:prstGeom prst="rect">
+            <a:avLst/>
+          </a:prstGeom>
+        </p:spPr>
+        <p:txBody>
+          <a:bodyPr>
+            <a:normAutofit/>
+          </a:bodyPr>
+          <a:lstStyle>
+            <a:lvl1pPr marL="0">
+              <a:defRPr>
+                <a:latin typeface="+mn-lt"/>
+                <a:ea typeface="+mn-ea"/>
+                <a:cs typeface="+mn-cs"/>
+              </a:defRPr>
+            </a:lvl1pPr>
+            <a:lvl2pPr marL="457200">
+              <a:defRPr>
+                <a:latin typeface="+mn-lt"/>
+                <a:ea typeface="+mn-ea"/>
+                <a:cs typeface="+mn-cs"/>
+              </a:defRPr>
+            </a:lvl2pPr>
+            <a:lvl3pPr marL="914400">
+              <a:defRPr>
+                <a:latin typeface="+mn-lt"/>
+                <a:ea typeface="+mn-ea"/>
+                <a:cs typeface="+mn-cs"/>
+              </a:defRPr>
+            </a:lvl3pPr>
+            <a:lvl4pPr marL="1371600">
+              <a:defRPr>
+                <a:latin typeface="+mn-lt"/>
+                <a:ea typeface="+mn-ea"/>
+                <a:cs typeface="+mn-cs"/>
+              </a:defRPr>
+            </a:lvl4pPr>
+            <a:lvl5pPr marL="1828800">
+              <a:defRPr>
+                <a:latin typeface="+mn-lt"/>
+                <a:ea typeface="+mn-ea"/>
+                <a:cs typeface="+mn-cs"/>
+              </a:defRPr>
+            </a:lvl5pPr>
+            <a:lvl6pPr marL="2286000">
+              <a:defRPr>
+                <a:latin typeface="+mn-lt"/>
+                <a:ea typeface="+mn-ea"/>
+                <a:cs typeface="+mn-cs"/>
+              </a:defRPr>
+            </a:lvl6pPr>
+            <a:lvl7pPr marL="2743200">
+              <a:defRPr>
+                <a:latin typeface="+mn-lt"/>
+                <a:ea typeface="+mn-ea"/>
+                <a:cs typeface="+mn-cs"/>
+              </a:defRPr>
+            </a:lvl7pPr>
+            <a:lvl8pPr marL="3200400">
+              <a:defRPr>
+                <a:latin typeface="+mn-lt"/>
+                <a:ea typeface="+mn-ea"/>
+                <a:cs typeface="+mn-cs"/>
+              </a:defRPr>
+            </a:lvl8pPr>
+            <a:lvl9pPr marL="3657600">
+              <a:defRPr>
+                <a:latin typeface="+mn-lt"/>
+                <a:ea typeface="+mn-ea"/>
+                <a:cs typeface="+mn-cs"/>
+              </a:defRPr>
+            </a:lvl9pPr>
+          </a:lstStyle>
+          <a:p>
+            <a:pPr algn="just"/>
+            <a:endParaRPr lang="en-US" sz="2000" b="1" i="1" u="sng" dirty="0"/>
+          </a:p>
+          <a:p>
+            <a:pPr algn="just"/>
+            <a:endParaRPr lang="en-US" sz="2000" kern="0" dirty="0">
+              <a:solidFill>
+                <a:sysClr val="windowText" lastClr="000000"/>
+              </a:solidFill>
+            </a:endParaRPr>
+          </a:p>
+        </p:txBody>
+      </p:sp>
+      <p:sp>
+        <p:nvSpPr>
+          <p:cNvPr id="2" name="CuadroTexto 1">
+            <a:extLst>
+              <a:ext uri="{FF2B5EF4-FFF2-40B4-BE49-F238E27FC236}">
+                <a16:creationId xmlns:a16="http://schemas.microsoft.com/office/drawing/2014/main" id="{F1BFB1A4-0E68-B2C4-3C3F-4D100A857FD0}"/>
+              </a:ext>
+            </a:extLst>
+          </p:cNvPr>
+          <p:cNvSpPr txBox="1"/>
+          <p:nvPr/>
+        </p:nvSpPr>
+        <p:spPr>
+          <a:xfrm>
+            <a:off x="609441" y="4860334"/>
+            <a:ext cx="11199971" cy="1200329"/>
+          </a:xfrm>
+          <a:prstGeom prst="rect">
+            <a:avLst/>
+          </a:prstGeom>
+          <a:solidFill>
+            <a:schemeClr val="bg1">
+              <a:lumMod val="95000"/>
+            </a:schemeClr>
+          </a:solidFill>
+          <a:ln w="28575">
+            <a:solidFill>
+              <a:srgbClr val="E0700D"/>
+            </a:solidFill>
+          </a:ln>
+        </p:spPr>
+        <p:txBody>
+          <a:bodyPr wrap="square" rtlCol="0">
+            <a:spAutoFit/>
+          </a:bodyPr>
+          <a:lstStyle/>
+          <a:p>
+            <a:pPr algn="just"/>
+            <a:r>
+              <a:rPr lang="en-US" sz="1200" dirty="0">
+                <a:latin typeface="Arial" panose="020B0604020202020204" pitchFamily="34" charset="0"/>
+                <a:cs typeface="Arial" panose="020B0604020202020204" pitchFamily="34" charset="0"/>
+              </a:rPr>
+              <a:t>Document all your results (neff, plot fields </a:t>
+            </a:r>
+            <a:r>
+              <a:rPr lang="en-US" sz="1200">
+                <a:latin typeface="Arial" panose="020B0604020202020204" pitchFamily="34" charset="0"/>
+                <a:cs typeface="Arial" panose="020B0604020202020204" pitchFamily="34" charset="0"/>
+              </a:rPr>
+              <a:t>of different modes, </a:t>
+            </a:r>
+            <a:r>
+              <a:rPr lang="en-US" sz="1200" dirty="0">
+                <a:latin typeface="Arial" panose="020B0604020202020204" pitchFamily="34" charset="0"/>
+                <a:cs typeface="Arial" panose="020B0604020202020204" pitchFamily="34" charset="0"/>
+              </a:rPr>
+              <a:t>comparison between </a:t>
+            </a:r>
+            <a:r>
+              <a:rPr lang="en-US" sz="1200">
+                <a:latin typeface="Arial" panose="020B0604020202020204" pitchFamily="34" charset="0"/>
+                <a:cs typeface="Arial" panose="020B0604020202020204" pitchFamily="34" charset="0"/>
+              </a:rPr>
+              <a:t>different polarizations…)</a:t>
+            </a:r>
+            <a:endParaRPr lang="en-US" sz="1200" dirty="0">
+              <a:latin typeface="Arial" panose="020B0604020202020204" pitchFamily="34" charset="0"/>
+              <a:cs typeface="Arial" panose="020B0604020202020204" pitchFamily="34" charset="0"/>
+            </a:endParaRPr>
+          </a:p>
+          <a:p>
+            <a:pPr algn="just"/>
+            <a:endParaRPr lang="en-US" sz="1200" dirty="0">
+              <a:latin typeface="Arial" panose="020B0604020202020204" pitchFamily="34" charset="0"/>
+              <a:cs typeface="Arial" panose="020B0604020202020204" pitchFamily="34" charset="0"/>
+            </a:endParaRPr>
+          </a:p>
+          <a:p>
+            <a:pPr algn="just"/>
+            <a:endParaRPr lang="en-US" sz="1200" dirty="0">
+              <a:latin typeface="Arial" panose="020B0604020202020204" pitchFamily="34" charset="0"/>
+              <a:cs typeface="Arial" panose="020B0604020202020204" pitchFamily="34" charset="0"/>
+            </a:endParaRPr>
+          </a:p>
+          <a:p>
+            <a:pPr algn="just"/>
+            <a:endParaRPr lang="en-US" sz="1200" dirty="0">
+              <a:latin typeface="Arial" panose="020B0604020202020204" pitchFamily="34" charset="0"/>
+              <a:cs typeface="Arial" panose="020B0604020202020204" pitchFamily="34" charset="0"/>
+            </a:endParaRPr>
+          </a:p>
+          <a:p>
+            <a:pPr algn="just"/>
+            <a:endParaRPr lang="en-US" sz="1200" dirty="0">
+              <a:latin typeface="Arial" panose="020B0604020202020204" pitchFamily="34" charset="0"/>
+              <a:cs typeface="Arial" panose="020B0604020202020204" pitchFamily="34" charset="0"/>
+            </a:endParaRPr>
+          </a:p>
+          <a:p>
+            <a:pPr algn="just"/>
+            <a:endParaRPr lang="en-US" sz="1200" dirty="0">
+              <a:latin typeface="Arial" panose="020B0604020202020204" pitchFamily="34" charset="0"/>
+              <a:cs typeface="Arial" panose="020B0604020202020204" pitchFamily="34" charset="0"/>
+            </a:endParaRPr>
+          </a:p>
+        </p:txBody>
+      </p:sp>
+    </p:spTree>
+    <p:extLst>
+      <p:ext uri="{BB962C8B-B14F-4D97-AF65-F5344CB8AC3E}">
+        <p14:creationId xmlns:p14="http://schemas.microsoft.com/office/powerpoint/2010/main" val="685207357"/>
+      </p:ext>
+    </p:extLst>
+  </p:cSld>
+  <p:clrMapOvr>
+    <a:masterClrMapping/>
+  </p:clrMapOvr>
+</p:sld>
+</file>
+
+<file path=ppt/slides/slide11.xml><?xml version="1.0" encoding="utf-8"?>
+<p:sld xmlns:a="http://schemas.openxmlformats.org/drawingml/2006/main" xmlns:r="http://schemas.openxmlformats.org/officeDocument/2006/relationships" xmlns:p="http://schemas.openxmlformats.org/presentationml/2006/main">
+  <p:cSld>
+    <p:spTree>
+      <p:nvGrpSpPr>
+        <p:cNvPr id="1" name=""/>
+        <p:cNvGrpSpPr/>
+        <p:nvPr/>
+      </p:nvGrpSpPr>
+      <p:grpSpPr>
+        <a:xfrm>
+          <a:off x="0" y="0"/>
+          <a:ext cx="0" cy="0"/>
+          <a:chOff x="0" y="0"/>
+          <a:chExt cx="0" cy="0"/>
+        </a:xfrm>
+      </p:grpSpPr>
+      <p:sp>
+        <p:nvSpPr>
+          <p:cNvPr id="3" name="object 3"/>
+          <p:cNvSpPr/>
+          <p:nvPr/>
+        </p:nvSpPr>
+        <p:spPr>
+          <a:xfrm>
+            <a:off x="3945635" y="2636520"/>
+            <a:ext cx="8246363" cy="1584959"/>
+          </a:xfrm>
+          <a:prstGeom prst="rect">
+            <a:avLst/>
+          </a:prstGeom>
+          <a:blipFill>
+            <a:blip r:embed="rId2" cstate="print"/>
+            <a:stretch>
+              <a:fillRect/>
+            </a:stretch>
+          </a:blipFill>
+        </p:spPr>
+        <p:txBody>
+          <a:bodyPr wrap="square" lIns="0" tIns="0" rIns="0" bIns="0" rtlCol="0"/>
+          <a:lstStyle/>
+          <a:p>
+            <a:endParaRPr/>
+          </a:p>
+        </p:txBody>
+      </p:sp>
+      <p:sp>
+        <p:nvSpPr>
+          <p:cNvPr id="4" name="object 4"/>
+          <p:cNvSpPr txBox="1">
+            <a:spLocks noGrp="1"/>
+          </p:cNvSpPr>
+          <p:nvPr>
+            <p:ph type="title"/>
+          </p:nvPr>
+        </p:nvSpPr>
+        <p:spPr>
+          <a:xfrm>
+            <a:off x="4513326" y="3165729"/>
+            <a:ext cx="2233295" cy="513715"/>
+          </a:xfrm>
+          <a:prstGeom prst="rect">
+            <a:avLst/>
+          </a:prstGeom>
+        </p:spPr>
+        <p:txBody>
+          <a:bodyPr vert="horz" wrap="square" lIns="0" tIns="13335" rIns="0" bIns="0" rtlCol="0">
+            <a:spAutoFit/>
+          </a:bodyPr>
+          <a:lstStyle/>
+          <a:p>
+            <a:pPr marL="12700">
+              <a:lnSpc>
+                <a:spcPct val="100000"/>
+              </a:lnSpc>
+              <a:spcBef>
+                <a:spcPts val="105"/>
+              </a:spcBef>
+            </a:pPr>
+            <a:r>
+              <a:rPr sz="3200" b="1" spc="-5" dirty="0">
+                <a:solidFill>
+                  <a:srgbClr val="FFFFFF"/>
+                </a:solidFill>
+                <a:latin typeface="Lucida Sans"/>
+                <a:cs typeface="Lucida Sans"/>
+              </a:rPr>
+              <a:t>Thank</a:t>
+            </a:r>
+            <a:r>
+              <a:rPr sz="3200" b="1" spc="-55" dirty="0">
+                <a:solidFill>
+                  <a:srgbClr val="FFFFFF"/>
+                </a:solidFill>
+                <a:latin typeface="Lucida Sans"/>
+                <a:cs typeface="Lucida Sans"/>
+              </a:rPr>
+              <a:t> </a:t>
+            </a:r>
+            <a:r>
+              <a:rPr sz="3200" b="1" dirty="0">
+                <a:solidFill>
+                  <a:srgbClr val="FFFFFF"/>
+                </a:solidFill>
+                <a:latin typeface="Lucida Sans"/>
+                <a:cs typeface="Lucida Sans"/>
+              </a:rPr>
+              <a:t>you</a:t>
+            </a:r>
+            <a:endParaRPr sz="3200">
+              <a:latin typeface="Lucida Sans"/>
+              <a:cs typeface="Lucida Sans"/>
+            </a:endParaRPr>
+          </a:p>
+        </p:txBody>
+      </p:sp>
+      <p:sp>
+        <p:nvSpPr>
+          <p:cNvPr id="5" name="Marcador de número de diapositiva 4">
+            <a:extLst>
+              <a:ext uri="{FF2B5EF4-FFF2-40B4-BE49-F238E27FC236}">
+                <a16:creationId xmlns:a16="http://schemas.microsoft.com/office/drawing/2014/main" id="{B052DA19-AD24-7D24-2AE9-51F8F5A7F5E0}"/>
+              </a:ext>
+            </a:extLst>
+          </p:cNvPr>
+          <p:cNvSpPr>
+            <a:spLocks noGrp="1"/>
+          </p:cNvSpPr>
+          <p:nvPr>
+            <p:ph type="sldNum" sz="quarter" idx="7"/>
+          </p:nvPr>
+        </p:nvSpPr>
+        <p:spPr/>
+        <p:txBody>
+          <a:bodyPr/>
+          <a:lstStyle/>
+          <a:p>
+            <a:fld id="{B6F15528-21DE-4FAA-801E-634DDDAF4B2B}" type="slidenum">
+              <a:rPr lang="es-ES" smtClean="0"/>
+              <a:t>11</a:t>
             </a:fld>
             <a:endParaRPr lang="es-ES"/>
           </a:p>
@@ -5153,6 +6359,3675 @@
         <p:cNvPr id="1" name="">
           <a:extLst>
             <a:ext uri="{FF2B5EF4-FFF2-40B4-BE49-F238E27FC236}">
+              <a16:creationId xmlns:a16="http://schemas.microsoft.com/office/drawing/2014/main" id="{87881971-005D-6871-EB8A-370649987953}"/>
+            </a:ext>
+          </a:extLst>
+        </p:cNvPr>
+        <p:cNvGrpSpPr/>
+        <p:nvPr/>
+      </p:nvGrpSpPr>
+      <p:grpSpPr>
+        <a:xfrm>
+          <a:off x="0" y="0"/>
+          <a:ext cx="0" cy="0"/>
+          <a:chOff x="0" y="0"/>
+          <a:chExt cx="0" cy="0"/>
+        </a:xfrm>
+      </p:grpSpPr>
+      <p:sp>
+        <p:nvSpPr>
+          <p:cNvPr id="16" name="object 16">
+            <a:extLst>
+              <a:ext uri="{FF2B5EF4-FFF2-40B4-BE49-F238E27FC236}">
+                <a16:creationId xmlns:a16="http://schemas.microsoft.com/office/drawing/2014/main" id="{F8244976-BA7C-A979-6515-82ADB1755711}"/>
+              </a:ext>
+            </a:extLst>
+          </p:cNvPr>
+          <p:cNvSpPr txBox="1">
+            <a:spLocks noGrp="1"/>
+          </p:cNvSpPr>
+          <p:nvPr>
+            <p:ph type="title"/>
+          </p:nvPr>
+        </p:nvSpPr>
+        <p:spPr>
+          <a:xfrm>
+            <a:off x="685800" y="408883"/>
+            <a:ext cx="10994410" cy="782265"/>
+          </a:xfrm>
+          <a:prstGeom prst="rect">
+            <a:avLst/>
+          </a:prstGeom>
+        </p:spPr>
+        <p:txBody>
+          <a:bodyPr vert="horz" wrap="square" lIns="0" tIns="12700" rIns="0" bIns="0" rtlCol="0">
+            <a:spAutoFit/>
+          </a:bodyPr>
+          <a:lstStyle/>
+          <a:p>
+            <a:pPr marL="12700">
+              <a:lnSpc>
+                <a:spcPct val="100000"/>
+              </a:lnSpc>
+              <a:spcBef>
+                <a:spcPts val="100"/>
+              </a:spcBef>
+            </a:pPr>
+            <a:r>
+              <a:rPr lang="en-US" sz="2500" dirty="0"/>
+              <a:t>Learning outcome #1 – Directional coupler cross-section in </a:t>
+            </a:r>
+            <a:r>
+              <a:rPr lang="en-US" sz="2500" dirty="0" err="1"/>
+              <a:t>GDSFactory</a:t>
+            </a:r>
+            <a:br>
+              <a:rPr lang="es-ES" sz="2500" spc="-5" dirty="0">
+                <a:latin typeface="+mj-lt"/>
+                <a:cs typeface="Lucida Sans"/>
+              </a:rPr>
+            </a:br>
+            <a:endParaRPr sz="2500" b="0" dirty="0">
+              <a:latin typeface="+mj-lt"/>
+              <a:cs typeface="Lucida Sans"/>
+            </a:endParaRPr>
+          </a:p>
+        </p:txBody>
+      </p:sp>
+      <p:pic>
+        <p:nvPicPr>
+          <p:cNvPr id="83" name="Gráfico 82">
+            <a:extLst>
+              <a:ext uri="{FF2B5EF4-FFF2-40B4-BE49-F238E27FC236}">
+                <a16:creationId xmlns:a16="http://schemas.microsoft.com/office/drawing/2014/main" id="{F2D5F978-59D6-00E1-2DC0-CF4D11714AF1}"/>
+              </a:ext>
+            </a:extLst>
+          </p:cNvPr>
+          <p:cNvPicPr>
+            <a:picLocks noChangeAspect="1"/>
+          </p:cNvPicPr>
+          <p:nvPr/>
+        </p:nvPicPr>
+        <p:blipFill>
+          <a:blip r:embed="rId3">
+            <a:extLst>
+              <a:ext uri="{96DAC541-7B7A-43D3-8B79-37D633B846F1}">
+                <asvg:svgBlip xmlns:asvg="http://schemas.microsoft.com/office/drawing/2016/SVG/main" r:embed="rId4"/>
+              </a:ext>
+            </a:extLst>
+          </a:blip>
+          <a:stretch>
+            <a:fillRect/>
+          </a:stretch>
+        </p:blipFill>
+        <p:spPr>
+          <a:xfrm>
+            <a:off x="5045006" y="6356057"/>
+            <a:ext cx="6409575" cy="363174"/>
+          </a:xfrm>
+          <a:prstGeom prst="rect">
+            <a:avLst/>
+          </a:prstGeom>
+        </p:spPr>
+      </p:pic>
+      <p:sp>
+        <p:nvSpPr>
+          <p:cNvPr id="84" name="Marcador de número de diapositiva 83">
+            <a:extLst>
+              <a:ext uri="{FF2B5EF4-FFF2-40B4-BE49-F238E27FC236}">
+                <a16:creationId xmlns:a16="http://schemas.microsoft.com/office/drawing/2014/main" id="{8A7F42FE-46E3-A163-94F9-FF3A76AD0DCF}"/>
+              </a:ext>
+            </a:extLst>
+          </p:cNvPr>
+          <p:cNvSpPr>
+            <a:spLocks noGrp="1"/>
+          </p:cNvSpPr>
+          <p:nvPr>
+            <p:ph type="sldNum" sz="quarter" idx="7"/>
+          </p:nvPr>
+        </p:nvSpPr>
+        <p:spPr/>
+        <p:txBody>
+          <a:bodyPr/>
+          <a:lstStyle/>
+          <a:p>
+            <a:fld id="{B6F15528-21DE-4FAA-801E-634DDDAF4B2B}" type="slidenum">
+              <a:rPr lang="es-ES" smtClean="0"/>
+              <a:t>4</a:t>
+            </a:fld>
+            <a:endParaRPr lang="es-ES"/>
+          </a:p>
+        </p:txBody>
+      </p:sp>
+      <p:sp>
+        <p:nvSpPr>
+          <p:cNvPr id="3" name="Marcador de pie de página 2">
+            <a:extLst>
+              <a:ext uri="{FF2B5EF4-FFF2-40B4-BE49-F238E27FC236}">
+                <a16:creationId xmlns:a16="http://schemas.microsoft.com/office/drawing/2014/main" id="{22D7C11A-F35E-D8C4-AE8A-34D4F0586D38}"/>
+              </a:ext>
+            </a:extLst>
+          </p:cNvPr>
+          <p:cNvSpPr>
+            <a:spLocks noGrp="1"/>
+          </p:cNvSpPr>
+          <p:nvPr>
+            <p:ph type="ftr" sz="quarter" idx="5"/>
+          </p:nvPr>
+        </p:nvSpPr>
+        <p:spPr/>
+        <p:txBody>
+          <a:bodyPr/>
+          <a:lstStyle/>
+          <a:p>
+            <a:pPr marL="12700">
+              <a:spcBef>
+                <a:spcPts val="15"/>
+              </a:spcBef>
+            </a:pPr>
+            <a:r>
+              <a:rPr lang="es-ES" spc="-5"/>
+              <a:t>LAB 0.2. COUPLERS</a:t>
+            </a:r>
+            <a:endParaRPr lang="es-ES" spc="-5" dirty="0"/>
+          </a:p>
+        </p:txBody>
+      </p:sp>
+      <p:sp>
+        <p:nvSpPr>
+          <p:cNvPr id="4" name="Marcador de texto 2">
+            <a:extLst>
+              <a:ext uri="{FF2B5EF4-FFF2-40B4-BE49-F238E27FC236}">
+                <a16:creationId xmlns:a16="http://schemas.microsoft.com/office/drawing/2014/main" id="{80656308-0E6A-EA10-3CDA-1B698F565840}"/>
+              </a:ext>
+            </a:extLst>
+          </p:cNvPr>
+          <p:cNvSpPr txBox="1">
+            <a:spLocks/>
+          </p:cNvSpPr>
+          <p:nvPr/>
+        </p:nvSpPr>
+        <p:spPr>
+          <a:xfrm>
+            <a:off x="608012" y="1295400"/>
+            <a:ext cx="11048999" cy="4958137"/>
+          </a:xfrm>
+          <a:prstGeom prst="rect">
+            <a:avLst/>
+          </a:prstGeom>
+        </p:spPr>
+        <p:txBody>
+          <a:bodyPr>
+            <a:normAutofit/>
+          </a:bodyPr>
+          <a:lstStyle>
+            <a:lvl1pPr marL="0">
+              <a:defRPr>
+                <a:latin typeface="+mn-lt"/>
+                <a:ea typeface="+mn-ea"/>
+                <a:cs typeface="+mn-cs"/>
+              </a:defRPr>
+            </a:lvl1pPr>
+            <a:lvl2pPr marL="457200">
+              <a:defRPr>
+                <a:latin typeface="+mn-lt"/>
+                <a:ea typeface="+mn-ea"/>
+                <a:cs typeface="+mn-cs"/>
+              </a:defRPr>
+            </a:lvl2pPr>
+            <a:lvl3pPr marL="914400">
+              <a:defRPr>
+                <a:latin typeface="+mn-lt"/>
+                <a:ea typeface="+mn-ea"/>
+                <a:cs typeface="+mn-cs"/>
+              </a:defRPr>
+            </a:lvl3pPr>
+            <a:lvl4pPr marL="1371600">
+              <a:defRPr>
+                <a:latin typeface="+mn-lt"/>
+                <a:ea typeface="+mn-ea"/>
+                <a:cs typeface="+mn-cs"/>
+              </a:defRPr>
+            </a:lvl4pPr>
+            <a:lvl5pPr marL="1828800">
+              <a:defRPr>
+                <a:latin typeface="+mn-lt"/>
+                <a:ea typeface="+mn-ea"/>
+                <a:cs typeface="+mn-cs"/>
+              </a:defRPr>
+            </a:lvl5pPr>
+            <a:lvl6pPr marL="2286000">
+              <a:defRPr>
+                <a:latin typeface="+mn-lt"/>
+                <a:ea typeface="+mn-ea"/>
+                <a:cs typeface="+mn-cs"/>
+              </a:defRPr>
+            </a:lvl6pPr>
+            <a:lvl7pPr marL="2743200">
+              <a:defRPr>
+                <a:latin typeface="+mn-lt"/>
+                <a:ea typeface="+mn-ea"/>
+                <a:cs typeface="+mn-cs"/>
+              </a:defRPr>
+            </a:lvl7pPr>
+            <a:lvl8pPr marL="3200400">
+              <a:defRPr>
+                <a:latin typeface="+mn-lt"/>
+                <a:ea typeface="+mn-ea"/>
+                <a:cs typeface="+mn-cs"/>
+              </a:defRPr>
+            </a:lvl8pPr>
+            <a:lvl9pPr marL="3657600">
+              <a:defRPr>
+                <a:latin typeface="+mn-lt"/>
+                <a:ea typeface="+mn-ea"/>
+                <a:cs typeface="+mn-cs"/>
+              </a:defRPr>
+            </a:lvl9pPr>
+          </a:lstStyle>
+          <a:p>
+            <a:pPr algn="just"/>
+            <a:endParaRPr lang="en-US" sz="2000" kern="0" dirty="0">
+              <a:solidFill>
+                <a:sysClr val="windowText" lastClr="000000"/>
+              </a:solidFill>
+            </a:endParaRPr>
+          </a:p>
+        </p:txBody>
+      </p:sp>
+      <p:sp>
+        <p:nvSpPr>
+          <p:cNvPr id="2" name="CuadroTexto 1">
+            <a:extLst>
+              <a:ext uri="{FF2B5EF4-FFF2-40B4-BE49-F238E27FC236}">
+                <a16:creationId xmlns:a16="http://schemas.microsoft.com/office/drawing/2014/main" id="{75767930-CAD0-87A1-2A18-74F4AAF8EB51}"/>
+              </a:ext>
+            </a:extLst>
+          </p:cNvPr>
+          <p:cNvSpPr txBox="1"/>
+          <p:nvPr/>
+        </p:nvSpPr>
+        <p:spPr>
+          <a:xfrm>
+            <a:off x="609441" y="4860334"/>
+            <a:ext cx="11199971" cy="1015663"/>
+          </a:xfrm>
+          <a:prstGeom prst="rect">
+            <a:avLst/>
+          </a:prstGeom>
+          <a:solidFill>
+            <a:schemeClr val="bg1">
+              <a:lumMod val="95000"/>
+            </a:schemeClr>
+          </a:solidFill>
+          <a:ln w="28575">
+            <a:solidFill>
+              <a:srgbClr val="E0700D"/>
+            </a:solidFill>
+          </a:ln>
+        </p:spPr>
+        <p:txBody>
+          <a:bodyPr wrap="square" rtlCol="0">
+            <a:spAutoFit/>
+          </a:bodyPr>
+          <a:lstStyle/>
+          <a:p>
+            <a:pPr algn="just"/>
+            <a:r>
+              <a:rPr lang="en-US" sz="1200" dirty="0">
+                <a:latin typeface="Arial" panose="020B0604020202020204" pitchFamily="34" charset="0"/>
+                <a:cs typeface="Arial" panose="020B0604020202020204" pitchFamily="34" charset="0"/>
+              </a:rPr>
+              <a:t>Se </a:t>
+            </a:r>
+            <a:r>
+              <a:rPr lang="en-US" sz="1200" dirty="0" err="1">
+                <a:latin typeface="Arial" panose="020B0604020202020204" pitchFamily="34" charset="0"/>
+                <a:cs typeface="Arial" panose="020B0604020202020204" pitchFamily="34" charset="0"/>
+              </a:rPr>
+              <a:t>puede</a:t>
+            </a:r>
+            <a:r>
+              <a:rPr lang="en-US" sz="1200" dirty="0">
+                <a:latin typeface="Arial" panose="020B0604020202020204" pitchFamily="34" charset="0"/>
+                <a:cs typeface="Arial" panose="020B0604020202020204" pitchFamily="34" charset="0"/>
+              </a:rPr>
+              <a:t> </a:t>
+            </a:r>
+            <a:r>
+              <a:rPr lang="en-US" sz="1200" dirty="0" err="1">
+                <a:latin typeface="Arial" panose="020B0604020202020204" pitchFamily="34" charset="0"/>
+                <a:cs typeface="Arial" panose="020B0604020202020204" pitchFamily="34" charset="0"/>
+              </a:rPr>
+              <a:t>observar</a:t>
+            </a:r>
+            <a:r>
+              <a:rPr lang="en-US" sz="1200" dirty="0">
+                <a:latin typeface="Arial" panose="020B0604020202020204" pitchFamily="34" charset="0"/>
+                <a:cs typeface="Arial" panose="020B0604020202020204" pitchFamily="34" charset="0"/>
+              </a:rPr>
+              <a:t> </a:t>
+            </a:r>
+            <a:r>
+              <a:rPr lang="en-US" sz="1200" dirty="0" err="1">
+                <a:latin typeface="Arial" panose="020B0604020202020204" pitchFamily="34" charset="0"/>
+                <a:cs typeface="Arial" panose="020B0604020202020204" pitchFamily="34" charset="0"/>
+              </a:rPr>
+              <a:t>en</a:t>
+            </a:r>
+            <a:r>
+              <a:rPr lang="en-US" sz="1200" dirty="0">
+                <a:latin typeface="Arial" panose="020B0604020202020204" pitchFamily="34" charset="0"/>
+                <a:cs typeface="Arial" panose="020B0604020202020204" pitchFamily="34" charset="0"/>
+              </a:rPr>
+              <a:t> la cross-section </a:t>
+            </a:r>
+            <a:r>
+              <a:rPr lang="en-US" sz="1200" dirty="0" err="1">
+                <a:latin typeface="Arial" panose="020B0604020202020204" pitchFamily="34" charset="0"/>
+                <a:cs typeface="Arial" panose="020B0604020202020204" pitchFamily="34" charset="0"/>
+              </a:rPr>
+              <a:t>los</a:t>
+            </a:r>
+            <a:r>
+              <a:rPr lang="en-US" sz="1200" dirty="0">
+                <a:latin typeface="Arial" panose="020B0604020202020204" pitchFamily="34" charset="0"/>
+                <a:cs typeface="Arial" panose="020B0604020202020204" pitchFamily="34" charset="0"/>
+              </a:rPr>
+              <a:t> dos cores </a:t>
+            </a:r>
+            <a:r>
+              <a:rPr lang="en-US" sz="1200" dirty="0" err="1">
+                <a:latin typeface="Arial" panose="020B0604020202020204" pitchFamily="34" charset="0"/>
+                <a:cs typeface="Arial" panose="020B0604020202020204" pitchFamily="34" charset="0"/>
+              </a:rPr>
+              <a:t>respectivos</a:t>
+            </a:r>
+            <a:r>
+              <a:rPr lang="en-US" sz="1200" dirty="0">
+                <a:latin typeface="Arial" panose="020B0604020202020204" pitchFamily="34" charset="0"/>
+                <a:cs typeface="Arial" panose="020B0604020202020204" pitchFamily="34" charset="0"/>
+              </a:rPr>
+              <a:t> con un </a:t>
+            </a:r>
+            <a:r>
+              <a:rPr lang="en-US" sz="1200" dirty="0" err="1">
+                <a:latin typeface="Arial" panose="020B0604020202020204" pitchFamily="34" charset="0"/>
+                <a:cs typeface="Arial" panose="020B0604020202020204" pitchFamily="34" charset="0"/>
+              </a:rPr>
+              <a:t>índice</a:t>
+            </a:r>
+            <a:r>
+              <a:rPr lang="en-US" sz="1200" dirty="0">
+                <a:latin typeface="Arial" panose="020B0604020202020204" pitchFamily="34" charset="0"/>
+                <a:cs typeface="Arial" panose="020B0604020202020204" pitchFamily="34" charset="0"/>
+              </a:rPr>
+              <a:t> de </a:t>
+            </a:r>
+            <a:r>
+              <a:rPr lang="en-US" sz="1200" dirty="0" err="1">
+                <a:latin typeface="Arial" panose="020B0604020202020204" pitchFamily="34" charset="0"/>
+                <a:cs typeface="Arial" panose="020B0604020202020204" pitchFamily="34" charset="0"/>
+              </a:rPr>
+              <a:t>refracción</a:t>
+            </a:r>
+            <a:r>
+              <a:rPr lang="en-US" sz="1200" dirty="0">
+                <a:latin typeface="Arial" panose="020B0604020202020204" pitchFamily="34" charset="0"/>
+                <a:cs typeface="Arial" panose="020B0604020202020204" pitchFamily="34" charset="0"/>
+              </a:rPr>
+              <a:t> </a:t>
+            </a:r>
+            <a:r>
+              <a:rPr lang="en-US" sz="1200" dirty="0" err="1">
+                <a:latin typeface="Arial" panose="020B0604020202020204" pitchFamily="34" charset="0"/>
+                <a:cs typeface="Arial" panose="020B0604020202020204" pitchFamily="34" charset="0"/>
+              </a:rPr>
+              <a:t>alrededor</a:t>
+            </a:r>
+            <a:r>
+              <a:rPr lang="en-US" sz="1200" dirty="0">
+                <a:latin typeface="Arial" panose="020B0604020202020204" pitchFamily="34" charset="0"/>
+                <a:cs typeface="Arial" panose="020B0604020202020204" pitchFamily="34" charset="0"/>
+              </a:rPr>
+              <a:t> de 2, sin,  y un </a:t>
+            </a:r>
+            <a:r>
+              <a:rPr lang="en-US" sz="1200" dirty="0" err="1">
+                <a:latin typeface="Arial" panose="020B0604020202020204" pitchFamily="34" charset="0"/>
+                <a:cs typeface="Arial" panose="020B0604020202020204" pitchFamily="34" charset="0"/>
+              </a:rPr>
+              <a:t>índice</a:t>
+            </a:r>
+            <a:r>
+              <a:rPr lang="en-US" sz="1200" dirty="0">
+                <a:latin typeface="Arial" panose="020B0604020202020204" pitchFamily="34" charset="0"/>
+                <a:cs typeface="Arial" panose="020B0604020202020204" pitchFamily="34" charset="0"/>
+              </a:rPr>
+              <a:t> del cladding </a:t>
+            </a:r>
+            <a:r>
+              <a:rPr lang="en-US" sz="1200" dirty="0" err="1">
+                <a:latin typeface="Arial" panose="020B0604020202020204" pitchFamily="34" charset="0"/>
+                <a:cs typeface="Arial" panose="020B0604020202020204" pitchFamily="34" charset="0"/>
+              </a:rPr>
+              <a:t>por</a:t>
+            </a:r>
+            <a:r>
+              <a:rPr lang="en-US" sz="1200" dirty="0">
+                <a:latin typeface="Arial" panose="020B0604020202020204" pitchFamily="34" charset="0"/>
+                <a:cs typeface="Arial" panose="020B0604020202020204" pitchFamily="34" charset="0"/>
+              </a:rPr>
+              <a:t> </a:t>
+            </a:r>
+            <a:r>
+              <a:rPr lang="en-US" sz="1200" dirty="0" err="1">
+                <a:latin typeface="Arial" panose="020B0604020202020204" pitchFamily="34" charset="0"/>
+                <a:cs typeface="Arial" panose="020B0604020202020204" pitchFamily="34" charset="0"/>
+              </a:rPr>
+              <a:t>debajo</a:t>
+            </a:r>
+            <a:r>
+              <a:rPr lang="en-US" sz="1200" dirty="0">
+                <a:latin typeface="Arial" panose="020B0604020202020204" pitchFamily="34" charset="0"/>
+                <a:cs typeface="Arial" panose="020B0604020202020204" pitchFamily="34" charset="0"/>
+              </a:rPr>
+              <a:t> de 1.5, sio2. </a:t>
+            </a:r>
+          </a:p>
+          <a:p>
+            <a:pPr algn="just"/>
+            <a:endParaRPr lang="en-US" sz="1200" dirty="0">
+              <a:latin typeface="Arial" panose="020B0604020202020204" pitchFamily="34" charset="0"/>
+              <a:cs typeface="Arial" panose="020B0604020202020204" pitchFamily="34" charset="0"/>
+            </a:endParaRPr>
+          </a:p>
+          <a:p>
+            <a:pPr algn="just"/>
+            <a:endParaRPr lang="en-US" sz="1200" dirty="0">
+              <a:latin typeface="Arial" panose="020B0604020202020204" pitchFamily="34" charset="0"/>
+              <a:cs typeface="Arial" panose="020B0604020202020204" pitchFamily="34" charset="0"/>
+            </a:endParaRPr>
+          </a:p>
+          <a:p>
+            <a:pPr algn="just"/>
+            <a:endParaRPr lang="en-US" sz="1200" dirty="0">
+              <a:latin typeface="Arial" panose="020B0604020202020204" pitchFamily="34" charset="0"/>
+              <a:cs typeface="Arial" panose="020B0604020202020204" pitchFamily="34" charset="0"/>
+            </a:endParaRPr>
+          </a:p>
+          <a:p>
+            <a:pPr algn="just"/>
+            <a:endParaRPr lang="en-US" sz="1200" dirty="0">
+              <a:latin typeface="Arial" panose="020B0604020202020204" pitchFamily="34" charset="0"/>
+              <a:cs typeface="Arial" panose="020B0604020202020204" pitchFamily="34" charset="0"/>
+            </a:endParaRPr>
+          </a:p>
+        </p:txBody>
+      </p:sp>
+      <p:pic>
+        <p:nvPicPr>
+          <p:cNvPr id="6" name="Imagen 5" descr="Gráfico&#10;&#10;El contenido generado por IA puede ser incorrecto.">
+            <a:extLst>
+              <a:ext uri="{FF2B5EF4-FFF2-40B4-BE49-F238E27FC236}">
+                <a16:creationId xmlns:a16="http://schemas.microsoft.com/office/drawing/2014/main" id="{8EE40A5E-2A4F-2EEB-9043-557B9166D3A0}"/>
+              </a:ext>
+            </a:extLst>
+          </p:cNvPr>
+          <p:cNvPicPr>
+            <a:picLocks noChangeAspect="1"/>
+          </p:cNvPicPr>
+          <p:nvPr/>
+        </p:nvPicPr>
+        <p:blipFill>
+          <a:blip r:embed="rId5"/>
+          <a:stretch>
+            <a:fillRect/>
+          </a:stretch>
+        </p:blipFill>
+        <p:spPr>
+          <a:xfrm>
+            <a:off x="3581400" y="1147906"/>
+            <a:ext cx="4416839" cy="3096014"/>
+          </a:xfrm>
+          <a:prstGeom prst="rect">
+            <a:avLst/>
+          </a:prstGeom>
+        </p:spPr>
+      </p:pic>
+    </p:spTree>
+    <p:extLst>
+      <p:ext uri="{BB962C8B-B14F-4D97-AF65-F5344CB8AC3E}">
+        <p14:creationId xmlns:p14="http://schemas.microsoft.com/office/powerpoint/2010/main" val="2061768735"/>
+      </p:ext>
+    </p:extLst>
+  </p:cSld>
+  <p:clrMapOvr>
+    <a:masterClrMapping/>
+  </p:clrMapOvr>
+</p:sld>
+</file>
+
+<file path=ppt/slides/slide5.xml><?xml version="1.0" encoding="utf-8"?>
+<p:sld xmlns:a="http://schemas.openxmlformats.org/drawingml/2006/main" xmlns:r="http://schemas.openxmlformats.org/officeDocument/2006/relationships" xmlns:p="http://schemas.openxmlformats.org/presentationml/2006/main">
+  <p:cSld>
+    <p:spTree>
+      <p:nvGrpSpPr>
+        <p:cNvPr id="1" name="">
+          <a:extLst>
+            <a:ext uri="{FF2B5EF4-FFF2-40B4-BE49-F238E27FC236}">
+              <a16:creationId xmlns:a16="http://schemas.microsoft.com/office/drawing/2014/main" id="{893EDE77-A2ED-34F8-922B-4CCDD69ED225}"/>
+            </a:ext>
+          </a:extLst>
+        </p:cNvPr>
+        <p:cNvGrpSpPr/>
+        <p:nvPr/>
+      </p:nvGrpSpPr>
+      <p:grpSpPr>
+        <a:xfrm>
+          <a:off x="0" y="0"/>
+          <a:ext cx="0" cy="0"/>
+          <a:chOff x="0" y="0"/>
+          <a:chExt cx="0" cy="0"/>
+        </a:xfrm>
+      </p:grpSpPr>
+      <p:sp>
+        <p:nvSpPr>
+          <p:cNvPr id="16" name="object 16">
+            <a:extLst>
+              <a:ext uri="{FF2B5EF4-FFF2-40B4-BE49-F238E27FC236}">
+                <a16:creationId xmlns:a16="http://schemas.microsoft.com/office/drawing/2014/main" id="{93AC3C12-A28D-6EF9-0CAF-396137DF83DC}"/>
+              </a:ext>
+            </a:extLst>
+          </p:cNvPr>
+          <p:cNvSpPr txBox="1">
+            <a:spLocks noGrp="1"/>
+          </p:cNvSpPr>
+          <p:nvPr>
+            <p:ph type="title"/>
+          </p:nvPr>
+        </p:nvSpPr>
+        <p:spPr>
+          <a:xfrm>
+            <a:off x="685800" y="408883"/>
+            <a:ext cx="10994410" cy="782265"/>
+          </a:xfrm>
+          <a:prstGeom prst="rect">
+            <a:avLst/>
+          </a:prstGeom>
+        </p:spPr>
+        <p:txBody>
+          <a:bodyPr vert="horz" wrap="square" lIns="0" tIns="12700" rIns="0" bIns="0" rtlCol="0">
+            <a:spAutoFit/>
+          </a:bodyPr>
+          <a:lstStyle/>
+          <a:p>
+            <a:pPr marL="12700">
+              <a:lnSpc>
+                <a:spcPct val="100000"/>
+              </a:lnSpc>
+              <a:spcBef>
+                <a:spcPts val="100"/>
+              </a:spcBef>
+            </a:pPr>
+            <a:r>
+              <a:rPr lang="en-US" sz="2500" dirty="0"/>
+              <a:t>Learning outcome #1 – Directional coupler cross-section in </a:t>
+            </a:r>
+            <a:r>
+              <a:rPr lang="en-US" sz="2500" dirty="0" err="1"/>
+              <a:t>GDSFactory</a:t>
+            </a:r>
+            <a:br>
+              <a:rPr lang="es-ES" sz="2500" spc="-5" dirty="0">
+                <a:latin typeface="+mj-lt"/>
+                <a:cs typeface="Lucida Sans"/>
+              </a:rPr>
+            </a:br>
+            <a:endParaRPr sz="2500" b="0" dirty="0">
+              <a:latin typeface="+mj-lt"/>
+              <a:cs typeface="Lucida Sans"/>
+            </a:endParaRPr>
+          </a:p>
+        </p:txBody>
+      </p:sp>
+      <p:pic>
+        <p:nvPicPr>
+          <p:cNvPr id="83" name="Gráfico 82">
+            <a:extLst>
+              <a:ext uri="{FF2B5EF4-FFF2-40B4-BE49-F238E27FC236}">
+                <a16:creationId xmlns:a16="http://schemas.microsoft.com/office/drawing/2014/main" id="{C821AA1D-01C8-58CB-BAC4-43679B398DF3}"/>
+              </a:ext>
+            </a:extLst>
+          </p:cNvPr>
+          <p:cNvPicPr>
+            <a:picLocks noChangeAspect="1"/>
+          </p:cNvPicPr>
+          <p:nvPr/>
+        </p:nvPicPr>
+        <p:blipFill>
+          <a:blip r:embed="rId3">
+            <a:extLst>
+              <a:ext uri="{96DAC541-7B7A-43D3-8B79-37D633B846F1}">
+                <asvg:svgBlip xmlns:asvg="http://schemas.microsoft.com/office/drawing/2016/SVG/main" r:embed="rId4"/>
+              </a:ext>
+            </a:extLst>
+          </a:blip>
+          <a:stretch>
+            <a:fillRect/>
+          </a:stretch>
+        </p:blipFill>
+        <p:spPr>
+          <a:xfrm>
+            <a:off x="5045006" y="6356057"/>
+            <a:ext cx="6409575" cy="363174"/>
+          </a:xfrm>
+          <a:prstGeom prst="rect">
+            <a:avLst/>
+          </a:prstGeom>
+        </p:spPr>
+      </p:pic>
+      <p:sp>
+        <p:nvSpPr>
+          <p:cNvPr id="84" name="Marcador de número de diapositiva 83">
+            <a:extLst>
+              <a:ext uri="{FF2B5EF4-FFF2-40B4-BE49-F238E27FC236}">
+                <a16:creationId xmlns:a16="http://schemas.microsoft.com/office/drawing/2014/main" id="{11E7A009-8B3C-E98A-A532-6F537EDD0552}"/>
+              </a:ext>
+            </a:extLst>
+          </p:cNvPr>
+          <p:cNvSpPr>
+            <a:spLocks noGrp="1"/>
+          </p:cNvSpPr>
+          <p:nvPr>
+            <p:ph type="sldNum" sz="quarter" idx="7"/>
+          </p:nvPr>
+        </p:nvSpPr>
+        <p:spPr/>
+        <p:txBody>
+          <a:bodyPr/>
+          <a:lstStyle/>
+          <a:p>
+            <a:fld id="{B6F15528-21DE-4FAA-801E-634DDDAF4B2B}" type="slidenum">
+              <a:rPr lang="es-ES" smtClean="0"/>
+              <a:t>5</a:t>
+            </a:fld>
+            <a:endParaRPr lang="es-ES"/>
+          </a:p>
+        </p:txBody>
+      </p:sp>
+      <p:sp>
+        <p:nvSpPr>
+          <p:cNvPr id="3" name="Marcador de pie de página 2">
+            <a:extLst>
+              <a:ext uri="{FF2B5EF4-FFF2-40B4-BE49-F238E27FC236}">
+                <a16:creationId xmlns:a16="http://schemas.microsoft.com/office/drawing/2014/main" id="{E8800B70-1F18-17D2-12F0-6F8789286FE7}"/>
+              </a:ext>
+            </a:extLst>
+          </p:cNvPr>
+          <p:cNvSpPr>
+            <a:spLocks noGrp="1"/>
+          </p:cNvSpPr>
+          <p:nvPr>
+            <p:ph type="ftr" sz="quarter" idx="5"/>
+          </p:nvPr>
+        </p:nvSpPr>
+        <p:spPr/>
+        <p:txBody>
+          <a:bodyPr/>
+          <a:lstStyle/>
+          <a:p>
+            <a:pPr marL="12700">
+              <a:spcBef>
+                <a:spcPts val="15"/>
+              </a:spcBef>
+            </a:pPr>
+            <a:r>
+              <a:rPr lang="es-ES" spc="-5"/>
+              <a:t>LAB 0.2. COUPLERS</a:t>
+            </a:r>
+            <a:endParaRPr lang="es-ES" spc="-5" dirty="0"/>
+          </a:p>
+        </p:txBody>
+      </p:sp>
+      <p:sp>
+        <p:nvSpPr>
+          <p:cNvPr id="4" name="Marcador de texto 2">
+            <a:extLst>
+              <a:ext uri="{FF2B5EF4-FFF2-40B4-BE49-F238E27FC236}">
+                <a16:creationId xmlns:a16="http://schemas.microsoft.com/office/drawing/2014/main" id="{911932FC-E6FA-0311-6CC3-9B45CADF2FA9}"/>
+              </a:ext>
+            </a:extLst>
+          </p:cNvPr>
+          <p:cNvSpPr txBox="1">
+            <a:spLocks/>
+          </p:cNvSpPr>
+          <p:nvPr/>
+        </p:nvSpPr>
+        <p:spPr>
+          <a:xfrm>
+            <a:off x="608012" y="1295400"/>
+            <a:ext cx="11048999" cy="4958137"/>
+          </a:xfrm>
+          <a:prstGeom prst="rect">
+            <a:avLst/>
+          </a:prstGeom>
+        </p:spPr>
+        <p:txBody>
+          <a:bodyPr>
+            <a:normAutofit/>
+          </a:bodyPr>
+          <a:lstStyle>
+            <a:lvl1pPr marL="0">
+              <a:defRPr>
+                <a:latin typeface="+mn-lt"/>
+                <a:ea typeface="+mn-ea"/>
+                <a:cs typeface="+mn-cs"/>
+              </a:defRPr>
+            </a:lvl1pPr>
+            <a:lvl2pPr marL="457200">
+              <a:defRPr>
+                <a:latin typeface="+mn-lt"/>
+                <a:ea typeface="+mn-ea"/>
+                <a:cs typeface="+mn-cs"/>
+              </a:defRPr>
+            </a:lvl2pPr>
+            <a:lvl3pPr marL="914400">
+              <a:defRPr>
+                <a:latin typeface="+mn-lt"/>
+                <a:ea typeface="+mn-ea"/>
+                <a:cs typeface="+mn-cs"/>
+              </a:defRPr>
+            </a:lvl3pPr>
+            <a:lvl4pPr marL="1371600">
+              <a:defRPr>
+                <a:latin typeface="+mn-lt"/>
+                <a:ea typeface="+mn-ea"/>
+                <a:cs typeface="+mn-cs"/>
+              </a:defRPr>
+            </a:lvl4pPr>
+            <a:lvl5pPr marL="1828800">
+              <a:defRPr>
+                <a:latin typeface="+mn-lt"/>
+                <a:ea typeface="+mn-ea"/>
+                <a:cs typeface="+mn-cs"/>
+              </a:defRPr>
+            </a:lvl5pPr>
+            <a:lvl6pPr marL="2286000">
+              <a:defRPr>
+                <a:latin typeface="+mn-lt"/>
+                <a:ea typeface="+mn-ea"/>
+                <a:cs typeface="+mn-cs"/>
+              </a:defRPr>
+            </a:lvl6pPr>
+            <a:lvl7pPr marL="2743200">
+              <a:defRPr>
+                <a:latin typeface="+mn-lt"/>
+                <a:ea typeface="+mn-ea"/>
+                <a:cs typeface="+mn-cs"/>
+              </a:defRPr>
+            </a:lvl7pPr>
+            <a:lvl8pPr marL="3200400">
+              <a:defRPr>
+                <a:latin typeface="+mn-lt"/>
+                <a:ea typeface="+mn-ea"/>
+                <a:cs typeface="+mn-cs"/>
+              </a:defRPr>
+            </a:lvl8pPr>
+            <a:lvl9pPr marL="3657600">
+              <a:defRPr>
+                <a:latin typeface="+mn-lt"/>
+                <a:ea typeface="+mn-ea"/>
+                <a:cs typeface="+mn-cs"/>
+              </a:defRPr>
+            </a:lvl9pPr>
+          </a:lstStyle>
+          <a:p>
+            <a:pPr algn="just"/>
+            <a:endParaRPr lang="en-US" sz="2000" kern="0" dirty="0">
+              <a:solidFill>
+                <a:sysClr val="windowText" lastClr="000000"/>
+              </a:solidFill>
+            </a:endParaRPr>
+          </a:p>
+        </p:txBody>
+      </p:sp>
+      <p:sp>
+        <p:nvSpPr>
+          <p:cNvPr id="2" name="CuadroTexto 1">
+            <a:extLst>
+              <a:ext uri="{FF2B5EF4-FFF2-40B4-BE49-F238E27FC236}">
+                <a16:creationId xmlns:a16="http://schemas.microsoft.com/office/drawing/2014/main" id="{4D49E427-CAA7-58A1-8EF8-3E6A25DAF0B8}"/>
+              </a:ext>
+            </a:extLst>
+          </p:cNvPr>
+          <p:cNvSpPr txBox="1"/>
+          <p:nvPr/>
+        </p:nvSpPr>
+        <p:spPr>
+          <a:xfrm>
+            <a:off x="705153" y="3678523"/>
+            <a:ext cx="11199971" cy="1015663"/>
+          </a:xfrm>
+          <a:prstGeom prst="rect">
+            <a:avLst/>
+          </a:prstGeom>
+          <a:solidFill>
+            <a:schemeClr val="bg1">
+              <a:lumMod val="95000"/>
+            </a:schemeClr>
+          </a:solidFill>
+          <a:ln w="28575">
+            <a:solidFill>
+              <a:srgbClr val="E0700D"/>
+            </a:solidFill>
+          </a:ln>
+        </p:spPr>
+        <p:txBody>
+          <a:bodyPr wrap="square" rtlCol="0">
+            <a:spAutoFit/>
+          </a:bodyPr>
+          <a:lstStyle/>
+          <a:p>
+            <a:pPr algn="just"/>
+            <a:r>
+              <a:rPr lang="en-US" sz="1200" dirty="0">
+                <a:latin typeface="Arial" panose="020B0604020202020204" pitchFamily="34" charset="0"/>
+                <a:cs typeface="Arial" panose="020B0604020202020204" pitchFamily="34" charset="0"/>
+              </a:rPr>
+              <a:t>Podemos observer </a:t>
+            </a:r>
+            <a:r>
+              <a:rPr lang="en-US" sz="1200" dirty="0" err="1">
+                <a:latin typeface="Arial" panose="020B0604020202020204" pitchFamily="34" charset="0"/>
+                <a:cs typeface="Arial" panose="020B0604020202020204" pitchFamily="34" charset="0"/>
+              </a:rPr>
+              <a:t>que</a:t>
+            </a:r>
+            <a:r>
+              <a:rPr lang="en-US" sz="1200" dirty="0">
+                <a:latin typeface="Arial" panose="020B0604020202020204" pitchFamily="34" charset="0"/>
+                <a:cs typeface="Arial" panose="020B0604020202020204" pitchFamily="34" charset="0"/>
+              </a:rPr>
+              <a:t> se </a:t>
+            </a:r>
+            <a:r>
+              <a:rPr lang="en-US" sz="1200" dirty="0" err="1">
+                <a:latin typeface="Arial" panose="020B0604020202020204" pitchFamily="34" charset="0"/>
+                <a:cs typeface="Arial" panose="020B0604020202020204" pitchFamily="34" charset="0"/>
+              </a:rPr>
+              <a:t>propagarán</a:t>
+            </a:r>
+            <a:r>
+              <a:rPr lang="en-US" sz="1200" dirty="0">
+                <a:latin typeface="Arial" panose="020B0604020202020204" pitchFamily="34" charset="0"/>
+                <a:cs typeface="Arial" panose="020B0604020202020204" pitchFamily="34" charset="0"/>
+              </a:rPr>
+              <a:t> </a:t>
+            </a:r>
+            <a:r>
+              <a:rPr lang="en-US" sz="1200" dirty="0" err="1">
+                <a:latin typeface="Arial" panose="020B0604020202020204" pitchFamily="34" charset="0"/>
+                <a:cs typeface="Arial" panose="020B0604020202020204" pitchFamily="34" charset="0"/>
+              </a:rPr>
+              <a:t>los</a:t>
+            </a:r>
+            <a:r>
+              <a:rPr lang="en-US" sz="1200" dirty="0">
+                <a:latin typeface="Arial" panose="020B0604020202020204" pitchFamily="34" charset="0"/>
+                <a:cs typeface="Arial" panose="020B0604020202020204" pitchFamily="34" charset="0"/>
+              </a:rPr>
+              <a:t> </a:t>
+            </a:r>
+            <a:r>
+              <a:rPr lang="en-US" sz="1200" dirty="0" err="1">
+                <a:latin typeface="Arial" panose="020B0604020202020204" pitchFamily="34" charset="0"/>
+                <a:cs typeface="Arial" panose="020B0604020202020204" pitchFamily="34" charset="0"/>
+              </a:rPr>
+              <a:t>primeros</a:t>
+            </a:r>
+            <a:r>
+              <a:rPr lang="en-US" sz="1200" dirty="0">
+                <a:latin typeface="Arial" panose="020B0604020202020204" pitchFamily="34" charset="0"/>
+                <a:cs typeface="Arial" panose="020B0604020202020204" pitchFamily="34" charset="0"/>
+              </a:rPr>
+              <a:t> 4 </a:t>
+            </a:r>
+            <a:r>
+              <a:rPr lang="en-US" sz="1200" dirty="0" err="1">
+                <a:latin typeface="Arial" panose="020B0604020202020204" pitchFamily="34" charset="0"/>
+                <a:cs typeface="Arial" panose="020B0604020202020204" pitchFamily="34" charset="0"/>
+              </a:rPr>
+              <a:t>modos</a:t>
+            </a:r>
+            <a:r>
+              <a:rPr lang="en-US" sz="1200" dirty="0">
+                <a:latin typeface="Arial" panose="020B0604020202020204" pitchFamily="34" charset="0"/>
+                <a:cs typeface="Arial" panose="020B0604020202020204" pitchFamily="34" charset="0"/>
+              </a:rPr>
+              <a:t>, al </a:t>
+            </a:r>
+            <a:r>
+              <a:rPr lang="en-US" sz="1200" dirty="0" err="1">
+                <a:latin typeface="Arial" panose="020B0604020202020204" pitchFamily="34" charset="0"/>
+                <a:cs typeface="Arial" panose="020B0604020202020204" pitchFamily="34" charset="0"/>
+              </a:rPr>
+              <a:t>estar</a:t>
+            </a:r>
+            <a:r>
+              <a:rPr lang="en-US" sz="1200" dirty="0">
+                <a:latin typeface="Arial" panose="020B0604020202020204" pitchFamily="34" charset="0"/>
+                <a:cs typeface="Arial" panose="020B0604020202020204" pitchFamily="34" charset="0"/>
+              </a:rPr>
+              <a:t> </a:t>
+            </a:r>
+            <a:r>
+              <a:rPr lang="en-US" sz="1200" dirty="0" err="1">
+                <a:latin typeface="Arial" panose="020B0604020202020204" pitchFamily="34" charset="0"/>
+                <a:cs typeface="Arial" panose="020B0604020202020204" pitchFamily="34" charset="0"/>
+              </a:rPr>
+              <a:t>por</a:t>
+            </a:r>
+            <a:r>
+              <a:rPr lang="en-US" sz="1200" dirty="0">
+                <a:latin typeface="Arial" panose="020B0604020202020204" pitchFamily="34" charset="0"/>
+                <a:cs typeface="Arial" panose="020B0604020202020204" pitchFamily="34" charset="0"/>
+              </a:rPr>
+              <a:t> </a:t>
+            </a:r>
+            <a:r>
+              <a:rPr lang="en-US" sz="1200" dirty="0" err="1">
+                <a:latin typeface="Arial" panose="020B0604020202020204" pitchFamily="34" charset="0"/>
+                <a:cs typeface="Arial" panose="020B0604020202020204" pitchFamily="34" charset="0"/>
+              </a:rPr>
+              <a:t>encima</a:t>
+            </a:r>
+            <a:r>
+              <a:rPr lang="en-US" sz="1200" dirty="0">
+                <a:latin typeface="Arial" panose="020B0604020202020204" pitchFamily="34" charset="0"/>
+                <a:cs typeface="Arial" panose="020B0604020202020204" pitchFamily="34" charset="0"/>
+              </a:rPr>
+              <a:t> del </a:t>
+            </a:r>
+            <a:r>
+              <a:rPr lang="en-US" sz="1200" dirty="0" err="1">
+                <a:latin typeface="Arial" panose="020B0604020202020204" pitchFamily="34" charset="0"/>
+                <a:cs typeface="Arial" panose="020B0604020202020204" pitchFamily="34" charset="0"/>
+              </a:rPr>
+              <a:t>indice</a:t>
+            </a:r>
+            <a:r>
+              <a:rPr lang="en-US" sz="1200" dirty="0">
+                <a:latin typeface="Arial" panose="020B0604020202020204" pitchFamily="34" charset="0"/>
+                <a:cs typeface="Arial" panose="020B0604020202020204" pitchFamily="34" charset="0"/>
+              </a:rPr>
+              <a:t> del cladding. En </a:t>
+            </a:r>
+            <a:r>
+              <a:rPr lang="en-US" sz="1200" dirty="0" err="1">
+                <a:latin typeface="Arial" panose="020B0604020202020204" pitchFamily="34" charset="0"/>
+                <a:cs typeface="Arial" panose="020B0604020202020204" pitchFamily="34" charset="0"/>
+              </a:rPr>
+              <a:t>este</a:t>
+            </a:r>
+            <a:r>
+              <a:rPr lang="en-US" sz="1200" dirty="0">
+                <a:latin typeface="Arial" panose="020B0604020202020204" pitchFamily="34" charset="0"/>
+                <a:cs typeface="Arial" panose="020B0604020202020204" pitchFamily="34" charset="0"/>
+              </a:rPr>
+              <a:t> </a:t>
+            </a:r>
+            <a:r>
+              <a:rPr lang="en-US" sz="1200" dirty="0" err="1">
+                <a:latin typeface="Arial" panose="020B0604020202020204" pitchFamily="34" charset="0"/>
+                <a:cs typeface="Arial" panose="020B0604020202020204" pitchFamily="34" charset="0"/>
+              </a:rPr>
+              <a:t>caso</a:t>
+            </a:r>
+            <a:r>
+              <a:rPr lang="en-US" sz="1200" dirty="0">
+                <a:latin typeface="Arial" panose="020B0604020202020204" pitchFamily="34" charset="0"/>
+                <a:cs typeface="Arial" panose="020B0604020202020204" pitchFamily="34" charset="0"/>
+              </a:rPr>
+              <a:t> </a:t>
+            </a:r>
+            <a:r>
+              <a:rPr lang="en-US" sz="1200" dirty="0" err="1">
+                <a:latin typeface="Arial" panose="020B0604020202020204" pitchFamily="34" charset="0"/>
+                <a:cs typeface="Arial" panose="020B0604020202020204" pitchFamily="34" charset="0"/>
+              </a:rPr>
+              <a:t>los</a:t>
+            </a:r>
+            <a:r>
+              <a:rPr lang="en-US" sz="1200" dirty="0">
+                <a:latin typeface="Arial" panose="020B0604020202020204" pitchFamily="34" charset="0"/>
+                <a:cs typeface="Arial" panose="020B0604020202020204" pitchFamily="34" charset="0"/>
+              </a:rPr>
+              <a:t> dos </a:t>
+            </a:r>
+            <a:r>
+              <a:rPr lang="en-US" sz="1200" dirty="0" err="1">
+                <a:latin typeface="Arial" panose="020B0604020202020204" pitchFamily="34" charset="0"/>
+                <a:cs typeface="Arial" panose="020B0604020202020204" pitchFamily="34" charset="0"/>
+              </a:rPr>
+              <a:t>primeros</a:t>
+            </a:r>
+            <a:r>
+              <a:rPr lang="en-US" sz="1200" dirty="0">
+                <a:latin typeface="Arial" panose="020B0604020202020204" pitchFamily="34" charset="0"/>
+                <a:cs typeface="Arial" panose="020B0604020202020204" pitchFamily="34" charset="0"/>
+              </a:rPr>
+              <a:t> son quasi TE, y </a:t>
+            </a:r>
+            <a:r>
+              <a:rPr lang="en-US" sz="1200" dirty="0" err="1">
+                <a:latin typeface="Arial" panose="020B0604020202020204" pitchFamily="34" charset="0"/>
+                <a:cs typeface="Arial" panose="020B0604020202020204" pitchFamily="34" charset="0"/>
+              </a:rPr>
+              <a:t>los</a:t>
+            </a:r>
+            <a:r>
+              <a:rPr lang="en-US" sz="1200" dirty="0">
+                <a:latin typeface="Arial" panose="020B0604020202020204" pitchFamily="34" charset="0"/>
+                <a:cs typeface="Arial" panose="020B0604020202020204" pitchFamily="34" charset="0"/>
+              </a:rPr>
+              <a:t> dos posteriores quasi TM. </a:t>
+            </a:r>
+          </a:p>
+          <a:p>
+            <a:pPr algn="just"/>
+            <a:endParaRPr lang="en-US" sz="1200" dirty="0">
+              <a:latin typeface="Arial" panose="020B0604020202020204" pitchFamily="34" charset="0"/>
+              <a:cs typeface="Arial" panose="020B0604020202020204" pitchFamily="34" charset="0"/>
+            </a:endParaRPr>
+          </a:p>
+          <a:p>
+            <a:pPr algn="just"/>
+            <a:endParaRPr lang="en-US" sz="1200" dirty="0">
+              <a:latin typeface="Arial" panose="020B0604020202020204" pitchFamily="34" charset="0"/>
+              <a:cs typeface="Arial" panose="020B0604020202020204" pitchFamily="34" charset="0"/>
+            </a:endParaRPr>
+          </a:p>
+          <a:p>
+            <a:pPr algn="just"/>
+            <a:endParaRPr lang="en-US" sz="1200" dirty="0">
+              <a:latin typeface="Arial" panose="020B0604020202020204" pitchFamily="34" charset="0"/>
+              <a:cs typeface="Arial" panose="020B0604020202020204" pitchFamily="34" charset="0"/>
+            </a:endParaRPr>
+          </a:p>
+        </p:txBody>
+      </p:sp>
+      <p:pic>
+        <p:nvPicPr>
+          <p:cNvPr id="7" name="Imagen 6">
+            <a:extLst>
+              <a:ext uri="{FF2B5EF4-FFF2-40B4-BE49-F238E27FC236}">
+                <a16:creationId xmlns:a16="http://schemas.microsoft.com/office/drawing/2014/main" id="{CBB57643-D767-9866-9A15-42B9E11DEDFD}"/>
+              </a:ext>
+            </a:extLst>
+          </p:cNvPr>
+          <p:cNvPicPr>
+            <a:picLocks noChangeAspect="1"/>
+          </p:cNvPicPr>
+          <p:nvPr/>
+        </p:nvPicPr>
+        <p:blipFill>
+          <a:blip r:embed="rId5"/>
+          <a:stretch>
+            <a:fillRect/>
+          </a:stretch>
+        </p:blipFill>
+        <p:spPr>
+          <a:xfrm>
+            <a:off x="699655" y="1065549"/>
+            <a:ext cx="6744641" cy="628738"/>
+          </a:xfrm>
+          <a:prstGeom prst="rect">
+            <a:avLst/>
+          </a:prstGeom>
+        </p:spPr>
+      </p:pic>
+      <p:sp>
+        <p:nvSpPr>
+          <p:cNvPr id="9" name="CuadroTexto 8">
+            <a:extLst>
+              <a:ext uri="{FF2B5EF4-FFF2-40B4-BE49-F238E27FC236}">
+                <a16:creationId xmlns:a16="http://schemas.microsoft.com/office/drawing/2014/main" id="{D33C2980-5589-138B-4AB4-783E45B00A47}"/>
+              </a:ext>
+            </a:extLst>
+          </p:cNvPr>
+          <p:cNvSpPr txBox="1"/>
+          <p:nvPr/>
+        </p:nvSpPr>
+        <p:spPr>
+          <a:xfrm>
+            <a:off x="7535939" y="1130885"/>
+            <a:ext cx="6128326" cy="369332"/>
+          </a:xfrm>
+          <a:prstGeom prst="rect">
+            <a:avLst/>
+          </a:prstGeom>
+          <a:noFill/>
+        </p:spPr>
+        <p:txBody>
+          <a:bodyPr wrap="square">
+            <a:spAutoFit/>
+          </a:bodyPr>
+          <a:lstStyle/>
+          <a:p>
+            <a:r>
+              <a:rPr lang="en-US" dirty="0" err="1">
+                <a:latin typeface="Arial" panose="020B0604020202020204" pitchFamily="34" charset="0"/>
+                <a:cs typeface="Arial" panose="020B0604020202020204" pitchFamily="34" charset="0"/>
+              </a:rPr>
+              <a:t>Índice</a:t>
+            </a:r>
+            <a:r>
+              <a:rPr lang="en-US" dirty="0">
+                <a:latin typeface="Arial" panose="020B0604020202020204" pitchFamily="34" charset="0"/>
+                <a:cs typeface="Arial" panose="020B0604020202020204" pitchFamily="34" charset="0"/>
+              </a:rPr>
+              <a:t> </a:t>
+            </a:r>
+            <a:r>
+              <a:rPr lang="en-US" dirty="0" err="1">
+                <a:latin typeface="Arial" panose="020B0604020202020204" pitchFamily="34" charset="0"/>
+                <a:cs typeface="Arial" panose="020B0604020202020204" pitchFamily="34" charset="0"/>
+              </a:rPr>
+              <a:t>efectivo</a:t>
+            </a:r>
+            <a:r>
+              <a:rPr lang="en-US" dirty="0">
+                <a:latin typeface="Arial" panose="020B0604020202020204" pitchFamily="34" charset="0"/>
+                <a:cs typeface="Arial" panose="020B0604020202020204" pitchFamily="34" charset="0"/>
+              </a:rPr>
+              <a:t> de </a:t>
+            </a:r>
+            <a:r>
+              <a:rPr lang="en-US" dirty="0" err="1">
+                <a:latin typeface="Arial" panose="020B0604020202020204" pitchFamily="34" charset="0"/>
+                <a:cs typeface="Arial" panose="020B0604020202020204" pitchFamily="34" charset="0"/>
+              </a:rPr>
+              <a:t>los</a:t>
+            </a:r>
+            <a:r>
+              <a:rPr lang="en-US" dirty="0">
+                <a:latin typeface="Arial" panose="020B0604020202020204" pitchFamily="34" charset="0"/>
+                <a:cs typeface="Arial" panose="020B0604020202020204" pitchFamily="34" charset="0"/>
+              </a:rPr>
+              <a:t> </a:t>
+            </a:r>
+            <a:r>
+              <a:rPr lang="en-US" dirty="0" err="1">
+                <a:latin typeface="Arial" panose="020B0604020202020204" pitchFamily="34" charset="0"/>
+                <a:cs typeface="Arial" panose="020B0604020202020204" pitchFamily="34" charset="0"/>
+              </a:rPr>
+              <a:t>modos</a:t>
+            </a:r>
+            <a:r>
+              <a:rPr lang="en-US" dirty="0">
+                <a:latin typeface="Arial" panose="020B0604020202020204" pitchFamily="34" charset="0"/>
+                <a:cs typeface="Arial" panose="020B0604020202020204" pitchFamily="34" charset="0"/>
+              </a:rPr>
+              <a:t>. </a:t>
+            </a:r>
+          </a:p>
+        </p:txBody>
+      </p:sp>
+      <p:pic>
+        <p:nvPicPr>
+          <p:cNvPr id="11" name="Imagen 10">
+            <a:extLst>
+              <a:ext uri="{FF2B5EF4-FFF2-40B4-BE49-F238E27FC236}">
+                <a16:creationId xmlns:a16="http://schemas.microsoft.com/office/drawing/2014/main" id="{6CB71977-0C05-B5B8-B951-BE6A90D069B6}"/>
+              </a:ext>
+            </a:extLst>
+          </p:cNvPr>
+          <p:cNvPicPr>
+            <a:picLocks noChangeAspect="1"/>
+          </p:cNvPicPr>
+          <p:nvPr/>
+        </p:nvPicPr>
+        <p:blipFill>
+          <a:blip r:embed="rId6"/>
+          <a:stretch>
+            <a:fillRect/>
+          </a:stretch>
+        </p:blipFill>
+        <p:spPr>
+          <a:xfrm>
+            <a:off x="685799" y="1897807"/>
+            <a:ext cx="6766077" cy="495079"/>
+          </a:xfrm>
+          <a:prstGeom prst="rect">
+            <a:avLst/>
+          </a:prstGeom>
+        </p:spPr>
+      </p:pic>
+      <p:sp>
+        <p:nvSpPr>
+          <p:cNvPr id="15" name="CuadroTexto 14">
+            <a:extLst>
+              <a:ext uri="{FF2B5EF4-FFF2-40B4-BE49-F238E27FC236}">
+                <a16:creationId xmlns:a16="http://schemas.microsoft.com/office/drawing/2014/main" id="{993D5A96-F057-23D9-37C3-BF8F053BC698}"/>
+              </a:ext>
+            </a:extLst>
+          </p:cNvPr>
+          <p:cNvSpPr txBox="1"/>
+          <p:nvPr/>
+        </p:nvSpPr>
+        <p:spPr>
+          <a:xfrm>
+            <a:off x="7529663" y="1852887"/>
+            <a:ext cx="6830290" cy="369332"/>
+          </a:xfrm>
+          <a:prstGeom prst="rect">
+            <a:avLst/>
+          </a:prstGeom>
+          <a:noFill/>
+        </p:spPr>
+        <p:txBody>
+          <a:bodyPr wrap="square">
+            <a:spAutoFit/>
+          </a:bodyPr>
+          <a:lstStyle/>
+          <a:p>
+            <a:r>
+              <a:rPr lang="en-US" dirty="0" err="1">
+                <a:latin typeface="Arial" panose="020B0604020202020204" pitchFamily="34" charset="0"/>
+                <a:cs typeface="Arial" panose="020B0604020202020204" pitchFamily="34" charset="0"/>
+              </a:rPr>
+              <a:t>Fracción</a:t>
+            </a:r>
+            <a:r>
+              <a:rPr lang="en-US" dirty="0">
+                <a:latin typeface="Arial" panose="020B0604020202020204" pitchFamily="34" charset="0"/>
+                <a:cs typeface="Arial" panose="020B0604020202020204" pitchFamily="34" charset="0"/>
+              </a:rPr>
+              <a:t> TE</a:t>
+            </a:r>
+          </a:p>
+        </p:txBody>
+      </p:sp>
+      <p:pic>
+        <p:nvPicPr>
+          <p:cNvPr id="18" name="Imagen 17">
+            <a:extLst>
+              <a:ext uri="{FF2B5EF4-FFF2-40B4-BE49-F238E27FC236}">
+                <a16:creationId xmlns:a16="http://schemas.microsoft.com/office/drawing/2014/main" id="{BAB84A52-C82E-9E3F-371F-3732D6FA1E24}"/>
+              </a:ext>
+            </a:extLst>
+          </p:cNvPr>
+          <p:cNvPicPr>
+            <a:picLocks noChangeAspect="1"/>
+          </p:cNvPicPr>
+          <p:nvPr/>
+        </p:nvPicPr>
+        <p:blipFill>
+          <a:blip r:embed="rId7"/>
+          <a:stretch>
+            <a:fillRect/>
+          </a:stretch>
+        </p:blipFill>
+        <p:spPr>
+          <a:xfrm>
+            <a:off x="699654" y="2636910"/>
+            <a:ext cx="6744641" cy="440957"/>
+          </a:xfrm>
+          <a:prstGeom prst="rect">
+            <a:avLst/>
+          </a:prstGeom>
+        </p:spPr>
+      </p:pic>
+      <p:sp>
+        <p:nvSpPr>
+          <p:cNvPr id="19" name="CuadroTexto 18">
+            <a:extLst>
+              <a:ext uri="{FF2B5EF4-FFF2-40B4-BE49-F238E27FC236}">
+                <a16:creationId xmlns:a16="http://schemas.microsoft.com/office/drawing/2014/main" id="{53F15D59-D415-76F3-63C9-0FFDB86733E6}"/>
+              </a:ext>
+            </a:extLst>
+          </p:cNvPr>
+          <p:cNvSpPr txBox="1"/>
+          <p:nvPr/>
+        </p:nvSpPr>
+        <p:spPr>
+          <a:xfrm>
+            <a:off x="7542232" y="2598472"/>
+            <a:ext cx="6830290" cy="369332"/>
+          </a:xfrm>
+          <a:prstGeom prst="rect">
+            <a:avLst/>
+          </a:prstGeom>
+          <a:noFill/>
+        </p:spPr>
+        <p:txBody>
+          <a:bodyPr wrap="square">
+            <a:spAutoFit/>
+          </a:bodyPr>
+          <a:lstStyle/>
+          <a:p>
+            <a:r>
+              <a:rPr lang="en-US" dirty="0" err="1">
+                <a:latin typeface="Arial" panose="020B0604020202020204" pitchFamily="34" charset="0"/>
+                <a:cs typeface="Arial" panose="020B0604020202020204" pitchFamily="34" charset="0"/>
+              </a:rPr>
+              <a:t>Fracción</a:t>
+            </a:r>
+            <a:r>
+              <a:rPr lang="en-US" dirty="0">
+                <a:latin typeface="Arial" panose="020B0604020202020204" pitchFamily="34" charset="0"/>
+                <a:cs typeface="Arial" panose="020B0604020202020204" pitchFamily="34" charset="0"/>
+              </a:rPr>
+              <a:t> TM</a:t>
+            </a:r>
+          </a:p>
+        </p:txBody>
+      </p:sp>
+    </p:spTree>
+    <p:extLst>
+      <p:ext uri="{BB962C8B-B14F-4D97-AF65-F5344CB8AC3E}">
+        <p14:creationId xmlns:p14="http://schemas.microsoft.com/office/powerpoint/2010/main" val="2116760292"/>
+      </p:ext>
+    </p:extLst>
+  </p:cSld>
+  <p:clrMapOvr>
+    <a:masterClrMapping/>
+  </p:clrMapOvr>
+</p:sld>
+</file>
+
+<file path=ppt/slides/slide6.xml><?xml version="1.0" encoding="utf-8"?>
+<p:sld xmlns:a="http://schemas.openxmlformats.org/drawingml/2006/main" xmlns:r="http://schemas.openxmlformats.org/officeDocument/2006/relationships" xmlns:p="http://schemas.openxmlformats.org/presentationml/2006/main">
+  <p:cSld>
+    <p:spTree>
+      <p:nvGrpSpPr>
+        <p:cNvPr id="1" name="">
+          <a:extLst>
+            <a:ext uri="{FF2B5EF4-FFF2-40B4-BE49-F238E27FC236}">
+              <a16:creationId xmlns:a16="http://schemas.microsoft.com/office/drawing/2014/main" id="{39016FAA-DAAC-EC20-DA4F-CB77121BC0DF}"/>
+            </a:ext>
+          </a:extLst>
+        </p:cNvPr>
+        <p:cNvGrpSpPr/>
+        <p:nvPr/>
+      </p:nvGrpSpPr>
+      <p:grpSpPr>
+        <a:xfrm>
+          <a:off x="0" y="0"/>
+          <a:ext cx="0" cy="0"/>
+          <a:chOff x="0" y="0"/>
+          <a:chExt cx="0" cy="0"/>
+        </a:xfrm>
+      </p:grpSpPr>
+      <p:sp>
+        <p:nvSpPr>
+          <p:cNvPr id="16" name="object 16">
+            <a:extLst>
+              <a:ext uri="{FF2B5EF4-FFF2-40B4-BE49-F238E27FC236}">
+                <a16:creationId xmlns:a16="http://schemas.microsoft.com/office/drawing/2014/main" id="{8D6FC824-FC14-2363-878F-28B31ACA8F18}"/>
+              </a:ext>
+            </a:extLst>
+          </p:cNvPr>
+          <p:cNvSpPr txBox="1">
+            <a:spLocks noGrp="1"/>
+          </p:cNvSpPr>
+          <p:nvPr>
+            <p:ph type="title"/>
+          </p:nvPr>
+        </p:nvSpPr>
+        <p:spPr>
+          <a:xfrm>
+            <a:off x="685800" y="408883"/>
+            <a:ext cx="10994410" cy="782265"/>
+          </a:xfrm>
+          <a:prstGeom prst="rect">
+            <a:avLst/>
+          </a:prstGeom>
+        </p:spPr>
+        <p:txBody>
+          <a:bodyPr vert="horz" wrap="square" lIns="0" tIns="12700" rIns="0" bIns="0" rtlCol="0">
+            <a:spAutoFit/>
+          </a:bodyPr>
+          <a:lstStyle/>
+          <a:p>
+            <a:pPr marL="12700">
+              <a:lnSpc>
+                <a:spcPct val="100000"/>
+              </a:lnSpc>
+              <a:spcBef>
+                <a:spcPts val="100"/>
+              </a:spcBef>
+            </a:pPr>
+            <a:r>
+              <a:rPr lang="en-US" sz="2500" dirty="0"/>
+              <a:t>Learning outcome #1 – Directional coupler cross-section in </a:t>
+            </a:r>
+            <a:r>
+              <a:rPr lang="en-US" sz="2500" dirty="0" err="1"/>
+              <a:t>GDSFactory</a:t>
+            </a:r>
+            <a:br>
+              <a:rPr lang="es-ES" sz="2500" spc="-5" dirty="0">
+                <a:latin typeface="+mj-lt"/>
+                <a:cs typeface="Lucida Sans"/>
+              </a:rPr>
+            </a:br>
+            <a:endParaRPr sz="2500" b="0" dirty="0">
+              <a:latin typeface="+mj-lt"/>
+              <a:cs typeface="Lucida Sans"/>
+            </a:endParaRPr>
+          </a:p>
+        </p:txBody>
+      </p:sp>
+      <p:pic>
+        <p:nvPicPr>
+          <p:cNvPr id="83" name="Gráfico 82">
+            <a:extLst>
+              <a:ext uri="{FF2B5EF4-FFF2-40B4-BE49-F238E27FC236}">
+                <a16:creationId xmlns:a16="http://schemas.microsoft.com/office/drawing/2014/main" id="{C28AC64A-CB46-7761-D8C1-71C5359B15E1}"/>
+              </a:ext>
+            </a:extLst>
+          </p:cNvPr>
+          <p:cNvPicPr>
+            <a:picLocks noChangeAspect="1"/>
+          </p:cNvPicPr>
+          <p:nvPr/>
+        </p:nvPicPr>
+        <p:blipFill>
+          <a:blip r:embed="rId3">
+            <a:extLst>
+              <a:ext uri="{96DAC541-7B7A-43D3-8B79-37D633B846F1}">
+                <asvg:svgBlip xmlns:asvg="http://schemas.microsoft.com/office/drawing/2016/SVG/main" r:embed="rId4"/>
+              </a:ext>
+            </a:extLst>
+          </a:blip>
+          <a:stretch>
+            <a:fillRect/>
+          </a:stretch>
+        </p:blipFill>
+        <p:spPr>
+          <a:xfrm>
+            <a:off x="5045006" y="6356057"/>
+            <a:ext cx="6409575" cy="363174"/>
+          </a:xfrm>
+          <a:prstGeom prst="rect">
+            <a:avLst/>
+          </a:prstGeom>
+        </p:spPr>
+      </p:pic>
+      <p:sp>
+        <p:nvSpPr>
+          <p:cNvPr id="84" name="Marcador de número de diapositiva 83">
+            <a:extLst>
+              <a:ext uri="{FF2B5EF4-FFF2-40B4-BE49-F238E27FC236}">
+                <a16:creationId xmlns:a16="http://schemas.microsoft.com/office/drawing/2014/main" id="{52A4C5D0-25D9-B50C-9469-4166D7D640A2}"/>
+              </a:ext>
+            </a:extLst>
+          </p:cNvPr>
+          <p:cNvSpPr>
+            <a:spLocks noGrp="1"/>
+          </p:cNvSpPr>
+          <p:nvPr>
+            <p:ph type="sldNum" sz="quarter" idx="7"/>
+          </p:nvPr>
+        </p:nvSpPr>
+        <p:spPr/>
+        <p:txBody>
+          <a:bodyPr/>
+          <a:lstStyle/>
+          <a:p>
+            <a:fld id="{B6F15528-21DE-4FAA-801E-634DDDAF4B2B}" type="slidenum">
+              <a:rPr lang="es-ES" smtClean="0"/>
+              <a:t>6</a:t>
+            </a:fld>
+            <a:endParaRPr lang="es-ES"/>
+          </a:p>
+        </p:txBody>
+      </p:sp>
+      <p:sp>
+        <p:nvSpPr>
+          <p:cNvPr id="3" name="Marcador de pie de página 2">
+            <a:extLst>
+              <a:ext uri="{FF2B5EF4-FFF2-40B4-BE49-F238E27FC236}">
+                <a16:creationId xmlns:a16="http://schemas.microsoft.com/office/drawing/2014/main" id="{FDBEC21F-A7F4-08BD-2476-73A302FF6AF8}"/>
+              </a:ext>
+            </a:extLst>
+          </p:cNvPr>
+          <p:cNvSpPr>
+            <a:spLocks noGrp="1"/>
+          </p:cNvSpPr>
+          <p:nvPr>
+            <p:ph type="ftr" sz="quarter" idx="5"/>
+          </p:nvPr>
+        </p:nvSpPr>
+        <p:spPr/>
+        <p:txBody>
+          <a:bodyPr/>
+          <a:lstStyle/>
+          <a:p>
+            <a:pPr marL="12700">
+              <a:spcBef>
+                <a:spcPts val="15"/>
+              </a:spcBef>
+            </a:pPr>
+            <a:r>
+              <a:rPr lang="es-ES" spc="-5"/>
+              <a:t>LAB 0.2. COUPLERS</a:t>
+            </a:r>
+            <a:endParaRPr lang="es-ES" spc="-5" dirty="0"/>
+          </a:p>
+        </p:txBody>
+      </p:sp>
+      <p:sp>
+        <p:nvSpPr>
+          <p:cNvPr id="4" name="Marcador de texto 2">
+            <a:extLst>
+              <a:ext uri="{FF2B5EF4-FFF2-40B4-BE49-F238E27FC236}">
+                <a16:creationId xmlns:a16="http://schemas.microsoft.com/office/drawing/2014/main" id="{06A1826C-3BF6-F2F3-758E-A384F8272E95}"/>
+              </a:ext>
+            </a:extLst>
+          </p:cNvPr>
+          <p:cNvSpPr txBox="1">
+            <a:spLocks/>
+          </p:cNvSpPr>
+          <p:nvPr/>
+        </p:nvSpPr>
+        <p:spPr>
+          <a:xfrm>
+            <a:off x="608012" y="1295400"/>
+            <a:ext cx="11048999" cy="4958137"/>
+          </a:xfrm>
+          <a:prstGeom prst="rect">
+            <a:avLst/>
+          </a:prstGeom>
+        </p:spPr>
+        <p:txBody>
+          <a:bodyPr>
+            <a:normAutofit/>
+          </a:bodyPr>
+          <a:lstStyle>
+            <a:lvl1pPr marL="0">
+              <a:defRPr>
+                <a:latin typeface="+mn-lt"/>
+                <a:ea typeface="+mn-ea"/>
+                <a:cs typeface="+mn-cs"/>
+              </a:defRPr>
+            </a:lvl1pPr>
+            <a:lvl2pPr marL="457200">
+              <a:defRPr>
+                <a:latin typeface="+mn-lt"/>
+                <a:ea typeface="+mn-ea"/>
+                <a:cs typeface="+mn-cs"/>
+              </a:defRPr>
+            </a:lvl2pPr>
+            <a:lvl3pPr marL="914400">
+              <a:defRPr>
+                <a:latin typeface="+mn-lt"/>
+                <a:ea typeface="+mn-ea"/>
+                <a:cs typeface="+mn-cs"/>
+              </a:defRPr>
+            </a:lvl3pPr>
+            <a:lvl4pPr marL="1371600">
+              <a:defRPr>
+                <a:latin typeface="+mn-lt"/>
+                <a:ea typeface="+mn-ea"/>
+                <a:cs typeface="+mn-cs"/>
+              </a:defRPr>
+            </a:lvl4pPr>
+            <a:lvl5pPr marL="1828800">
+              <a:defRPr>
+                <a:latin typeface="+mn-lt"/>
+                <a:ea typeface="+mn-ea"/>
+                <a:cs typeface="+mn-cs"/>
+              </a:defRPr>
+            </a:lvl5pPr>
+            <a:lvl6pPr marL="2286000">
+              <a:defRPr>
+                <a:latin typeface="+mn-lt"/>
+                <a:ea typeface="+mn-ea"/>
+                <a:cs typeface="+mn-cs"/>
+              </a:defRPr>
+            </a:lvl6pPr>
+            <a:lvl7pPr marL="2743200">
+              <a:defRPr>
+                <a:latin typeface="+mn-lt"/>
+                <a:ea typeface="+mn-ea"/>
+                <a:cs typeface="+mn-cs"/>
+              </a:defRPr>
+            </a:lvl7pPr>
+            <a:lvl8pPr marL="3200400">
+              <a:defRPr>
+                <a:latin typeface="+mn-lt"/>
+                <a:ea typeface="+mn-ea"/>
+                <a:cs typeface="+mn-cs"/>
+              </a:defRPr>
+            </a:lvl8pPr>
+            <a:lvl9pPr marL="3657600">
+              <a:defRPr>
+                <a:latin typeface="+mn-lt"/>
+                <a:ea typeface="+mn-ea"/>
+                <a:cs typeface="+mn-cs"/>
+              </a:defRPr>
+            </a:lvl9pPr>
+          </a:lstStyle>
+          <a:p>
+            <a:pPr algn="just"/>
+            <a:endParaRPr lang="en-US" sz="2000" kern="0" dirty="0">
+              <a:solidFill>
+                <a:sysClr val="windowText" lastClr="000000"/>
+              </a:solidFill>
+            </a:endParaRPr>
+          </a:p>
+        </p:txBody>
+      </p:sp>
+      <p:sp>
+        <p:nvSpPr>
+          <p:cNvPr id="2" name="CuadroTexto 1">
+            <a:extLst>
+              <a:ext uri="{FF2B5EF4-FFF2-40B4-BE49-F238E27FC236}">
+                <a16:creationId xmlns:a16="http://schemas.microsoft.com/office/drawing/2014/main" id="{44C88656-708A-A5A4-350A-FC8ED1DEEF57}"/>
+              </a:ext>
+            </a:extLst>
+          </p:cNvPr>
+          <p:cNvSpPr txBox="1"/>
+          <p:nvPr/>
+        </p:nvSpPr>
+        <p:spPr>
+          <a:xfrm>
+            <a:off x="709081" y="3578231"/>
+            <a:ext cx="11199971" cy="276999"/>
+          </a:xfrm>
+          <a:prstGeom prst="rect">
+            <a:avLst/>
+          </a:prstGeom>
+          <a:solidFill>
+            <a:schemeClr val="bg1">
+              <a:lumMod val="95000"/>
+            </a:schemeClr>
+          </a:solidFill>
+          <a:ln w="28575">
+            <a:solidFill>
+              <a:srgbClr val="E0700D"/>
+            </a:solidFill>
+          </a:ln>
+        </p:spPr>
+        <p:txBody>
+          <a:bodyPr wrap="square" rtlCol="0">
+            <a:spAutoFit/>
+          </a:bodyPr>
+          <a:lstStyle/>
+          <a:p>
+            <a:pPr algn="just"/>
+            <a:r>
+              <a:rPr lang="en-US" sz="1200" dirty="0">
+                <a:latin typeface="Arial" panose="020B0604020202020204" pitchFamily="34" charset="0"/>
+                <a:cs typeface="Arial" panose="020B0604020202020204" pitchFamily="34" charset="0"/>
+              </a:rPr>
+              <a:t>Al similar </a:t>
+            </a:r>
+            <a:r>
+              <a:rPr lang="en-US" sz="1200" dirty="0" err="1">
+                <a:latin typeface="Arial" panose="020B0604020202020204" pitchFamily="34" charset="0"/>
+                <a:cs typeface="Arial" panose="020B0604020202020204" pitchFamily="34" charset="0"/>
+              </a:rPr>
+              <a:t>los</a:t>
+            </a:r>
+            <a:r>
+              <a:rPr lang="en-US" sz="1200" dirty="0">
+                <a:latin typeface="Arial" panose="020B0604020202020204" pitchFamily="34" charset="0"/>
+                <a:cs typeface="Arial" panose="020B0604020202020204" pitchFamily="34" charset="0"/>
+              </a:rPr>
+              <a:t> </a:t>
+            </a:r>
+            <a:r>
+              <a:rPr lang="en-US" sz="1200" dirty="0" err="1">
+                <a:latin typeface="Arial" panose="020B0604020202020204" pitchFamily="34" charset="0"/>
+                <a:cs typeface="Arial" panose="020B0604020202020204" pitchFamily="34" charset="0"/>
+              </a:rPr>
+              <a:t>primeros</a:t>
+            </a:r>
+            <a:r>
+              <a:rPr lang="en-US" sz="1200" dirty="0">
+                <a:latin typeface="Arial" panose="020B0604020202020204" pitchFamily="34" charset="0"/>
+                <a:cs typeface="Arial" panose="020B0604020202020204" pitchFamily="34" charset="0"/>
+              </a:rPr>
+              <a:t> </a:t>
+            </a:r>
+            <a:r>
+              <a:rPr lang="en-US" sz="1200" dirty="0" err="1">
+                <a:latin typeface="Arial" panose="020B0604020202020204" pitchFamily="34" charset="0"/>
+                <a:cs typeface="Arial" panose="020B0604020202020204" pitchFamily="34" charset="0"/>
+              </a:rPr>
+              <a:t>modos</a:t>
+            </a:r>
+            <a:r>
+              <a:rPr lang="en-US" sz="1200" dirty="0">
+                <a:latin typeface="Arial" panose="020B0604020202020204" pitchFamily="34" charset="0"/>
+                <a:cs typeface="Arial" panose="020B0604020202020204" pitchFamily="34" charset="0"/>
+              </a:rPr>
+              <a:t> TE, </a:t>
+            </a:r>
+            <a:r>
+              <a:rPr lang="en-US" sz="1200" dirty="0" err="1">
+                <a:latin typeface="Arial" panose="020B0604020202020204" pitchFamily="34" charset="0"/>
+                <a:cs typeface="Arial" panose="020B0604020202020204" pitchFamily="34" charset="0"/>
+              </a:rPr>
+              <a:t>vemos</a:t>
+            </a:r>
+            <a:r>
+              <a:rPr lang="en-US" sz="1200" dirty="0">
+                <a:latin typeface="Arial" panose="020B0604020202020204" pitchFamily="34" charset="0"/>
+                <a:cs typeface="Arial" panose="020B0604020202020204" pitchFamily="34" charset="0"/>
+              </a:rPr>
+              <a:t> </a:t>
+            </a:r>
+            <a:r>
+              <a:rPr lang="en-US" sz="1200" dirty="0" err="1">
+                <a:latin typeface="Arial" panose="020B0604020202020204" pitchFamily="34" charset="0"/>
+                <a:cs typeface="Arial" panose="020B0604020202020204" pitchFamily="34" charset="0"/>
+              </a:rPr>
+              <a:t>que</a:t>
+            </a:r>
+            <a:r>
+              <a:rPr lang="en-US" sz="1200" dirty="0">
+                <a:latin typeface="Arial" panose="020B0604020202020204" pitchFamily="34" charset="0"/>
+                <a:cs typeface="Arial" panose="020B0604020202020204" pitchFamily="34" charset="0"/>
+              </a:rPr>
+              <a:t> temenos un </a:t>
+            </a:r>
+            <a:r>
+              <a:rPr lang="en-US" sz="1200" dirty="0" err="1">
+                <a:latin typeface="Arial" panose="020B0604020202020204" pitchFamily="34" charset="0"/>
+                <a:cs typeface="Arial" panose="020B0604020202020204" pitchFamily="34" charset="0"/>
+              </a:rPr>
+              <a:t>comportamiento</a:t>
+            </a:r>
+            <a:r>
+              <a:rPr lang="en-US" sz="1200" dirty="0">
+                <a:latin typeface="Arial" panose="020B0604020202020204" pitchFamily="34" charset="0"/>
+                <a:cs typeface="Arial" panose="020B0604020202020204" pitchFamily="34" charset="0"/>
+              </a:rPr>
+              <a:t> </a:t>
+            </a:r>
+            <a:r>
+              <a:rPr lang="en-US" sz="1200" dirty="0" err="1">
+                <a:latin typeface="Arial" panose="020B0604020202020204" pitchFamily="34" charset="0"/>
+                <a:cs typeface="Arial" panose="020B0604020202020204" pitchFamily="34" charset="0"/>
+              </a:rPr>
+              <a:t>simétricon</a:t>
+            </a:r>
+            <a:r>
+              <a:rPr lang="en-US" sz="1200" dirty="0">
+                <a:latin typeface="Arial" panose="020B0604020202020204" pitchFamily="34" charset="0"/>
+                <a:cs typeface="Arial" panose="020B0604020202020204" pitchFamily="34" charset="0"/>
+              </a:rPr>
+              <a:t> y </a:t>
+            </a:r>
+            <a:r>
+              <a:rPr lang="en-US" sz="1200" dirty="0" err="1">
+                <a:latin typeface="Arial" panose="020B0604020202020204" pitchFamily="34" charset="0"/>
+                <a:cs typeface="Arial" panose="020B0604020202020204" pitchFamily="34" charset="0"/>
+              </a:rPr>
+              <a:t>asimétrico</a:t>
+            </a:r>
+            <a:r>
+              <a:rPr lang="en-US" sz="1200" dirty="0">
+                <a:latin typeface="Arial" panose="020B0604020202020204" pitchFamily="34" charset="0"/>
+                <a:cs typeface="Arial" panose="020B0604020202020204" pitchFamily="34" charset="0"/>
+              </a:rPr>
+              <a:t>. </a:t>
+            </a:r>
+          </a:p>
+        </p:txBody>
+      </p:sp>
+      <p:pic>
+        <p:nvPicPr>
+          <p:cNvPr id="6" name="Imagen 5" descr="Imagen que contiene Rectángulo&#10;&#10;El contenido generado por IA puede ser incorrecto.">
+            <a:extLst>
+              <a:ext uri="{FF2B5EF4-FFF2-40B4-BE49-F238E27FC236}">
+                <a16:creationId xmlns:a16="http://schemas.microsoft.com/office/drawing/2014/main" id="{7CFAB5FE-3260-C75E-B7C1-555AE7C638BF}"/>
+              </a:ext>
+            </a:extLst>
+          </p:cNvPr>
+          <p:cNvPicPr>
+            <a:picLocks noChangeAspect="1"/>
+          </p:cNvPicPr>
+          <p:nvPr/>
+        </p:nvPicPr>
+        <p:blipFill>
+          <a:blip r:embed="rId5"/>
+          <a:stretch>
+            <a:fillRect/>
+          </a:stretch>
+        </p:blipFill>
+        <p:spPr>
+          <a:xfrm>
+            <a:off x="705153" y="867379"/>
+            <a:ext cx="3590784" cy="2503586"/>
+          </a:xfrm>
+          <a:prstGeom prst="rect">
+            <a:avLst/>
+          </a:prstGeom>
+        </p:spPr>
+      </p:pic>
+      <p:pic>
+        <p:nvPicPr>
+          <p:cNvPr id="10" name="Imagen 9" descr="Gráfico, Gráfico de burbujas&#10;&#10;El contenido generado por IA puede ser incorrecto.">
+            <a:extLst>
+              <a:ext uri="{FF2B5EF4-FFF2-40B4-BE49-F238E27FC236}">
+                <a16:creationId xmlns:a16="http://schemas.microsoft.com/office/drawing/2014/main" id="{74FA214D-58DA-17CC-07B4-16A8FC20E913}"/>
+              </a:ext>
+            </a:extLst>
+          </p:cNvPr>
+          <p:cNvPicPr>
+            <a:picLocks noChangeAspect="1"/>
+          </p:cNvPicPr>
+          <p:nvPr/>
+        </p:nvPicPr>
+        <p:blipFill>
+          <a:blip r:embed="rId6"/>
+          <a:stretch>
+            <a:fillRect/>
+          </a:stretch>
+        </p:blipFill>
+        <p:spPr>
+          <a:xfrm>
+            <a:off x="5812636" y="989330"/>
+            <a:ext cx="3527284" cy="2381635"/>
+          </a:xfrm>
+          <a:prstGeom prst="rect">
+            <a:avLst/>
+          </a:prstGeom>
+        </p:spPr>
+      </p:pic>
+    </p:spTree>
+    <p:extLst>
+      <p:ext uri="{BB962C8B-B14F-4D97-AF65-F5344CB8AC3E}">
+        <p14:creationId xmlns:p14="http://schemas.microsoft.com/office/powerpoint/2010/main" val="27197043"/>
+      </p:ext>
+    </p:extLst>
+  </p:cSld>
+  <p:clrMapOvr>
+    <a:masterClrMapping/>
+  </p:clrMapOvr>
+</p:sld>
+</file>
+
+<file path=ppt/slides/slide7.xml><?xml version="1.0" encoding="utf-8"?>
+<p:sld xmlns:a="http://schemas.openxmlformats.org/drawingml/2006/main" xmlns:r="http://schemas.openxmlformats.org/officeDocument/2006/relationships" xmlns:p="http://schemas.openxmlformats.org/presentationml/2006/main">
+  <p:cSld>
+    <p:spTree>
+      <p:nvGrpSpPr>
+        <p:cNvPr id="1" name="">
+          <a:extLst>
+            <a:ext uri="{FF2B5EF4-FFF2-40B4-BE49-F238E27FC236}">
+              <a16:creationId xmlns:a16="http://schemas.microsoft.com/office/drawing/2014/main" id="{263AB16B-0136-587B-EBC0-607E3741075B}"/>
+            </a:ext>
+          </a:extLst>
+        </p:cNvPr>
+        <p:cNvGrpSpPr/>
+        <p:nvPr/>
+      </p:nvGrpSpPr>
+      <p:grpSpPr>
+        <a:xfrm>
+          <a:off x="0" y="0"/>
+          <a:ext cx="0" cy="0"/>
+          <a:chOff x="0" y="0"/>
+          <a:chExt cx="0" cy="0"/>
+        </a:xfrm>
+      </p:grpSpPr>
+      <p:sp>
+        <p:nvSpPr>
+          <p:cNvPr id="16" name="object 16">
+            <a:extLst>
+              <a:ext uri="{FF2B5EF4-FFF2-40B4-BE49-F238E27FC236}">
+                <a16:creationId xmlns:a16="http://schemas.microsoft.com/office/drawing/2014/main" id="{CAB5756F-DDC7-77AC-7BCF-CC51F69F55F7}"/>
+              </a:ext>
+            </a:extLst>
+          </p:cNvPr>
+          <p:cNvSpPr txBox="1">
+            <a:spLocks noGrp="1"/>
+          </p:cNvSpPr>
+          <p:nvPr>
+            <p:ph type="title"/>
+          </p:nvPr>
+        </p:nvSpPr>
+        <p:spPr>
+          <a:xfrm>
+            <a:off x="685800" y="408883"/>
+            <a:ext cx="10994410" cy="782265"/>
+          </a:xfrm>
+          <a:prstGeom prst="rect">
+            <a:avLst/>
+          </a:prstGeom>
+        </p:spPr>
+        <p:txBody>
+          <a:bodyPr vert="horz" wrap="square" lIns="0" tIns="12700" rIns="0" bIns="0" rtlCol="0">
+            <a:spAutoFit/>
+          </a:bodyPr>
+          <a:lstStyle/>
+          <a:p>
+            <a:pPr marL="12700">
+              <a:lnSpc>
+                <a:spcPct val="100000"/>
+              </a:lnSpc>
+              <a:spcBef>
+                <a:spcPts val="100"/>
+              </a:spcBef>
+            </a:pPr>
+            <a:r>
+              <a:rPr lang="en-US" sz="2500" dirty="0"/>
+              <a:t>Learning outcome #1 – Directional coupler cross-section in </a:t>
+            </a:r>
+            <a:r>
+              <a:rPr lang="en-US" sz="2500" dirty="0" err="1"/>
+              <a:t>GDSFactory</a:t>
+            </a:r>
+            <a:br>
+              <a:rPr lang="es-ES" sz="2500" spc="-5" dirty="0">
+                <a:latin typeface="+mj-lt"/>
+                <a:cs typeface="Lucida Sans"/>
+              </a:rPr>
+            </a:br>
+            <a:endParaRPr sz="2500" b="0" dirty="0">
+              <a:latin typeface="+mj-lt"/>
+              <a:cs typeface="Lucida Sans"/>
+            </a:endParaRPr>
+          </a:p>
+        </p:txBody>
+      </p:sp>
+      <p:pic>
+        <p:nvPicPr>
+          <p:cNvPr id="83" name="Gráfico 82">
+            <a:extLst>
+              <a:ext uri="{FF2B5EF4-FFF2-40B4-BE49-F238E27FC236}">
+                <a16:creationId xmlns:a16="http://schemas.microsoft.com/office/drawing/2014/main" id="{4CEED293-0C84-B284-C5EF-9F6767249B1F}"/>
+              </a:ext>
+            </a:extLst>
+          </p:cNvPr>
+          <p:cNvPicPr>
+            <a:picLocks noChangeAspect="1"/>
+          </p:cNvPicPr>
+          <p:nvPr/>
+        </p:nvPicPr>
+        <p:blipFill>
+          <a:blip r:embed="rId3">
+            <a:extLst>
+              <a:ext uri="{96DAC541-7B7A-43D3-8B79-37D633B846F1}">
+                <asvg:svgBlip xmlns:asvg="http://schemas.microsoft.com/office/drawing/2016/SVG/main" r:embed="rId4"/>
+              </a:ext>
+            </a:extLst>
+          </a:blip>
+          <a:stretch>
+            <a:fillRect/>
+          </a:stretch>
+        </p:blipFill>
+        <p:spPr>
+          <a:xfrm>
+            <a:off x="5045006" y="6356057"/>
+            <a:ext cx="6409575" cy="363174"/>
+          </a:xfrm>
+          <a:prstGeom prst="rect">
+            <a:avLst/>
+          </a:prstGeom>
+        </p:spPr>
+      </p:pic>
+      <p:sp>
+        <p:nvSpPr>
+          <p:cNvPr id="84" name="Marcador de número de diapositiva 83">
+            <a:extLst>
+              <a:ext uri="{FF2B5EF4-FFF2-40B4-BE49-F238E27FC236}">
+                <a16:creationId xmlns:a16="http://schemas.microsoft.com/office/drawing/2014/main" id="{94829901-7261-7F1E-1ADC-A915C6F67B03}"/>
+              </a:ext>
+            </a:extLst>
+          </p:cNvPr>
+          <p:cNvSpPr>
+            <a:spLocks noGrp="1"/>
+          </p:cNvSpPr>
+          <p:nvPr>
+            <p:ph type="sldNum" sz="quarter" idx="7"/>
+          </p:nvPr>
+        </p:nvSpPr>
+        <p:spPr/>
+        <p:txBody>
+          <a:bodyPr/>
+          <a:lstStyle/>
+          <a:p>
+            <a:fld id="{B6F15528-21DE-4FAA-801E-634DDDAF4B2B}" type="slidenum">
+              <a:rPr lang="es-ES" smtClean="0"/>
+              <a:t>7</a:t>
+            </a:fld>
+            <a:endParaRPr lang="es-ES"/>
+          </a:p>
+        </p:txBody>
+      </p:sp>
+      <p:sp>
+        <p:nvSpPr>
+          <p:cNvPr id="3" name="Marcador de pie de página 2">
+            <a:extLst>
+              <a:ext uri="{FF2B5EF4-FFF2-40B4-BE49-F238E27FC236}">
+                <a16:creationId xmlns:a16="http://schemas.microsoft.com/office/drawing/2014/main" id="{21821133-E620-C6EF-0A72-8D86104E3AB4}"/>
+              </a:ext>
+            </a:extLst>
+          </p:cNvPr>
+          <p:cNvSpPr>
+            <a:spLocks noGrp="1"/>
+          </p:cNvSpPr>
+          <p:nvPr>
+            <p:ph type="ftr" sz="quarter" idx="5"/>
+          </p:nvPr>
+        </p:nvSpPr>
+        <p:spPr/>
+        <p:txBody>
+          <a:bodyPr/>
+          <a:lstStyle/>
+          <a:p>
+            <a:pPr marL="12700">
+              <a:spcBef>
+                <a:spcPts val="15"/>
+              </a:spcBef>
+            </a:pPr>
+            <a:r>
+              <a:rPr lang="es-ES" spc="-5"/>
+              <a:t>LAB 0.2. COUPLERS</a:t>
+            </a:r>
+            <a:endParaRPr lang="es-ES" spc="-5" dirty="0"/>
+          </a:p>
+        </p:txBody>
+      </p:sp>
+      <p:sp>
+        <p:nvSpPr>
+          <p:cNvPr id="4" name="Marcador de texto 2">
+            <a:extLst>
+              <a:ext uri="{FF2B5EF4-FFF2-40B4-BE49-F238E27FC236}">
+                <a16:creationId xmlns:a16="http://schemas.microsoft.com/office/drawing/2014/main" id="{C4E8C270-716A-D994-D63A-9F320E9F5FB6}"/>
+              </a:ext>
+            </a:extLst>
+          </p:cNvPr>
+          <p:cNvSpPr txBox="1">
+            <a:spLocks/>
+          </p:cNvSpPr>
+          <p:nvPr/>
+        </p:nvSpPr>
+        <p:spPr>
+          <a:xfrm>
+            <a:off x="608012" y="1295400"/>
+            <a:ext cx="11048999" cy="4958137"/>
+          </a:xfrm>
+          <a:prstGeom prst="rect">
+            <a:avLst/>
+          </a:prstGeom>
+        </p:spPr>
+        <p:txBody>
+          <a:bodyPr>
+            <a:normAutofit/>
+          </a:bodyPr>
+          <a:lstStyle>
+            <a:lvl1pPr marL="0">
+              <a:defRPr>
+                <a:latin typeface="+mn-lt"/>
+                <a:ea typeface="+mn-ea"/>
+                <a:cs typeface="+mn-cs"/>
+              </a:defRPr>
+            </a:lvl1pPr>
+            <a:lvl2pPr marL="457200">
+              <a:defRPr>
+                <a:latin typeface="+mn-lt"/>
+                <a:ea typeface="+mn-ea"/>
+                <a:cs typeface="+mn-cs"/>
+              </a:defRPr>
+            </a:lvl2pPr>
+            <a:lvl3pPr marL="914400">
+              <a:defRPr>
+                <a:latin typeface="+mn-lt"/>
+                <a:ea typeface="+mn-ea"/>
+                <a:cs typeface="+mn-cs"/>
+              </a:defRPr>
+            </a:lvl3pPr>
+            <a:lvl4pPr marL="1371600">
+              <a:defRPr>
+                <a:latin typeface="+mn-lt"/>
+                <a:ea typeface="+mn-ea"/>
+                <a:cs typeface="+mn-cs"/>
+              </a:defRPr>
+            </a:lvl4pPr>
+            <a:lvl5pPr marL="1828800">
+              <a:defRPr>
+                <a:latin typeface="+mn-lt"/>
+                <a:ea typeface="+mn-ea"/>
+                <a:cs typeface="+mn-cs"/>
+              </a:defRPr>
+            </a:lvl5pPr>
+            <a:lvl6pPr marL="2286000">
+              <a:defRPr>
+                <a:latin typeface="+mn-lt"/>
+                <a:ea typeface="+mn-ea"/>
+                <a:cs typeface="+mn-cs"/>
+              </a:defRPr>
+            </a:lvl6pPr>
+            <a:lvl7pPr marL="2743200">
+              <a:defRPr>
+                <a:latin typeface="+mn-lt"/>
+                <a:ea typeface="+mn-ea"/>
+                <a:cs typeface="+mn-cs"/>
+              </a:defRPr>
+            </a:lvl7pPr>
+            <a:lvl8pPr marL="3200400">
+              <a:defRPr>
+                <a:latin typeface="+mn-lt"/>
+                <a:ea typeface="+mn-ea"/>
+                <a:cs typeface="+mn-cs"/>
+              </a:defRPr>
+            </a:lvl8pPr>
+            <a:lvl9pPr marL="3657600">
+              <a:defRPr>
+                <a:latin typeface="+mn-lt"/>
+                <a:ea typeface="+mn-ea"/>
+                <a:cs typeface="+mn-cs"/>
+              </a:defRPr>
+            </a:lvl9pPr>
+          </a:lstStyle>
+          <a:p>
+            <a:pPr algn="just"/>
+            <a:endParaRPr lang="en-US" sz="2000" kern="0" dirty="0">
+              <a:solidFill>
+                <a:sysClr val="windowText" lastClr="000000"/>
+              </a:solidFill>
+            </a:endParaRPr>
+          </a:p>
+        </p:txBody>
+      </p:sp>
+      <p:sp>
+        <p:nvSpPr>
+          <p:cNvPr id="2" name="CuadroTexto 1">
+            <a:extLst>
+              <a:ext uri="{FF2B5EF4-FFF2-40B4-BE49-F238E27FC236}">
+                <a16:creationId xmlns:a16="http://schemas.microsoft.com/office/drawing/2014/main" id="{1C2B0894-F144-3B60-6430-921194BEBB51}"/>
+              </a:ext>
+            </a:extLst>
+          </p:cNvPr>
+          <p:cNvSpPr txBox="1"/>
+          <p:nvPr/>
+        </p:nvSpPr>
+        <p:spPr>
+          <a:xfrm>
+            <a:off x="573377" y="3400195"/>
+            <a:ext cx="8494423" cy="276999"/>
+          </a:xfrm>
+          <a:prstGeom prst="rect">
+            <a:avLst/>
+          </a:prstGeom>
+          <a:solidFill>
+            <a:schemeClr val="bg1">
+              <a:lumMod val="95000"/>
+            </a:schemeClr>
+          </a:solidFill>
+          <a:ln w="28575">
+            <a:solidFill>
+              <a:srgbClr val="E0700D"/>
+            </a:solidFill>
+          </a:ln>
+        </p:spPr>
+        <p:txBody>
+          <a:bodyPr wrap="square" rtlCol="0">
+            <a:spAutoFit/>
+          </a:bodyPr>
+          <a:lstStyle/>
+          <a:p>
+            <a:pPr algn="just"/>
+            <a:r>
+              <a:rPr lang="en-US" sz="1200" dirty="0">
+                <a:latin typeface="Arial" panose="020B0604020202020204" pitchFamily="34" charset="0"/>
+                <a:cs typeface="Arial" panose="020B0604020202020204" pitchFamily="34" charset="0"/>
+              </a:rPr>
+              <a:t>Al </a:t>
+            </a:r>
+            <a:r>
+              <a:rPr lang="en-US" sz="1200" dirty="0" err="1">
+                <a:latin typeface="Arial" panose="020B0604020202020204" pitchFamily="34" charset="0"/>
+                <a:cs typeface="Arial" panose="020B0604020202020204" pitchFamily="34" charset="0"/>
+              </a:rPr>
+              <a:t>simular</a:t>
+            </a:r>
+            <a:r>
+              <a:rPr lang="en-US" sz="1200" dirty="0">
+                <a:latin typeface="Arial" panose="020B0604020202020204" pitchFamily="34" charset="0"/>
+                <a:cs typeface="Arial" panose="020B0604020202020204" pitchFamily="34" charset="0"/>
+              </a:rPr>
+              <a:t> </a:t>
+            </a:r>
+            <a:r>
+              <a:rPr lang="en-US" sz="1200" dirty="0" err="1">
+                <a:latin typeface="Arial" panose="020B0604020202020204" pitchFamily="34" charset="0"/>
+                <a:cs typeface="Arial" panose="020B0604020202020204" pitchFamily="34" charset="0"/>
+              </a:rPr>
+              <a:t>los</a:t>
+            </a:r>
+            <a:r>
+              <a:rPr lang="en-US" sz="1200" dirty="0">
+                <a:latin typeface="Arial" panose="020B0604020202020204" pitchFamily="34" charset="0"/>
+                <a:cs typeface="Arial" panose="020B0604020202020204" pitchFamily="34" charset="0"/>
+              </a:rPr>
+              <a:t> </a:t>
+            </a:r>
+            <a:r>
+              <a:rPr lang="en-US" sz="1200" dirty="0" err="1">
+                <a:latin typeface="Arial" panose="020B0604020202020204" pitchFamily="34" charset="0"/>
+                <a:cs typeface="Arial" panose="020B0604020202020204" pitchFamily="34" charset="0"/>
+              </a:rPr>
+              <a:t>primeros</a:t>
+            </a:r>
+            <a:r>
+              <a:rPr lang="en-US" sz="1200" dirty="0">
+                <a:latin typeface="Arial" panose="020B0604020202020204" pitchFamily="34" charset="0"/>
+                <a:cs typeface="Arial" panose="020B0604020202020204" pitchFamily="34" charset="0"/>
+              </a:rPr>
+              <a:t> </a:t>
+            </a:r>
+            <a:r>
+              <a:rPr lang="en-US" sz="1200" dirty="0" err="1">
+                <a:latin typeface="Arial" panose="020B0604020202020204" pitchFamily="34" charset="0"/>
+                <a:cs typeface="Arial" panose="020B0604020202020204" pitchFamily="34" charset="0"/>
+              </a:rPr>
+              <a:t>modos</a:t>
+            </a:r>
+            <a:r>
+              <a:rPr lang="en-US" sz="1200" dirty="0">
+                <a:latin typeface="Arial" panose="020B0604020202020204" pitchFamily="34" charset="0"/>
+                <a:cs typeface="Arial" panose="020B0604020202020204" pitchFamily="34" charset="0"/>
+              </a:rPr>
+              <a:t> TE, </a:t>
+            </a:r>
+            <a:r>
+              <a:rPr lang="en-US" sz="1200" dirty="0" err="1">
+                <a:latin typeface="Arial" panose="020B0604020202020204" pitchFamily="34" charset="0"/>
+                <a:cs typeface="Arial" panose="020B0604020202020204" pitchFamily="34" charset="0"/>
+              </a:rPr>
+              <a:t>vemos</a:t>
+            </a:r>
+            <a:r>
+              <a:rPr lang="en-US" sz="1200" dirty="0">
+                <a:latin typeface="Arial" panose="020B0604020202020204" pitchFamily="34" charset="0"/>
+                <a:cs typeface="Arial" panose="020B0604020202020204" pitchFamily="34" charset="0"/>
+              </a:rPr>
+              <a:t> </a:t>
+            </a:r>
+            <a:r>
+              <a:rPr lang="en-US" sz="1200" dirty="0" err="1">
+                <a:latin typeface="Arial" panose="020B0604020202020204" pitchFamily="34" charset="0"/>
+                <a:cs typeface="Arial" panose="020B0604020202020204" pitchFamily="34" charset="0"/>
+              </a:rPr>
+              <a:t>que</a:t>
+            </a:r>
+            <a:r>
+              <a:rPr lang="en-US" sz="1200" dirty="0">
+                <a:latin typeface="Arial" panose="020B0604020202020204" pitchFamily="34" charset="0"/>
+                <a:cs typeface="Arial" panose="020B0604020202020204" pitchFamily="34" charset="0"/>
+              </a:rPr>
+              <a:t> temenos un </a:t>
+            </a:r>
+            <a:r>
+              <a:rPr lang="en-US" sz="1200" dirty="0" err="1">
+                <a:latin typeface="Arial" panose="020B0604020202020204" pitchFamily="34" charset="0"/>
+                <a:cs typeface="Arial" panose="020B0604020202020204" pitchFamily="34" charset="0"/>
+              </a:rPr>
+              <a:t>comportamiento</a:t>
+            </a:r>
+            <a:r>
+              <a:rPr lang="en-US" sz="1200" dirty="0">
+                <a:latin typeface="Arial" panose="020B0604020202020204" pitchFamily="34" charset="0"/>
+                <a:cs typeface="Arial" panose="020B0604020202020204" pitchFamily="34" charset="0"/>
+              </a:rPr>
+              <a:t> </a:t>
+            </a:r>
+            <a:r>
+              <a:rPr lang="en-US" sz="1200" dirty="0" err="1">
+                <a:latin typeface="Arial" panose="020B0604020202020204" pitchFamily="34" charset="0"/>
+                <a:cs typeface="Arial" panose="020B0604020202020204" pitchFamily="34" charset="0"/>
+              </a:rPr>
+              <a:t>simétricon</a:t>
+            </a:r>
+            <a:r>
+              <a:rPr lang="en-US" sz="1200" dirty="0">
+                <a:latin typeface="Arial" panose="020B0604020202020204" pitchFamily="34" charset="0"/>
+                <a:cs typeface="Arial" panose="020B0604020202020204" pitchFamily="34" charset="0"/>
+              </a:rPr>
+              <a:t> y </a:t>
+            </a:r>
+            <a:r>
+              <a:rPr lang="en-US" sz="1200" dirty="0" err="1">
+                <a:latin typeface="Arial" panose="020B0604020202020204" pitchFamily="34" charset="0"/>
+                <a:cs typeface="Arial" panose="020B0604020202020204" pitchFamily="34" charset="0"/>
+              </a:rPr>
+              <a:t>asimétrico</a:t>
+            </a:r>
+            <a:r>
+              <a:rPr lang="en-US" sz="1200" dirty="0">
+                <a:latin typeface="Arial" panose="020B0604020202020204" pitchFamily="34" charset="0"/>
+                <a:cs typeface="Arial" panose="020B0604020202020204" pitchFamily="34" charset="0"/>
+              </a:rPr>
+              <a:t>. </a:t>
+            </a:r>
+          </a:p>
+        </p:txBody>
+      </p:sp>
+      <p:pic>
+        <p:nvPicPr>
+          <p:cNvPr id="6" name="Imagen 5" descr="Imagen que contiene Rectángulo&#10;&#10;El contenido generado por IA puede ser incorrecto.">
+            <a:extLst>
+              <a:ext uri="{FF2B5EF4-FFF2-40B4-BE49-F238E27FC236}">
+                <a16:creationId xmlns:a16="http://schemas.microsoft.com/office/drawing/2014/main" id="{AA6BBC88-CB3F-729A-08D8-8AD106102212}"/>
+              </a:ext>
+            </a:extLst>
+          </p:cNvPr>
+          <p:cNvPicPr>
+            <a:picLocks noChangeAspect="1"/>
+          </p:cNvPicPr>
+          <p:nvPr/>
+        </p:nvPicPr>
+        <p:blipFill>
+          <a:blip r:embed="rId5"/>
+          <a:stretch>
+            <a:fillRect/>
+          </a:stretch>
+        </p:blipFill>
+        <p:spPr>
+          <a:xfrm>
+            <a:off x="705153" y="867379"/>
+            <a:ext cx="3590784" cy="2503586"/>
+          </a:xfrm>
+          <a:prstGeom prst="rect">
+            <a:avLst/>
+          </a:prstGeom>
+        </p:spPr>
+      </p:pic>
+      <p:pic>
+        <p:nvPicPr>
+          <p:cNvPr id="10" name="Imagen 9" descr="Gráfico, Gráfico de burbujas&#10;&#10;El contenido generado por IA puede ser incorrecto.">
+            <a:extLst>
+              <a:ext uri="{FF2B5EF4-FFF2-40B4-BE49-F238E27FC236}">
+                <a16:creationId xmlns:a16="http://schemas.microsoft.com/office/drawing/2014/main" id="{BEC77AFA-0F01-3DE2-417A-835DFD226C32}"/>
+              </a:ext>
+            </a:extLst>
+          </p:cNvPr>
+          <p:cNvPicPr>
+            <a:picLocks noChangeAspect="1"/>
+          </p:cNvPicPr>
+          <p:nvPr/>
+        </p:nvPicPr>
+        <p:blipFill>
+          <a:blip r:embed="rId6"/>
+          <a:stretch>
+            <a:fillRect/>
+          </a:stretch>
+        </p:blipFill>
+        <p:spPr>
+          <a:xfrm>
+            <a:off x="5812636" y="989330"/>
+            <a:ext cx="3527284" cy="2381635"/>
+          </a:xfrm>
+          <a:prstGeom prst="rect">
+            <a:avLst/>
+          </a:prstGeom>
+        </p:spPr>
+      </p:pic>
+      <p:pic>
+        <p:nvPicPr>
+          <p:cNvPr id="7" name="Imagen 6" descr="Imagen que contiene Interfaz de usuario gráfica&#10;&#10;El contenido generado por IA puede ser incorrecto.">
+            <a:extLst>
+              <a:ext uri="{FF2B5EF4-FFF2-40B4-BE49-F238E27FC236}">
+                <a16:creationId xmlns:a16="http://schemas.microsoft.com/office/drawing/2014/main" id="{159735B4-E976-F88A-DD41-E5F741D6CAC8}"/>
+              </a:ext>
+            </a:extLst>
+          </p:cNvPr>
+          <p:cNvPicPr>
+            <a:picLocks noChangeAspect="1"/>
+          </p:cNvPicPr>
+          <p:nvPr/>
+        </p:nvPicPr>
+        <p:blipFill>
+          <a:blip r:embed="rId7"/>
+          <a:stretch>
+            <a:fillRect/>
+          </a:stretch>
+        </p:blipFill>
+        <p:spPr>
+          <a:xfrm>
+            <a:off x="1066800" y="3951412"/>
+            <a:ext cx="3181047" cy="2125534"/>
+          </a:xfrm>
+          <a:prstGeom prst="rect">
+            <a:avLst/>
+          </a:prstGeom>
+        </p:spPr>
+      </p:pic>
+      <p:pic>
+        <p:nvPicPr>
+          <p:cNvPr id="9" name="Imagen 8" descr="Interfaz de usuario gráfica, Gráfico&#10;&#10;El contenido generado por IA puede ser incorrecto.">
+            <a:extLst>
+              <a:ext uri="{FF2B5EF4-FFF2-40B4-BE49-F238E27FC236}">
+                <a16:creationId xmlns:a16="http://schemas.microsoft.com/office/drawing/2014/main" id="{8C3D86E4-811D-4335-F721-8084E7945107}"/>
+              </a:ext>
+            </a:extLst>
+          </p:cNvPr>
+          <p:cNvPicPr>
+            <a:picLocks noChangeAspect="1"/>
+          </p:cNvPicPr>
+          <p:nvPr/>
+        </p:nvPicPr>
+        <p:blipFill>
+          <a:blip r:embed="rId8"/>
+          <a:stretch>
+            <a:fillRect/>
+          </a:stretch>
+        </p:blipFill>
+        <p:spPr>
+          <a:xfrm>
+            <a:off x="6132510" y="3901340"/>
+            <a:ext cx="3348611" cy="2262156"/>
+          </a:xfrm>
+          <a:prstGeom prst="rect">
+            <a:avLst/>
+          </a:prstGeom>
+        </p:spPr>
+      </p:pic>
+      <p:sp>
+        <p:nvSpPr>
+          <p:cNvPr id="11" name="CuadroTexto 10">
+            <a:extLst>
+              <a:ext uri="{FF2B5EF4-FFF2-40B4-BE49-F238E27FC236}">
+                <a16:creationId xmlns:a16="http://schemas.microsoft.com/office/drawing/2014/main" id="{0409357A-1DDB-FAE7-38E4-88520EED71E8}"/>
+              </a:ext>
+            </a:extLst>
+          </p:cNvPr>
+          <p:cNvSpPr txBox="1"/>
+          <p:nvPr/>
+        </p:nvSpPr>
+        <p:spPr>
+          <a:xfrm>
+            <a:off x="573377" y="6163496"/>
+            <a:ext cx="8494423" cy="276999"/>
+          </a:xfrm>
+          <a:prstGeom prst="rect">
+            <a:avLst/>
+          </a:prstGeom>
+          <a:solidFill>
+            <a:schemeClr val="bg1">
+              <a:lumMod val="95000"/>
+            </a:schemeClr>
+          </a:solidFill>
+          <a:ln w="28575">
+            <a:solidFill>
+              <a:srgbClr val="E0700D"/>
+            </a:solidFill>
+          </a:ln>
+        </p:spPr>
+        <p:txBody>
+          <a:bodyPr wrap="square" rtlCol="0">
+            <a:spAutoFit/>
+          </a:bodyPr>
+          <a:lstStyle/>
+          <a:p>
+            <a:pPr algn="just"/>
+            <a:r>
+              <a:rPr lang="en-US" sz="1200" dirty="0">
+                <a:latin typeface="Arial" panose="020B0604020202020204" pitchFamily="34" charset="0"/>
+                <a:cs typeface="Arial" panose="020B0604020202020204" pitchFamily="34" charset="0"/>
+              </a:rPr>
+              <a:t>Al </a:t>
+            </a:r>
+            <a:r>
+              <a:rPr lang="en-US" sz="1200" dirty="0" err="1">
+                <a:latin typeface="Arial" panose="020B0604020202020204" pitchFamily="34" charset="0"/>
+                <a:cs typeface="Arial" panose="020B0604020202020204" pitchFamily="34" charset="0"/>
+              </a:rPr>
+              <a:t>simular</a:t>
+            </a:r>
+            <a:r>
+              <a:rPr lang="en-US" sz="1200" dirty="0">
+                <a:latin typeface="Arial" panose="020B0604020202020204" pitchFamily="34" charset="0"/>
+                <a:cs typeface="Arial" panose="020B0604020202020204" pitchFamily="34" charset="0"/>
+              </a:rPr>
+              <a:t> </a:t>
+            </a:r>
+            <a:r>
+              <a:rPr lang="en-US" sz="1200" dirty="0" err="1">
+                <a:latin typeface="Arial" panose="020B0604020202020204" pitchFamily="34" charset="0"/>
+                <a:cs typeface="Arial" panose="020B0604020202020204" pitchFamily="34" charset="0"/>
+              </a:rPr>
+              <a:t>los</a:t>
+            </a:r>
+            <a:r>
+              <a:rPr lang="en-US" sz="1200" dirty="0">
+                <a:latin typeface="Arial" panose="020B0604020202020204" pitchFamily="34" charset="0"/>
+                <a:cs typeface="Arial" panose="020B0604020202020204" pitchFamily="34" charset="0"/>
+              </a:rPr>
+              <a:t> 2 posteriores </a:t>
+            </a:r>
+            <a:r>
+              <a:rPr lang="en-US" sz="1200" dirty="0" err="1">
+                <a:latin typeface="Arial" panose="020B0604020202020204" pitchFamily="34" charset="0"/>
+                <a:cs typeface="Arial" panose="020B0604020202020204" pitchFamily="34" charset="0"/>
+              </a:rPr>
+              <a:t>modos</a:t>
+            </a:r>
+            <a:r>
+              <a:rPr lang="en-US" sz="1200" dirty="0">
+                <a:latin typeface="Arial" panose="020B0604020202020204" pitchFamily="34" charset="0"/>
+                <a:cs typeface="Arial" panose="020B0604020202020204" pitchFamily="34" charset="0"/>
+              </a:rPr>
+              <a:t> TM, </a:t>
+            </a:r>
+            <a:r>
+              <a:rPr lang="en-US" sz="1200" dirty="0" err="1">
+                <a:latin typeface="Arial" panose="020B0604020202020204" pitchFamily="34" charset="0"/>
+                <a:cs typeface="Arial" panose="020B0604020202020204" pitchFamily="34" charset="0"/>
+              </a:rPr>
+              <a:t>vemos</a:t>
+            </a:r>
+            <a:r>
+              <a:rPr lang="en-US" sz="1200" dirty="0">
+                <a:latin typeface="Arial" panose="020B0604020202020204" pitchFamily="34" charset="0"/>
+                <a:cs typeface="Arial" panose="020B0604020202020204" pitchFamily="34" charset="0"/>
+              </a:rPr>
+              <a:t> </a:t>
+            </a:r>
+            <a:r>
+              <a:rPr lang="en-US" sz="1200" dirty="0" err="1">
+                <a:latin typeface="Arial" panose="020B0604020202020204" pitchFamily="34" charset="0"/>
+                <a:cs typeface="Arial" panose="020B0604020202020204" pitchFamily="34" charset="0"/>
+              </a:rPr>
+              <a:t>que</a:t>
+            </a:r>
+            <a:r>
+              <a:rPr lang="en-US" sz="1200" dirty="0">
+                <a:latin typeface="Arial" panose="020B0604020202020204" pitchFamily="34" charset="0"/>
+                <a:cs typeface="Arial" panose="020B0604020202020204" pitchFamily="34" charset="0"/>
+              </a:rPr>
+              <a:t> temenos un </a:t>
+            </a:r>
+            <a:r>
+              <a:rPr lang="en-US" sz="1200" dirty="0" err="1">
+                <a:latin typeface="Arial" panose="020B0604020202020204" pitchFamily="34" charset="0"/>
+                <a:cs typeface="Arial" panose="020B0604020202020204" pitchFamily="34" charset="0"/>
+              </a:rPr>
+              <a:t>comportamiento</a:t>
+            </a:r>
+            <a:r>
+              <a:rPr lang="en-US" sz="1200" dirty="0">
+                <a:latin typeface="Arial" panose="020B0604020202020204" pitchFamily="34" charset="0"/>
+                <a:cs typeface="Arial" panose="020B0604020202020204" pitchFamily="34" charset="0"/>
+              </a:rPr>
+              <a:t> </a:t>
+            </a:r>
+            <a:r>
+              <a:rPr lang="en-US" sz="1200" dirty="0" err="1">
+                <a:latin typeface="Arial" panose="020B0604020202020204" pitchFamily="34" charset="0"/>
+                <a:cs typeface="Arial" panose="020B0604020202020204" pitchFamily="34" charset="0"/>
+              </a:rPr>
+              <a:t>simétricon</a:t>
+            </a:r>
+            <a:r>
+              <a:rPr lang="en-US" sz="1200" dirty="0">
+                <a:latin typeface="Arial" panose="020B0604020202020204" pitchFamily="34" charset="0"/>
+                <a:cs typeface="Arial" panose="020B0604020202020204" pitchFamily="34" charset="0"/>
+              </a:rPr>
+              <a:t> y </a:t>
+            </a:r>
+            <a:r>
+              <a:rPr lang="en-US" sz="1200" dirty="0" err="1">
+                <a:latin typeface="Arial" panose="020B0604020202020204" pitchFamily="34" charset="0"/>
+                <a:cs typeface="Arial" panose="020B0604020202020204" pitchFamily="34" charset="0"/>
+              </a:rPr>
+              <a:t>asimétrico</a:t>
+            </a:r>
+            <a:r>
+              <a:rPr lang="en-US" sz="1200" dirty="0">
+                <a:latin typeface="Arial" panose="020B0604020202020204" pitchFamily="34" charset="0"/>
+                <a:cs typeface="Arial" panose="020B0604020202020204" pitchFamily="34" charset="0"/>
+              </a:rPr>
+              <a:t> de nuevo </a:t>
+            </a:r>
+          </a:p>
+        </p:txBody>
+      </p:sp>
+      <p:sp>
+        <p:nvSpPr>
+          <p:cNvPr id="12" name="CuadroTexto 11">
+            <a:extLst>
+              <a:ext uri="{FF2B5EF4-FFF2-40B4-BE49-F238E27FC236}">
+                <a16:creationId xmlns:a16="http://schemas.microsoft.com/office/drawing/2014/main" id="{21F79041-AD53-9AB4-44F3-317B58BAF26D}"/>
+              </a:ext>
+            </a:extLst>
+          </p:cNvPr>
+          <p:cNvSpPr txBox="1"/>
+          <p:nvPr/>
+        </p:nvSpPr>
+        <p:spPr>
+          <a:xfrm>
+            <a:off x="9753601" y="2057400"/>
+            <a:ext cx="1830388" cy="830997"/>
+          </a:xfrm>
+          <a:prstGeom prst="rect">
+            <a:avLst/>
+          </a:prstGeom>
+          <a:solidFill>
+            <a:schemeClr val="bg1">
+              <a:lumMod val="95000"/>
+            </a:schemeClr>
+          </a:solidFill>
+          <a:ln w="28575">
+            <a:solidFill>
+              <a:srgbClr val="E0700D"/>
+            </a:solidFill>
+          </a:ln>
+        </p:spPr>
+        <p:txBody>
+          <a:bodyPr wrap="square" rtlCol="0">
+            <a:spAutoFit/>
+          </a:bodyPr>
+          <a:lstStyle/>
+          <a:p>
+            <a:pPr algn="just"/>
+            <a:r>
+              <a:rPr lang="en-US" sz="1200" dirty="0">
+                <a:latin typeface="Arial" panose="020B0604020202020204" pitchFamily="34" charset="0"/>
+                <a:cs typeface="Arial" panose="020B0604020202020204" pitchFamily="34" charset="0"/>
+              </a:rPr>
+              <a:t>El </a:t>
+            </a:r>
+            <a:r>
+              <a:rPr lang="en-US" sz="1200" dirty="0" err="1">
+                <a:latin typeface="Arial" panose="020B0604020202020204" pitchFamily="34" charset="0"/>
+                <a:cs typeface="Arial" panose="020B0604020202020204" pitchFamily="34" charset="0"/>
+              </a:rPr>
+              <a:t>comportamiento</a:t>
+            </a:r>
+            <a:r>
+              <a:rPr lang="en-US" sz="1200" dirty="0">
+                <a:latin typeface="Arial" panose="020B0604020202020204" pitchFamily="34" charset="0"/>
+                <a:cs typeface="Arial" panose="020B0604020202020204" pitchFamily="34" charset="0"/>
+              </a:rPr>
+              <a:t> </a:t>
+            </a:r>
+            <a:r>
+              <a:rPr lang="en-US" sz="1200" dirty="0" err="1">
+                <a:latin typeface="Arial" panose="020B0604020202020204" pitchFamily="34" charset="0"/>
+                <a:cs typeface="Arial" panose="020B0604020202020204" pitchFamily="34" charset="0"/>
+              </a:rPr>
+              <a:t>antisimétrico</a:t>
+            </a:r>
+            <a:r>
+              <a:rPr lang="en-US" sz="1200" dirty="0">
+                <a:latin typeface="Arial" panose="020B0604020202020204" pitchFamily="34" charset="0"/>
+                <a:cs typeface="Arial" panose="020B0604020202020204" pitchFamily="34" charset="0"/>
+              </a:rPr>
+              <a:t> </a:t>
+            </a:r>
+            <a:r>
+              <a:rPr lang="en-US" sz="1200" dirty="0" err="1">
+                <a:latin typeface="Arial" panose="020B0604020202020204" pitchFamily="34" charset="0"/>
+                <a:cs typeface="Arial" panose="020B0604020202020204" pitchFamily="34" charset="0"/>
+              </a:rPr>
+              <a:t>nos</a:t>
+            </a:r>
+            <a:r>
+              <a:rPr lang="en-US" sz="1200" dirty="0">
+                <a:latin typeface="Arial" panose="020B0604020202020204" pitchFamily="34" charset="0"/>
+                <a:cs typeface="Arial" panose="020B0604020202020204" pitchFamily="34" charset="0"/>
+              </a:rPr>
+              <a:t> </a:t>
+            </a:r>
+            <a:r>
+              <a:rPr lang="en-US" sz="1200" dirty="0" err="1">
+                <a:latin typeface="Arial" panose="020B0604020202020204" pitchFamily="34" charset="0"/>
+                <a:cs typeface="Arial" panose="020B0604020202020204" pitchFamily="34" charset="0"/>
+              </a:rPr>
+              <a:t>permite</a:t>
+            </a:r>
+            <a:r>
+              <a:rPr lang="en-US" sz="1200" dirty="0">
+                <a:latin typeface="Arial" panose="020B0604020202020204" pitchFamily="34" charset="0"/>
+                <a:cs typeface="Arial" panose="020B0604020202020204" pitchFamily="34" charset="0"/>
+              </a:rPr>
+              <a:t> </a:t>
+            </a:r>
+            <a:r>
+              <a:rPr lang="en-US" sz="1200" dirty="0" err="1">
+                <a:latin typeface="Arial" panose="020B0604020202020204" pitchFamily="34" charset="0"/>
+                <a:cs typeface="Arial" panose="020B0604020202020204" pitchFamily="34" charset="0"/>
+              </a:rPr>
+              <a:t>transferir</a:t>
+            </a:r>
+            <a:r>
+              <a:rPr lang="en-US" sz="1200" dirty="0">
+                <a:latin typeface="Arial" panose="020B0604020202020204" pitchFamily="34" charset="0"/>
+                <a:cs typeface="Arial" panose="020B0604020202020204" pitchFamily="34" charset="0"/>
+              </a:rPr>
+              <a:t> </a:t>
+            </a:r>
+            <a:r>
+              <a:rPr lang="en-US" sz="1200" dirty="0" err="1">
+                <a:latin typeface="Arial" panose="020B0604020202020204" pitchFamily="34" charset="0"/>
+                <a:cs typeface="Arial" panose="020B0604020202020204" pitchFamily="34" charset="0"/>
+              </a:rPr>
+              <a:t>nergía</a:t>
+            </a:r>
+            <a:r>
+              <a:rPr lang="en-US" sz="1200" dirty="0">
+                <a:latin typeface="Arial" panose="020B0604020202020204" pitchFamily="34" charset="0"/>
+                <a:cs typeface="Arial" panose="020B0604020202020204" pitchFamily="34" charset="0"/>
+              </a:rPr>
+              <a:t> de </a:t>
+            </a:r>
+            <a:r>
+              <a:rPr lang="en-US" sz="1200" dirty="0" err="1">
+                <a:latin typeface="Arial" panose="020B0604020202020204" pitchFamily="34" charset="0"/>
+                <a:cs typeface="Arial" panose="020B0604020202020204" pitchFamily="34" charset="0"/>
+              </a:rPr>
+              <a:t>una</a:t>
+            </a:r>
+            <a:r>
+              <a:rPr lang="en-US" sz="1200" dirty="0">
+                <a:latin typeface="Arial" panose="020B0604020202020204" pitchFamily="34" charset="0"/>
+                <a:cs typeface="Arial" panose="020B0604020202020204" pitchFamily="34" charset="0"/>
+              </a:rPr>
+              <a:t> </a:t>
+            </a:r>
+            <a:r>
+              <a:rPr lang="en-US" sz="1200" dirty="0" err="1">
+                <a:latin typeface="Arial" panose="020B0604020202020204" pitchFamily="34" charset="0"/>
+                <a:cs typeface="Arial" panose="020B0604020202020204" pitchFamily="34" charset="0"/>
+              </a:rPr>
+              <a:t>guia</a:t>
+            </a:r>
+            <a:r>
+              <a:rPr lang="en-US" sz="1200" dirty="0">
+                <a:latin typeface="Arial" panose="020B0604020202020204" pitchFamily="34" charset="0"/>
+                <a:cs typeface="Arial" panose="020B0604020202020204" pitchFamily="34" charset="0"/>
+              </a:rPr>
+              <a:t> a </a:t>
+            </a:r>
+            <a:r>
+              <a:rPr lang="en-US" sz="1200" dirty="0" err="1">
+                <a:latin typeface="Arial" panose="020B0604020202020204" pitchFamily="34" charset="0"/>
+                <a:cs typeface="Arial" panose="020B0604020202020204" pitchFamily="34" charset="0"/>
+              </a:rPr>
+              <a:t>otra</a:t>
+            </a:r>
+            <a:r>
+              <a:rPr lang="en-US" sz="1200" dirty="0">
+                <a:latin typeface="Arial" panose="020B0604020202020204" pitchFamily="34" charset="0"/>
+                <a:cs typeface="Arial" panose="020B0604020202020204" pitchFamily="34" charset="0"/>
+              </a:rPr>
+              <a:t>. </a:t>
+            </a:r>
+          </a:p>
+        </p:txBody>
+      </p:sp>
+    </p:spTree>
+    <p:extLst>
+      <p:ext uri="{BB962C8B-B14F-4D97-AF65-F5344CB8AC3E}">
+        <p14:creationId xmlns:p14="http://schemas.microsoft.com/office/powerpoint/2010/main" val="854327555"/>
+      </p:ext>
+    </p:extLst>
+  </p:cSld>
+  <p:clrMapOvr>
+    <a:masterClrMapping/>
+  </p:clrMapOvr>
+</p:sld>
+</file>
+
+<file path=ppt/slides/slide8.xml><?xml version="1.0" encoding="utf-8"?>
+<p:sld xmlns:a="http://schemas.openxmlformats.org/drawingml/2006/main" xmlns:r="http://schemas.openxmlformats.org/officeDocument/2006/relationships" xmlns:p="http://schemas.openxmlformats.org/presentationml/2006/main">
+  <p:cSld>
+    <p:spTree>
+      <p:nvGrpSpPr>
+        <p:cNvPr id="1" name="">
+          <a:extLst>
+            <a:ext uri="{FF2B5EF4-FFF2-40B4-BE49-F238E27FC236}">
+              <a16:creationId xmlns:a16="http://schemas.microsoft.com/office/drawing/2014/main" id="{45309775-1156-9BCB-9F91-D699D4454432}"/>
+            </a:ext>
+          </a:extLst>
+        </p:cNvPr>
+        <p:cNvGrpSpPr/>
+        <p:nvPr/>
+      </p:nvGrpSpPr>
+      <p:grpSpPr>
+        <a:xfrm>
+          <a:off x="0" y="0"/>
+          <a:ext cx="0" cy="0"/>
+          <a:chOff x="0" y="0"/>
+          <a:chExt cx="0" cy="0"/>
+        </a:xfrm>
+      </p:grpSpPr>
+      <p:sp>
+        <p:nvSpPr>
+          <p:cNvPr id="16" name="object 16">
+            <a:extLst>
+              <a:ext uri="{FF2B5EF4-FFF2-40B4-BE49-F238E27FC236}">
+                <a16:creationId xmlns:a16="http://schemas.microsoft.com/office/drawing/2014/main" id="{8875FC1F-7773-04D3-FEB8-4D820CE092E6}"/>
+              </a:ext>
+            </a:extLst>
+          </p:cNvPr>
+          <p:cNvSpPr txBox="1">
+            <a:spLocks noGrp="1"/>
+          </p:cNvSpPr>
+          <p:nvPr>
+            <p:ph type="title"/>
+          </p:nvPr>
+        </p:nvSpPr>
+        <p:spPr>
+          <a:xfrm>
+            <a:off x="685800" y="408883"/>
+            <a:ext cx="10994410" cy="782265"/>
+          </a:xfrm>
+          <a:prstGeom prst="rect">
+            <a:avLst/>
+          </a:prstGeom>
+        </p:spPr>
+        <p:txBody>
+          <a:bodyPr vert="horz" wrap="square" lIns="0" tIns="12700" rIns="0" bIns="0" rtlCol="0">
+            <a:spAutoFit/>
+          </a:bodyPr>
+          <a:lstStyle/>
+          <a:p>
+            <a:pPr marL="12700">
+              <a:lnSpc>
+                <a:spcPct val="100000"/>
+              </a:lnSpc>
+              <a:spcBef>
+                <a:spcPts val="100"/>
+              </a:spcBef>
+            </a:pPr>
+            <a:r>
+              <a:rPr lang="en-US" sz="2500" dirty="0"/>
+              <a:t>Learning outcome #1 – Directional coupler cross-section in </a:t>
+            </a:r>
+            <a:r>
+              <a:rPr lang="en-US" sz="2500" dirty="0" err="1"/>
+              <a:t>GDSFactory</a:t>
+            </a:r>
+            <a:br>
+              <a:rPr lang="es-ES" sz="2500" spc="-5" dirty="0">
+                <a:latin typeface="+mj-lt"/>
+                <a:cs typeface="Lucida Sans"/>
+              </a:rPr>
+            </a:br>
+            <a:endParaRPr sz="2500" b="0" dirty="0">
+              <a:latin typeface="+mj-lt"/>
+              <a:cs typeface="Lucida Sans"/>
+            </a:endParaRPr>
+          </a:p>
+        </p:txBody>
+      </p:sp>
+      <p:pic>
+        <p:nvPicPr>
+          <p:cNvPr id="83" name="Gráfico 82">
+            <a:extLst>
+              <a:ext uri="{FF2B5EF4-FFF2-40B4-BE49-F238E27FC236}">
+                <a16:creationId xmlns:a16="http://schemas.microsoft.com/office/drawing/2014/main" id="{6F50B293-3641-53CD-42E7-0E48D70AC568}"/>
+              </a:ext>
+            </a:extLst>
+          </p:cNvPr>
+          <p:cNvPicPr>
+            <a:picLocks noChangeAspect="1"/>
+          </p:cNvPicPr>
+          <p:nvPr/>
+        </p:nvPicPr>
+        <p:blipFill>
+          <a:blip r:embed="rId3">
+            <a:extLst>
+              <a:ext uri="{96DAC541-7B7A-43D3-8B79-37D633B846F1}">
+                <asvg:svgBlip xmlns:asvg="http://schemas.microsoft.com/office/drawing/2016/SVG/main" r:embed="rId4"/>
+              </a:ext>
+            </a:extLst>
+          </a:blip>
+          <a:stretch>
+            <a:fillRect/>
+          </a:stretch>
+        </p:blipFill>
+        <p:spPr>
+          <a:xfrm>
+            <a:off x="5045006" y="6356057"/>
+            <a:ext cx="6409575" cy="363174"/>
+          </a:xfrm>
+          <a:prstGeom prst="rect">
+            <a:avLst/>
+          </a:prstGeom>
+        </p:spPr>
+      </p:pic>
+      <p:sp>
+        <p:nvSpPr>
+          <p:cNvPr id="84" name="Marcador de número de diapositiva 83">
+            <a:extLst>
+              <a:ext uri="{FF2B5EF4-FFF2-40B4-BE49-F238E27FC236}">
+                <a16:creationId xmlns:a16="http://schemas.microsoft.com/office/drawing/2014/main" id="{E47A1E1D-CBDA-4253-E780-96EB7C4A393B}"/>
+              </a:ext>
+            </a:extLst>
+          </p:cNvPr>
+          <p:cNvSpPr>
+            <a:spLocks noGrp="1"/>
+          </p:cNvSpPr>
+          <p:nvPr>
+            <p:ph type="sldNum" sz="quarter" idx="7"/>
+          </p:nvPr>
+        </p:nvSpPr>
+        <p:spPr/>
+        <p:txBody>
+          <a:bodyPr/>
+          <a:lstStyle/>
+          <a:p>
+            <a:fld id="{B6F15528-21DE-4FAA-801E-634DDDAF4B2B}" type="slidenum">
+              <a:rPr lang="es-ES" smtClean="0"/>
+              <a:t>8</a:t>
+            </a:fld>
+            <a:endParaRPr lang="es-ES"/>
+          </a:p>
+        </p:txBody>
+      </p:sp>
+      <p:sp>
+        <p:nvSpPr>
+          <p:cNvPr id="3" name="Marcador de pie de página 2">
+            <a:extLst>
+              <a:ext uri="{FF2B5EF4-FFF2-40B4-BE49-F238E27FC236}">
+                <a16:creationId xmlns:a16="http://schemas.microsoft.com/office/drawing/2014/main" id="{87AC6A16-52B0-280B-F648-ABEFB7332952}"/>
+              </a:ext>
+            </a:extLst>
+          </p:cNvPr>
+          <p:cNvSpPr>
+            <a:spLocks noGrp="1"/>
+          </p:cNvSpPr>
+          <p:nvPr>
+            <p:ph type="ftr" sz="quarter" idx="5"/>
+          </p:nvPr>
+        </p:nvSpPr>
+        <p:spPr/>
+        <p:txBody>
+          <a:bodyPr/>
+          <a:lstStyle/>
+          <a:p>
+            <a:pPr marL="12700">
+              <a:spcBef>
+                <a:spcPts val="15"/>
+              </a:spcBef>
+            </a:pPr>
+            <a:r>
+              <a:rPr lang="es-ES" spc="-5"/>
+              <a:t>LAB 0.2. COUPLERS</a:t>
+            </a:r>
+            <a:endParaRPr lang="es-ES" spc="-5" dirty="0"/>
+          </a:p>
+        </p:txBody>
+      </p:sp>
+      <p:sp>
+        <p:nvSpPr>
+          <p:cNvPr id="4" name="Marcador de texto 2">
+            <a:extLst>
+              <a:ext uri="{FF2B5EF4-FFF2-40B4-BE49-F238E27FC236}">
+                <a16:creationId xmlns:a16="http://schemas.microsoft.com/office/drawing/2014/main" id="{4308B3E7-6964-B16F-077B-A3769E686D21}"/>
+              </a:ext>
+            </a:extLst>
+          </p:cNvPr>
+          <p:cNvSpPr txBox="1">
+            <a:spLocks/>
+          </p:cNvSpPr>
+          <p:nvPr/>
+        </p:nvSpPr>
+        <p:spPr>
+          <a:xfrm>
+            <a:off x="608012" y="1295400"/>
+            <a:ext cx="11048999" cy="4958137"/>
+          </a:xfrm>
+          <a:prstGeom prst="rect">
+            <a:avLst/>
+          </a:prstGeom>
+        </p:spPr>
+        <p:txBody>
+          <a:bodyPr>
+            <a:normAutofit/>
+          </a:bodyPr>
+          <a:lstStyle>
+            <a:lvl1pPr marL="0">
+              <a:defRPr>
+                <a:latin typeface="+mn-lt"/>
+                <a:ea typeface="+mn-ea"/>
+                <a:cs typeface="+mn-cs"/>
+              </a:defRPr>
+            </a:lvl1pPr>
+            <a:lvl2pPr marL="457200">
+              <a:defRPr>
+                <a:latin typeface="+mn-lt"/>
+                <a:ea typeface="+mn-ea"/>
+                <a:cs typeface="+mn-cs"/>
+              </a:defRPr>
+            </a:lvl2pPr>
+            <a:lvl3pPr marL="914400">
+              <a:defRPr>
+                <a:latin typeface="+mn-lt"/>
+                <a:ea typeface="+mn-ea"/>
+                <a:cs typeface="+mn-cs"/>
+              </a:defRPr>
+            </a:lvl3pPr>
+            <a:lvl4pPr marL="1371600">
+              <a:defRPr>
+                <a:latin typeface="+mn-lt"/>
+                <a:ea typeface="+mn-ea"/>
+                <a:cs typeface="+mn-cs"/>
+              </a:defRPr>
+            </a:lvl4pPr>
+            <a:lvl5pPr marL="1828800">
+              <a:defRPr>
+                <a:latin typeface="+mn-lt"/>
+                <a:ea typeface="+mn-ea"/>
+                <a:cs typeface="+mn-cs"/>
+              </a:defRPr>
+            </a:lvl5pPr>
+            <a:lvl6pPr marL="2286000">
+              <a:defRPr>
+                <a:latin typeface="+mn-lt"/>
+                <a:ea typeface="+mn-ea"/>
+                <a:cs typeface="+mn-cs"/>
+              </a:defRPr>
+            </a:lvl6pPr>
+            <a:lvl7pPr marL="2743200">
+              <a:defRPr>
+                <a:latin typeface="+mn-lt"/>
+                <a:ea typeface="+mn-ea"/>
+                <a:cs typeface="+mn-cs"/>
+              </a:defRPr>
+            </a:lvl7pPr>
+            <a:lvl8pPr marL="3200400">
+              <a:defRPr>
+                <a:latin typeface="+mn-lt"/>
+                <a:ea typeface="+mn-ea"/>
+                <a:cs typeface="+mn-cs"/>
+              </a:defRPr>
+            </a:lvl8pPr>
+            <a:lvl9pPr marL="3657600">
+              <a:defRPr>
+                <a:latin typeface="+mn-lt"/>
+                <a:ea typeface="+mn-ea"/>
+                <a:cs typeface="+mn-cs"/>
+              </a:defRPr>
+            </a:lvl9pPr>
+          </a:lstStyle>
+          <a:p>
+            <a:pPr algn="just"/>
+            <a:endParaRPr lang="en-US" sz="2000" kern="0" dirty="0">
+              <a:solidFill>
+                <a:sysClr val="windowText" lastClr="000000"/>
+              </a:solidFill>
+            </a:endParaRPr>
+          </a:p>
+        </p:txBody>
+      </p:sp>
+      <p:sp>
+        <p:nvSpPr>
+          <p:cNvPr id="2" name="CuadroTexto 1">
+            <a:extLst>
+              <a:ext uri="{FF2B5EF4-FFF2-40B4-BE49-F238E27FC236}">
+                <a16:creationId xmlns:a16="http://schemas.microsoft.com/office/drawing/2014/main" id="{C476885D-1A10-3E50-0EF1-186B5A906749}"/>
+              </a:ext>
+            </a:extLst>
+          </p:cNvPr>
+          <p:cNvSpPr txBox="1"/>
+          <p:nvPr/>
+        </p:nvSpPr>
+        <p:spPr>
+          <a:xfrm>
+            <a:off x="5748587" y="2103322"/>
+            <a:ext cx="1504976" cy="276999"/>
+          </a:xfrm>
+          <a:prstGeom prst="rect">
+            <a:avLst/>
+          </a:prstGeom>
+          <a:solidFill>
+            <a:schemeClr val="bg1">
+              <a:lumMod val="95000"/>
+            </a:schemeClr>
+          </a:solidFill>
+          <a:ln w="28575">
+            <a:solidFill>
+              <a:srgbClr val="E0700D"/>
+            </a:solidFill>
+          </a:ln>
+        </p:spPr>
+        <p:txBody>
+          <a:bodyPr wrap="square" rtlCol="0">
+            <a:spAutoFit/>
+          </a:bodyPr>
+          <a:lstStyle/>
+          <a:p>
+            <a:pPr algn="just"/>
+            <a:r>
+              <a:rPr lang="en-US" sz="1200" dirty="0" err="1">
+                <a:latin typeface="Arial" panose="020B0604020202020204" pitchFamily="34" charset="0"/>
+                <a:cs typeface="Arial" panose="020B0604020202020204" pitchFamily="34" charset="0"/>
+              </a:rPr>
+              <a:t>Polarización</a:t>
+            </a:r>
+            <a:r>
+              <a:rPr lang="en-US" sz="1200" dirty="0">
+                <a:latin typeface="Arial" panose="020B0604020202020204" pitchFamily="34" charset="0"/>
+                <a:cs typeface="Arial" panose="020B0604020202020204" pitchFamily="34" charset="0"/>
+              </a:rPr>
+              <a:t> TE. </a:t>
+            </a:r>
+          </a:p>
+        </p:txBody>
+      </p:sp>
+      <p:sp>
+        <p:nvSpPr>
+          <p:cNvPr id="11" name="CuadroTexto 10">
+            <a:extLst>
+              <a:ext uri="{FF2B5EF4-FFF2-40B4-BE49-F238E27FC236}">
+                <a16:creationId xmlns:a16="http://schemas.microsoft.com/office/drawing/2014/main" id="{6924B48D-1C8E-4F45-6CB4-DC221D29A0E7}"/>
+              </a:ext>
+            </a:extLst>
+          </p:cNvPr>
+          <p:cNvSpPr txBox="1"/>
+          <p:nvPr/>
+        </p:nvSpPr>
+        <p:spPr>
+          <a:xfrm>
+            <a:off x="534988" y="3447750"/>
+            <a:ext cx="8494423" cy="276999"/>
+          </a:xfrm>
+          <a:prstGeom prst="rect">
+            <a:avLst/>
+          </a:prstGeom>
+          <a:solidFill>
+            <a:schemeClr val="bg1">
+              <a:lumMod val="95000"/>
+            </a:schemeClr>
+          </a:solidFill>
+          <a:ln w="28575">
+            <a:solidFill>
+              <a:srgbClr val="E0700D"/>
+            </a:solidFill>
+          </a:ln>
+        </p:spPr>
+        <p:txBody>
+          <a:bodyPr wrap="square" rtlCol="0">
+            <a:spAutoFit/>
+          </a:bodyPr>
+          <a:lstStyle/>
+          <a:p>
+            <a:pPr algn="just"/>
+            <a:r>
+              <a:rPr lang="en-US" sz="1200" dirty="0">
+                <a:latin typeface="Arial" panose="020B0604020202020204" pitchFamily="34" charset="0"/>
+                <a:cs typeface="Arial" panose="020B0604020202020204" pitchFamily="34" charset="0"/>
+              </a:rPr>
+              <a:t>Como </a:t>
+            </a:r>
+            <a:r>
+              <a:rPr lang="en-US" sz="1200" dirty="0" err="1">
+                <a:latin typeface="Arial" panose="020B0604020202020204" pitchFamily="34" charset="0"/>
+                <a:cs typeface="Arial" panose="020B0604020202020204" pitchFamily="34" charset="0"/>
+              </a:rPr>
+              <a:t>en</a:t>
+            </a:r>
+            <a:r>
+              <a:rPr lang="en-US" sz="1200" dirty="0">
+                <a:latin typeface="Arial" panose="020B0604020202020204" pitchFamily="34" charset="0"/>
+                <a:cs typeface="Arial" panose="020B0604020202020204" pitchFamily="34" charset="0"/>
+              </a:rPr>
+              <a:t> </a:t>
+            </a:r>
+            <a:r>
+              <a:rPr lang="en-US" sz="1200" dirty="0" err="1">
+                <a:latin typeface="Arial" panose="020B0604020202020204" pitchFamily="34" charset="0"/>
+                <a:cs typeface="Arial" panose="020B0604020202020204" pitchFamily="34" charset="0"/>
+              </a:rPr>
+              <a:t>función</a:t>
+            </a:r>
+            <a:r>
+              <a:rPr lang="en-US" sz="1200" dirty="0">
+                <a:latin typeface="Arial" panose="020B0604020202020204" pitchFamily="34" charset="0"/>
+                <a:cs typeface="Arial" panose="020B0604020202020204" pitchFamily="34" charset="0"/>
+              </a:rPr>
+              <a:t> de la </a:t>
+            </a:r>
+            <a:r>
+              <a:rPr lang="en-US" sz="1200" dirty="0" err="1">
+                <a:latin typeface="Arial" panose="020B0604020202020204" pitchFamily="34" charset="0"/>
+                <a:cs typeface="Arial" panose="020B0604020202020204" pitchFamily="34" charset="0"/>
+              </a:rPr>
+              <a:t>polarización</a:t>
+            </a:r>
+            <a:r>
+              <a:rPr lang="en-US" sz="1200" dirty="0">
+                <a:latin typeface="Arial" panose="020B0604020202020204" pitchFamily="34" charset="0"/>
+                <a:cs typeface="Arial" panose="020B0604020202020204" pitchFamily="34" charset="0"/>
+              </a:rPr>
+              <a:t> cambia </a:t>
+            </a:r>
+            <a:r>
+              <a:rPr lang="en-US" sz="1200" dirty="0" err="1">
+                <a:latin typeface="Arial" panose="020B0604020202020204" pitchFamily="34" charset="0"/>
+                <a:cs typeface="Arial" panose="020B0604020202020204" pitchFamily="34" charset="0"/>
+              </a:rPr>
+              <a:t>dicha</a:t>
+            </a:r>
+            <a:r>
+              <a:rPr lang="en-US" sz="1200" dirty="0">
+                <a:latin typeface="Arial" panose="020B0604020202020204" pitchFamily="34" charset="0"/>
+                <a:cs typeface="Arial" panose="020B0604020202020204" pitchFamily="34" charset="0"/>
+              </a:rPr>
+              <a:t> </a:t>
+            </a:r>
+            <a:r>
+              <a:rPr lang="en-US" sz="1200" dirty="0" err="1">
+                <a:latin typeface="Arial" panose="020B0604020202020204" pitchFamily="34" charset="0"/>
+                <a:cs typeface="Arial" panose="020B0604020202020204" pitchFamily="34" charset="0"/>
+              </a:rPr>
+              <a:t>distancia</a:t>
+            </a:r>
+            <a:r>
+              <a:rPr lang="en-US" sz="1200" dirty="0">
+                <a:latin typeface="Arial" panose="020B0604020202020204" pitchFamily="34" charset="0"/>
+                <a:cs typeface="Arial" panose="020B0604020202020204" pitchFamily="34" charset="0"/>
+              </a:rPr>
+              <a:t>, es </a:t>
+            </a:r>
+            <a:r>
+              <a:rPr lang="en-US" sz="1200" dirty="0" err="1">
+                <a:latin typeface="Arial" panose="020B0604020202020204" pitchFamily="34" charset="0"/>
+                <a:cs typeface="Arial" panose="020B0604020202020204" pitchFamily="34" charset="0"/>
+              </a:rPr>
+              <a:t>importante</a:t>
+            </a:r>
+            <a:r>
+              <a:rPr lang="en-US" sz="1200" dirty="0">
+                <a:latin typeface="Arial" panose="020B0604020202020204" pitchFamily="34" charset="0"/>
+                <a:cs typeface="Arial" panose="020B0604020202020204" pitchFamily="34" charset="0"/>
+              </a:rPr>
+              <a:t> saber con </a:t>
+            </a:r>
+            <a:r>
+              <a:rPr lang="en-US" sz="1200" dirty="0" err="1">
+                <a:latin typeface="Arial" panose="020B0604020202020204" pitchFamily="34" charset="0"/>
+                <a:cs typeface="Arial" panose="020B0604020202020204" pitchFamily="34" charset="0"/>
+              </a:rPr>
+              <a:t>cual</a:t>
+            </a:r>
+            <a:r>
+              <a:rPr lang="en-US" sz="1200" dirty="0">
+                <a:latin typeface="Arial" panose="020B0604020202020204" pitchFamily="34" charset="0"/>
+                <a:cs typeface="Arial" panose="020B0604020202020204" pitchFamily="34" charset="0"/>
+              </a:rPr>
+              <a:t> </a:t>
+            </a:r>
+            <a:r>
+              <a:rPr lang="en-US" sz="1200" dirty="0" err="1">
+                <a:latin typeface="Arial" panose="020B0604020202020204" pitchFamily="34" charset="0"/>
+                <a:cs typeface="Arial" panose="020B0604020202020204" pitchFamily="34" charset="0"/>
+              </a:rPr>
+              <a:t>vamos</a:t>
+            </a:r>
+            <a:r>
+              <a:rPr lang="en-US" sz="1200" dirty="0">
+                <a:latin typeface="Arial" panose="020B0604020202020204" pitchFamily="34" charset="0"/>
+                <a:cs typeface="Arial" panose="020B0604020202020204" pitchFamily="34" charset="0"/>
+              </a:rPr>
+              <a:t> a </a:t>
+            </a:r>
+            <a:r>
+              <a:rPr lang="en-US" sz="1200" dirty="0" err="1">
+                <a:latin typeface="Arial" panose="020B0604020202020204" pitchFamily="34" charset="0"/>
+                <a:cs typeface="Arial" panose="020B0604020202020204" pitchFamily="34" charset="0"/>
+              </a:rPr>
+              <a:t>trabajar</a:t>
+            </a:r>
+            <a:r>
+              <a:rPr lang="en-US" sz="1200" dirty="0">
+                <a:latin typeface="Arial" panose="020B0604020202020204" pitchFamily="34" charset="0"/>
+                <a:cs typeface="Arial" panose="020B0604020202020204" pitchFamily="34" charset="0"/>
+              </a:rPr>
+              <a:t>.  </a:t>
+            </a:r>
+          </a:p>
+        </p:txBody>
+      </p:sp>
+      <p:sp>
+        <p:nvSpPr>
+          <p:cNvPr id="12" name="CuadroTexto 11">
+            <a:extLst>
+              <a:ext uri="{FF2B5EF4-FFF2-40B4-BE49-F238E27FC236}">
+                <a16:creationId xmlns:a16="http://schemas.microsoft.com/office/drawing/2014/main" id="{F7246027-CF93-1750-FC37-81287F6C7D02}"/>
+              </a:ext>
+            </a:extLst>
+          </p:cNvPr>
+          <p:cNvSpPr txBox="1"/>
+          <p:nvPr/>
+        </p:nvSpPr>
+        <p:spPr>
+          <a:xfrm>
+            <a:off x="504970" y="1203092"/>
+            <a:ext cx="11049000" cy="276999"/>
+          </a:xfrm>
+          <a:prstGeom prst="rect">
+            <a:avLst/>
+          </a:prstGeom>
+          <a:solidFill>
+            <a:schemeClr val="bg1">
+              <a:lumMod val="95000"/>
+            </a:schemeClr>
+          </a:solidFill>
+          <a:ln w="28575">
+            <a:solidFill>
+              <a:srgbClr val="E0700D"/>
+            </a:solidFill>
+          </a:ln>
+        </p:spPr>
+        <p:txBody>
+          <a:bodyPr wrap="square" rtlCol="0">
+            <a:spAutoFit/>
+          </a:bodyPr>
+          <a:lstStyle/>
+          <a:p>
+            <a:pPr algn="just"/>
+            <a:r>
+              <a:rPr lang="en-US" sz="1200" dirty="0">
+                <a:latin typeface="Arial" panose="020B0604020202020204" pitchFamily="34" charset="0"/>
+                <a:cs typeface="Arial" panose="020B0604020202020204" pitchFamily="34" charset="0"/>
+              </a:rPr>
+              <a:t>A </a:t>
+            </a:r>
+            <a:r>
+              <a:rPr lang="en-US" sz="1200" dirty="0" err="1">
+                <a:latin typeface="Arial" panose="020B0604020202020204" pitchFamily="34" charset="0"/>
+                <a:cs typeface="Arial" panose="020B0604020202020204" pitchFamily="34" charset="0"/>
+              </a:rPr>
+              <a:t>que</a:t>
+            </a:r>
+            <a:r>
+              <a:rPr lang="en-US" sz="1200" dirty="0">
+                <a:latin typeface="Arial" panose="020B0604020202020204" pitchFamily="34" charset="0"/>
+                <a:cs typeface="Arial" panose="020B0604020202020204" pitchFamily="34" charset="0"/>
+              </a:rPr>
+              <a:t> </a:t>
+            </a:r>
+            <a:r>
+              <a:rPr lang="en-US" sz="1200" dirty="0" err="1">
+                <a:latin typeface="Arial" panose="020B0604020202020204" pitchFamily="34" charset="0"/>
+                <a:cs typeface="Arial" panose="020B0604020202020204" pitchFamily="34" charset="0"/>
+              </a:rPr>
+              <a:t>distancia</a:t>
+            </a:r>
+            <a:r>
+              <a:rPr lang="en-US" sz="1200" dirty="0">
+                <a:latin typeface="Arial" panose="020B0604020202020204" pitchFamily="34" charset="0"/>
+                <a:cs typeface="Arial" panose="020B0604020202020204" pitchFamily="34" charset="0"/>
+              </a:rPr>
+              <a:t> se </a:t>
+            </a:r>
+            <a:r>
+              <a:rPr lang="en-US" sz="1200" dirty="0" err="1">
+                <a:latin typeface="Arial" panose="020B0604020202020204" pitchFamily="34" charset="0"/>
+                <a:cs typeface="Arial" panose="020B0604020202020204" pitchFamily="34" charset="0"/>
+              </a:rPr>
+              <a:t>traslada</a:t>
+            </a:r>
+            <a:r>
+              <a:rPr lang="en-US" sz="1200" dirty="0">
+                <a:latin typeface="Arial" panose="020B0604020202020204" pitchFamily="34" charset="0"/>
+                <a:cs typeface="Arial" panose="020B0604020202020204" pitchFamily="34" charset="0"/>
+              </a:rPr>
+              <a:t> </a:t>
+            </a:r>
+            <a:r>
+              <a:rPr lang="en-US" sz="1200" dirty="0" err="1">
+                <a:latin typeface="Arial" panose="020B0604020202020204" pitchFamily="34" charset="0"/>
+                <a:cs typeface="Arial" panose="020B0604020202020204" pitchFamily="34" charset="0"/>
+              </a:rPr>
+              <a:t>toda</a:t>
+            </a:r>
+            <a:r>
+              <a:rPr lang="en-US" sz="1200" dirty="0">
+                <a:latin typeface="Arial" panose="020B0604020202020204" pitchFamily="34" charset="0"/>
+                <a:cs typeface="Arial" panose="020B0604020202020204" pitchFamily="34" charset="0"/>
+              </a:rPr>
+              <a:t> la </a:t>
+            </a:r>
+            <a:r>
+              <a:rPr lang="en-US" sz="1200" dirty="0" err="1">
+                <a:latin typeface="Arial" panose="020B0604020202020204" pitchFamily="34" charset="0"/>
+                <a:cs typeface="Arial" panose="020B0604020202020204" pitchFamily="34" charset="0"/>
+              </a:rPr>
+              <a:t>energía</a:t>
+            </a:r>
+            <a:r>
+              <a:rPr lang="en-US" sz="1200" dirty="0">
+                <a:latin typeface="Arial" panose="020B0604020202020204" pitchFamily="34" charset="0"/>
+                <a:cs typeface="Arial" panose="020B0604020202020204" pitchFamily="34" charset="0"/>
+              </a:rPr>
+              <a:t> de </a:t>
+            </a:r>
+            <a:r>
+              <a:rPr lang="en-US" sz="1200" dirty="0" err="1">
+                <a:latin typeface="Arial" panose="020B0604020202020204" pitchFamily="34" charset="0"/>
+                <a:cs typeface="Arial" panose="020B0604020202020204" pitchFamily="34" charset="0"/>
+              </a:rPr>
+              <a:t>una</a:t>
+            </a:r>
+            <a:r>
+              <a:rPr lang="en-US" sz="1200" dirty="0">
+                <a:latin typeface="Arial" panose="020B0604020202020204" pitchFamily="34" charset="0"/>
+                <a:cs typeface="Arial" panose="020B0604020202020204" pitchFamily="34" charset="0"/>
+              </a:rPr>
+              <a:t> </a:t>
+            </a:r>
+            <a:r>
+              <a:rPr lang="en-US" sz="1200" dirty="0" err="1">
+                <a:latin typeface="Arial" panose="020B0604020202020204" pitchFamily="34" charset="0"/>
+                <a:cs typeface="Arial" panose="020B0604020202020204" pitchFamily="34" charset="0"/>
+              </a:rPr>
+              <a:t>guia</a:t>
+            </a:r>
+            <a:r>
+              <a:rPr lang="en-US" sz="1200" dirty="0">
+                <a:latin typeface="Arial" panose="020B0604020202020204" pitchFamily="34" charset="0"/>
+                <a:cs typeface="Arial" panose="020B0604020202020204" pitchFamily="34" charset="0"/>
+              </a:rPr>
+              <a:t> a </a:t>
+            </a:r>
+            <a:r>
+              <a:rPr lang="en-US" sz="1200" dirty="0" err="1">
+                <a:latin typeface="Arial" panose="020B0604020202020204" pitchFamily="34" charset="0"/>
+                <a:cs typeface="Arial" panose="020B0604020202020204" pitchFamily="34" charset="0"/>
+              </a:rPr>
+              <a:t>otra</a:t>
+            </a:r>
+            <a:r>
+              <a:rPr lang="en-US" sz="1200" dirty="0">
+                <a:latin typeface="Arial" panose="020B0604020202020204" pitchFamily="34" charset="0"/>
+                <a:cs typeface="Arial" panose="020B0604020202020204" pitchFamily="34" charset="0"/>
+              </a:rPr>
+              <a:t>? Esa </a:t>
+            </a:r>
+            <a:r>
+              <a:rPr lang="en-US" sz="1200" dirty="0" err="1">
+                <a:latin typeface="Arial" panose="020B0604020202020204" pitchFamily="34" charset="0"/>
+                <a:cs typeface="Arial" panose="020B0604020202020204" pitchFamily="34" charset="0"/>
+              </a:rPr>
+              <a:t>distancia</a:t>
+            </a:r>
+            <a:r>
+              <a:rPr lang="en-US" sz="1200" dirty="0">
+                <a:latin typeface="Arial" panose="020B0604020202020204" pitchFamily="34" charset="0"/>
+                <a:cs typeface="Arial" panose="020B0604020202020204" pitchFamily="34" charset="0"/>
+              </a:rPr>
+              <a:t> es la </a:t>
+            </a:r>
+            <a:r>
+              <a:rPr lang="en-US" sz="1200" dirty="0" err="1">
+                <a:latin typeface="Arial" panose="020B0604020202020204" pitchFamily="34" charset="0"/>
+                <a:cs typeface="Arial" panose="020B0604020202020204" pitchFamily="34" charset="0"/>
+              </a:rPr>
+              <a:t>distancia</a:t>
+            </a:r>
+            <a:r>
+              <a:rPr lang="en-US" sz="1200" dirty="0">
+                <a:latin typeface="Arial" panose="020B0604020202020204" pitchFamily="34" charset="0"/>
+                <a:cs typeface="Arial" panose="020B0604020202020204" pitchFamily="34" charset="0"/>
+              </a:rPr>
+              <a:t> de batido </a:t>
+            </a:r>
+            <a:r>
+              <a:rPr lang="en-US" sz="1200" dirty="0" err="1">
+                <a:latin typeface="Arial" panose="020B0604020202020204" pitchFamily="34" charset="0"/>
+                <a:cs typeface="Arial" panose="020B0604020202020204" pitchFamily="34" charset="0"/>
+              </a:rPr>
+              <a:t>que</a:t>
+            </a:r>
+            <a:r>
+              <a:rPr lang="en-US" sz="1200" dirty="0">
+                <a:latin typeface="Arial" panose="020B0604020202020204" pitchFamily="34" charset="0"/>
+                <a:cs typeface="Arial" panose="020B0604020202020204" pitchFamily="34" charset="0"/>
+              </a:rPr>
+              <a:t> </a:t>
+            </a:r>
+            <a:r>
+              <a:rPr lang="en-US" sz="1200" dirty="0" err="1">
+                <a:latin typeface="Arial" panose="020B0604020202020204" pitchFamily="34" charset="0"/>
+                <a:cs typeface="Arial" panose="020B0604020202020204" pitchFamily="34" charset="0"/>
+              </a:rPr>
+              <a:t>depende</a:t>
+            </a:r>
+            <a:r>
+              <a:rPr lang="en-US" sz="1200" dirty="0">
+                <a:latin typeface="Arial" panose="020B0604020202020204" pitchFamily="34" charset="0"/>
+                <a:cs typeface="Arial" panose="020B0604020202020204" pitchFamily="34" charset="0"/>
+              </a:rPr>
+              <a:t> de la </a:t>
+            </a:r>
+            <a:r>
+              <a:rPr lang="en-US" sz="1200" dirty="0" err="1">
+                <a:latin typeface="Arial" panose="020B0604020202020204" pitchFamily="34" charset="0"/>
+                <a:cs typeface="Arial" panose="020B0604020202020204" pitchFamily="34" charset="0"/>
+              </a:rPr>
+              <a:t>polarización</a:t>
+            </a:r>
+            <a:r>
+              <a:rPr lang="en-US" sz="1200" dirty="0">
+                <a:latin typeface="Arial" panose="020B0604020202020204" pitchFamily="34" charset="0"/>
+                <a:cs typeface="Arial" panose="020B0604020202020204" pitchFamily="34" charset="0"/>
+              </a:rPr>
+              <a:t>. </a:t>
+            </a:r>
+          </a:p>
+        </p:txBody>
+      </p:sp>
+      <p:pic>
+        <p:nvPicPr>
+          <p:cNvPr id="8" name="Imagen 7" descr="Texto&#10;&#10;El contenido generado por IA puede ser incorrecto.">
+            <a:extLst>
+              <a:ext uri="{FF2B5EF4-FFF2-40B4-BE49-F238E27FC236}">
+                <a16:creationId xmlns:a16="http://schemas.microsoft.com/office/drawing/2014/main" id="{C941B7F7-A151-AD7D-B8E1-4B4E3A08C09C}"/>
+              </a:ext>
+            </a:extLst>
+          </p:cNvPr>
+          <p:cNvPicPr>
+            <a:picLocks noChangeAspect="1"/>
+          </p:cNvPicPr>
+          <p:nvPr/>
+        </p:nvPicPr>
+        <p:blipFill>
+          <a:blip r:embed="rId5"/>
+          <a:stretch>
+            <a:fillRect/>
+          </a:stretch>
+        </p:blipFill>
+        <p:spPr>
+          <a:xfrm>
+            <a:off x="534988" y="1920096"/>
+            <a:ext cx="5110557" cy="1201363"/>
+          </a:xfrm>
+          <a:prstGeom prst="rect">
+            <a:avLst/>
+          </a:prstGeom>
+        </p:spPr>
+      </p:pic>
+      <p:sp>
+        <p:nvSpPr>
+          <p:cNvPr id="13" name="CuadroTexto 12">
+            <a:extLst>
+              <a:ext uri="{FF2B5EF4-FFF2-40B4-BE49-F238E27FC236}">
+                <a16:creationId xmlns:a16="http://schemas.microsoft.com/office/drawing/2014/main" id="{CC9F882F-AC99-5833-8051-C92B87A77768}"/>
+              </a:ext>
+            </a:extLst>
+          </p:cNvPr>
+          <p:cNvSpPr txBox="1"/>
+          <p:nvPr/>
+        </p:nvSpPr>
+        <p:spPr>
+          <a:xfrm>
+            <a:off x="5753674" y="2712167"/>
+            <a:ext cx="1499889" cy="276999"/>
+          </a:xfrm>
+          <a:prstGeom prst="rect">
+            <a:avLst/>
+          </a:prstGeom>
+          <a:solidFill>
+            <a:schemeClr val="bg1">
+              <a:lumMod val="95000"/>
+            </a:schemeClr>
+          </a:solidFill>
+          <a:ln w="28575">
+            <a:solidFill>
+              <a:srgbClr val="E0700D"/>
+            </a:solidFill>
+          </a:ln>
+        </p:spPr>
+        <p:txBody>
+          <a:bodyPr wrap="square" rtlCol="0">
+            <a:spAutoFit/>
+          </a:bodyPr>
+          <a:lstStyle/>
+          <a:p>
+            <a:pPr algn="just"/>
+            <a:r>
+              <a:rPr lang="en-US" sz="1200" dirty="0" err="1">
+                <a:latin typeface="Arial" panose="020B0604020202020204" pitchFamily="34" charset="0"/>
+                <a:cs typeface="Arial" panose="020B0604020202020204" pitchFamily="34" charset="0"/>
+              </a:rPr>
+              <a:t>Polarización</a:t>
+            </a:r>
+            <a:r>
+              <a:rPr lang="en-US" sz="1200" dirty="0">
+                <a:latin typeface="Arial" panose="020B0604020202020204" pitchFamily="34" charset="0"/>
+                <a:cs typeface="Arial" panose="020B0604020202020204" pitchFamily="34" charset="0"/>
+              </a:rPr>
+              <a:t> TM. </a:t>
+            </a:r>
+          </a:p>
+        </p:txBody>
+      </p:sp>
+    </p:spTree>
+    <p:extLst>
+      <p:ext uri="{BB962C8B-B14F-4D97-AF65-F5344CB8AC3E}">
+        <p14:creationId xmlns:p14="http://schemas.microsoft.com/office/powerpoint/2010/main" val="539733534"/>
+      </p:ext>
+    </p:extLst>
+  </p:cSld>
+  <p:clrMapOvr>
+    <a:masterClrMapping/>
+  </p:clrMapOvr>
+</p:sld>
+</file>
+
+<file path=ppt/slides/slide9.xml><?xml version="1.0" encoding="utf-8"?>
+<p:sld xmlns:a="http://schemas.openxmlformats.org/drawingml/2006/main" xmlns:r="http://schemas.openxmlformats.org/officeDocument/2006/relationships" xmlns:p="http://schemas.openxmlformats.org/presentationml/2006/main">
+  <p:cSld>
+    <p:spTree>
+      <p:nvGrpSpPr>
+        <p:cNvPr id="1" name="">
+          <a:extLst>
+            <a:ext uri="{FF2B5EF4-FFF2-40B4-BE49-F238E27FC236}">
               <a16:creationId xmlns:a16="http://schemas.microsoft.com/office/drawing/2014/main" id="{25434E70-43B1-3881-1771-20FB4358471D}"/>
             </a:ext>
           </a:extLst>
@@ -5277,7 +10152,7 @@
           <a:p>
             <a:fld id="{B6F15528-21DE-4FAA-801E-634DDDAF4B2B}" type="slidenum">
               <a:rPr lang="es-ES" smtClean="0"/>
-              <a:t>4</a:t>
+              <a:t>9</a:t>
             </a:fld>
             <a:endParaRPr lang="es-ES"/>
           </a:p>
@@ -5317,8 +10192,8 @@
           </a:p>
         </p:txBody>
       </p:sp>
-      <mc:AlternateContent xmlns:mc="http://schemas.openxmlformats.org/markup-compatibility/2006">
-        <mc:Choice xmlns:a14="http://schemas.microsoft.com/office/drawing/2010/main" Requires="a14">
+      <mc:AlternateContent xmlns:mc="http://schemas.openxmlformats.org/markup-compatibility/2006" xmlns:a14="http://schemas.microsoft.com/office/drawing/2010/main">
+        <mc:Choice Requires="a14">
           <p:sp>
             <p:nvSpPr>
               <p:cNvPr id="4" name="Marcador de texto 2">
@@ -5552,7 +10427,7 @@
             </p:txBody>
           </p:sp>
         </mc:Choice>
-        <mc:Fallback>
+        <mc:Fallback xmlns="">
           <p:sp>
             <p:nvSpPr>
               <p:cNvPr id="4" name="Marcador de texto 2">
@@ -5711,159 +10586,6 @@
         <p14:creationId xmlns:p14="http://schemas.microsoft.com/office/powerpoint/2010/main" val="3660438245"/>
       </p:ext>
     </p:extLst>
-  </p:cSld>
-  <p:clrMapOvr>
-    <a:masterClrMapping/>
-  </p:clrMapOvr>
-</p:sld>
-</file>
-
-<file path=ppt/slides/slide5.xml><?xml version="1.0" encoding="utf-8"?>
-<p:sld xmlns:a="http://schemas.openxmlformats.org/drawingml/2006/main" xmlns:r="http://schemas.openxmlformats.org/officeDocument/2006/relationships" xmlns:p="http://schemas.openxmlformats.org/presentationml/2006/main">
-  <p:cSld>
-    <p:spTree>
-      <p:nvGrpSpPr>
-        <p:cNvPr id="1" name=""/>
-        <p:cNvGrpSpPr/>
-        <p:nvPr/>
-      </p:nvGrpSpPr>
-      <p:grpSpPr>
-        <a:xfrm>
-          <a:off x="0" y="0"/>
-          <a:ext cx="0" cy="0"/>
-          <a:chOff x="0" y="0"/>
-          <a:chExt cx="0" cy="0"/>
-        </a:xfrm>
-      </p:grpSpPr>
-      <p:sp>
-        <p:nvSpPr>
-          <p:cNvPr id="3" name="object 3"/>
-          <p:cNvSpPr/>
-          <p:nvPr/>
-        </p:nvSpPr>
-        <p:spPr>
-          <a:xfrm>
-            <a:off x="3945635" y="2636520"/>
-            <a:ext cx="8246363" cy="1584959"/>
-          </a:xfrm>
-          <a:prstGeom prst="rect">
-            <a:avLst/>
-          </a:prstGeom>
-          <a:blipFill>
-            <a:blip r:embed="rId2" cstate="print"/>
-            <a:stretch>
-              <a:fillRect/>
-            </a:stretch>
-          </a:blipFill>
-        </p:spPr>
-        <p:txBody>
-          <a:bodyPr wrap="square" lIns="0" tIns="0" rIns="0" bIns="0" rtlCol="0"/>
-          <a:lstStyle/>
-          <a:p>
-            <a:endParaRPr/>
-          </a:p>
-        </p:txBody>
-      </p:sp>
-      <p:sp>
-        <p:nvSpPr>
-          <p:cNvPr id="4" name="object 4"/>
-          <p:cNvSpPr txBox="1">
-            <a:spLocks noGrp="1"/>
-          </p:cNvSpPr>
-          <p:nvPr>
-            <p:ph type="title"/>
-          </p:nvPr>
-        </p:nvSpPr>
-        <p:spPr>
-          <a:xfrm>
-            <a:off x="4513326" y="3165729"/>
-            <a:ext cx="2233295" cy="513715"/>
-          </a:xfrm>
-          <a:prstGeom prst="rect">
-            <a:avLst/>
-          </a:prstGeom>
-        </p:spPr>
-        <p:txBody>
-          <a:bodyPr vert="horz" wrap="square" lIns="0" tIns="13335" rIns="0" bIns="0" rtlCol="0">
-            <a:spAutoFit/>
-          </a:bodyPr>
-          <a:lstStyle/>
-          <a:p>
-            <a:pPr marL="12700">
-              <a:lnSpc>
-                <a:spcPct val="100000"/>
-              </a:lnSpc>
-              <a:spcBef>
-                <a:spcPts val="105"/>
-              </a:spcBef>
-            </a:pPr>
-            <a:r>
-              <a:rPr sz="3200" b="1" spc="-5" dirty="0">
-                <a:solidFill>
-                  <a:srgbClr val="FFFFFF"/>
-                </a:solidFill>
-                <a:latin typeface="Lucida Sans"/>
-                <a:cs typeface="Lucida Sans"/>
-              </a:rPr>
-              <a:t>Thank</a:t>
-            </a:r>
-            <a:r>
-              <a:rPr sz="3200" b="1" spc="-55" dirty="0">
-                <a:solidFill>
-                  <a:srgbClr val="FFFFFF"/>
-                </a:solidFill>
-                <a:latin typeface="Lucida Sans"/>
-                <a:cs typeface="Lucida Sans"/>
-              </a:rPr>
-              <a:t> </a:t>
-            </a:r>
-            <a:r>
-              <a:rPr sz="3200" b="1" dirty="0">
-                <a:solidFill>
-                  <a:srgbClr val="FFFFFF"/>
-                </a:solidFill>
-                <a:latin typeface="Lucida Sans"/>
-                <a:cs typeface="Lucida Sans"/>
-              </a:rPr>
-              <a:t>you</a:t>
-            </a:r>
-            <a:endParaRPr sz="3200">
-              <a:latin typeface="Lucida Sans"/>
-              <a:cs typeface="Lucida Sans"/>
-            </a:endParaRPr>
-          </a:p>
-        </p:txBody>
-      </p:sp>
-      <p:sp>
-        <p:nvSpPr>
-          <p:cNvPr id="5" name="Marcador de número de diapositiva 4">
-            <a:extLst>
-              <a:ext uri="{FF2B5EF4-FFF2-40B4-BE49-F238E27FC236}">
-                <a16:creationId xmlns:a16="http://schemas.microsoft.com/office/drawing/2014/main" id="{B052DA19-AD24-7D24-2AE9-51F8F5A7F5E0}"/>
-              </a:ext>
-            </a:extLst>
-          </p:cNvPr>
-          <p:cNvSpPr>
-            <a:spLocks noGrp="1"/>
-          </p:cNvSpPr>
-          <p:nvPr>
-            <p:ph type="sldNum" sz="quarter" idx="7"/>
-          </p:nvPr>
-        </p:nvSpPr>
-        <p:spPr/>
-        <p:txBody>
-          <a:bodyPr/>
-          <a:lstStyle/>
-          <a:p>
-            <a:fld id="{B6F15528-21DE-4FAA-801E-634DDDAF4B2B}" type="slidenum">
-              <a:rPr lang="es-ES" smtClean="0"/>
-              <a:t>5</a:t>
-            </a:fld>
-            <a:endParaRPr lang="es-ES"/>
-          </a:p>
-        </p:txBody>
-      </p:sp>
-    </p:spTree>
   </p:cSld>
   <p:clrMapOvr>
     <a:masterClrMapping/>

--- a/LabBook_020.pptx
+++ b/LabBook_020.pptx
@@ -5,10 +5,10 @@
     <p:sldMasterId id="2147483648" r:id="rId1"/>
   </p:sldMasterIdLst>
   <p:notesMasterIdLst>
-    <p:notesMasterId r:id="rId13"/>
+    <p:notesMasterId r:id="rId16"/>
   </p:notesMasterIdLst>
   <p:handoutMasterIdLst>
-    <p:handoutMasterId r:id="rId14"/>
+    <p:handoutMasterId r:id="rId17"/>
   </p:handoutMasterIdLst>
   <p:sldIdLst>
     <p:sldId id="256" r:id="rId2"/>
@@ -21,7 +21,10 @@
     <p:sldId id="298" r:id="rId9"/>
     <p:sldId id="293" r:id="rId10"/>
     <p:sldId id="299" r:id="rId11"/>
-    <p:sldId id="288" r:id="rId12"/>
+    <p:sldId id="300" r:id="rId12"/>
+    <p:sldId id="302" r:id="rId13"/>
+    <p:sldId id="303" r:id="rId14"/>
+    <p:sldId id="288" r:id="rId15"/>
   </p:sldIdLst>
   <p:sldSz cx="12192000" cy="6858000"/>
   <p:notesSz cx="12192000" cy="6858000"/>
@@ -831,6 +834,222 @@
 </p:notes>
 </file>
 
+<file path=ppt/notesSlides/notesSlide10.xml><?xml version="1.0" encoding="utf-8"?>
+<p:notes xmlns:a="http://schemas.openxmlformats.org/drawingml/2006/main" xmlns:r="http://schemas.openxmlformats.org/officeDocument/2006/relationships" xmlns:p="http://schemas.openxmlformats.org/presentationml/2006/main">
+  <p:cSld>
+    <p:spTree>
+      <p:nvGrpSpPr>
+        <p:cNvPr id="1" name="">
+          <a:extLst>
+            <a:ext uri="{FF2B5EF4-FFF2-40B4-BE49-F238E27FC236}">
+              <a16:creationId xmlns:a16="http://schemas.microsoft.com/office/drawing/2014/main" id="{17C76B16-B1E0-9FE2-7BFD-FF1F3BBC9929}"/>
+            </a:ext>
+          </a:extLst>
+        </p:cNvPr>
+        <p:cNvGrpSpPr/>
+        <p:nvPr/>
+      </p:nvGrpSpPr>
+      <p:grpSpPr>
+        <a:xfrm>
+          <a:off x="0" y="0"/>
+          <a:ext cx="0" cy="0"/>
+          <a:chOff x="0" y="0"/>
+          <a:chExt cx="0" cy="0"/>
+        </a:xfrm>
+      </p:grpSpPr>
+      <p:sp>
+        <p:nvSpPr>
+          <p:cNvPr id="2" name="Marcador de imagen de diapositiva 1">
+            <a:extLst>
+              <a:ext uri="{FF2B5EF4-FFF2-40B4-BE49-F238E27FC236}">
+                <a16:creationId xmlns:a16="http://schemas.microsoft.com/office/drawing/2014/main" id="{630152F8-67AC-887A-BB89-47340F619BFA}"/>
+              </a:ext>
+            </a:extLst>
+          </p:cNvPr>
+          <p:cNvSpPr>
+            <a:spLocks noGrp="1" noRot="1" noChangeAspect="1"/>
+          </p:cNvSpPr>
+          <p:nvPr>
+            <p:ph type="sldImg"/>
+          </p:nvPr>
+        </p:nvSpPr>
+        <p:spPr/>
+      </p:sp>
+      <p:sp>
+        <p:nvSpPr>
+          <p:cNvPr id="3" name="Marcador de notas 2">
+            <a:extLst>
+              <a:ext uri="{FF2B5EF4-FFF2-40B4-BE49-F238E27FC236}">
+                <a16:creationId xmlns:a16="http://schemas.microsoft.com/office/drawing/2014/main" id="{9D64BD0A-9A18-9C45-98D6-4A59DF83B687}"/>
+              </a:ext>
+            </a:extLst>
+          </p:cNvPr>
+          <p:cNvSpPr>
+            <a:spLocks noGrp="1"/>
+          </p:cNvSpPr>
+          <p:nvPr>
+            <p:ph type="body" idx="1"/>
+          </p:nvPr>
+        </p:nvSpPr>
+        <p:spPr/>
+        <p:txBody>
+          <a:bodyPr/>
+          <a:lstStyle/>
+          <a:p>
+            <a:endParaRPr lang="es-ES" dirty="0"/>
+          </a:p>
+        </p:txBody>
+      </p:sp>
+      <p:sp>
+        <p:nvSpPr>
+          <p:cNvPr id="4" name="Marcador de número de diapositiva 3">
+            <a:extLst>
+              <a:ext uri="{FF2B5EF4-FFF2-40B4-BE49-F238E27FC236}">
+                <a16:creationId xmlns:a16="http://schemas.microsoft.com/office/drawing/2014/main" id="{5144E3F2-2233-78E6-41D4-39E348396C75}"/>
+              </a:ext>
+            </a:extLst>
+          </p:cNvPr>
+          <p:cNvSpPr>
+            <a:spLocks noGrp="1"/>
+          </p:cNvSpPr>
+          <p:nvPr>
+            <p:ph type="sldNum" sz="quarter" idx="5"/>
+          </p:nvPr>
+        </p:nvSpPr>
+        <p:spPr/>
+        <p:txBody>
+          <a:bodyPr/>
+          <a:lstStyle/>
+          <a:p>
+            <a:fld id="{676223B9-C868-4436-87D9-1A3152E1157A}" type="slidenum">
+              <a:rPr lang="es-ES" smtClean="0"/>
+              <a:t>12</a:t>
+            </a:fld>
+            <a:endParaRPr lang="es-ES"/>
+          </a:p>
+        </p:txBody>
+      </p:sp>
+    </p:spTree>
+    <p:extLst>
+      <p:ext uri="{BB962C8B-B14F-4D97-AF65-F5344CB8AC3E}">
+        <p14:creationId xmlns:p14="http://schemas.microsoft.com/office/powerpoint/2010/main" val="276466349"/>
+      </p:ext>
+    </p:extLst>
+  </p:cSld>
+  <p:clrMapOvr>
+    <a:masterClrMapping/>
+  </p:clrMapOvr>
+</p:notes>
+</file>
+
+<file path=ppt/notesSlides/notesSlide11.xml><?xml version="1.0" encoding="utf-8"?>
+<p:notes xmlns:a="http://schemas.openxmlformats.org/drawingml/2006/main" xmlns:r="http://schemas.openxmlformats.org/officeDocument/2006/relationships" xmlns:p="http://schemas.openxmlformats.org/presentationml/2006/main">
+  <p:cSld>
+    <p:spTree>
+      <p:nvGrpSpPr>
+        <p:cNvPr id="1" name="">
+          <a:extLst>
+            <a:ext uri="{FF2B5EF4-FFF2-40B4-BE49-F238E27FC236}">
+              <a16:creationId xmlns:a16="http://schemas.microsoft.com/office/drawing/2014/main" id="{76B2B70C-15DA-54D8-A19D-7FBD95EDA433}"/>
+            </a:ext>
+          </a:extLst>
+        </p:cNvPr>
+        <p:cNvGrpSpPr/>
+        <p:nvPr/>
+      </p:nvGrpSpPr>
+      <p:grpSpPr>
+        <a:xfrm>
+          <a:off x="0" y="0"/>
+          <a:ext cx="0" cy="0"/>
+          <a:chOff x="0" y="0"/>
+          <a:chExt cx="0" cy="0"/>
+        </a:xfrm>
+      </p:grpSpPr>
+      <p:sp>
+        <p:nvSpPr>
+          <p:cNvPr id="2" name="Marcador de imagen de diapositiva 1">
+            <a:extLst>
+              <a:ext uri="{FF2B5EF4-FFF2-40B4-BE49-F238E27FC236}">
+                <a16:creationId xmlns:a16="http://schemas.microsoft.com/office/drawing/2014/main" id="{F75FB432-43F1-9B5B-9D73-EED4084F018B}"/>
+              </a:ext>
+            </a:extLst>
+          </p:cNvPr>
+          <p:cNvSpPr>
+            <a:spLocks noGrp="1" noRot="1" noChangeAspect="1"/>
+          </p:cNvSpPr>
+          <p:nvPr>
+            <p:ph type="sldImg"/>
+          </p:nvPr>
+        </p:nvSpPr>
+        <p:spPr/>
+      </p:sp>
+      <p:sp>
+        <p:nvSpPr>
+          <p:cNvPr id="3" name="Marcador de notas 2">
+            <a:extLst>
+              <a:ext uri="{FF2B5EF4-FFF2-40B4-BE49-F238E27FC236}">
+                <a16:creationId xmlns:a16="http://schemas.microsoft.com/office/drawing/2014/main" id="{C42CC78C-7722-FC5A-5256-FFF6F2B96793}"/>
+              </a:ext>
+            </a:extLst>
+          </p:cNvPr>
+          <p:cNvSpPr>
+            <a:spLocks noGrp="1"/>
+          </p:cNvSpPr>
+          <p:nvPr>
+            <p:ph type="body" idx="1"/>
+          </p:nvPr>
+        </p:nvSpPr>
+        <p:spPr/>
+        <p:txBody>
+          <a:bodyPr/>
+          <a:lstStyle/>
+          <a:p>
+            <a:endParaRPr lang="es-ES" dirty="0"/>
+          </a:p>
+        </p:txBody>
+      </p:sp>
+      <p:sp>
+        <p:nvSpPr>
+          <p:cNvPr id="4" name="Marcador de número de diapositiva 3">
+            <a:extLst>
+              <a:ext uri="{FF2B5EF4-FFF2-40B4-BE49-F238E27FC236}">
+                <a16:creationId xmlns:a16="http://schemas.microsoft.com/office/drawing/2014/main" id="{156FB5F5-9B9E-9AAB-F942-2BB481D9FBDB}"/>
+              </a:ext>
+            </a:extLst>
+          </p:cNvPr>
+          <p:cNvSpPr>
+            <a:spLocks noGrp="1"/>
+          </p:cNvSpPr>
+          <p:nvPr>
+            <p:ph type="sldNum" sz="quarter" idx="5"/>
+          </p:nvPr>
+        </p:nvSpPr>
+        <p:spPr/>
+        <p:txBody>
+          <a:bodyPr/>
+          <a:lstStyle/>
+          <a:p>
+            <a:fld id="{676223B9-C868-4436-87D9-1A3152E1157A}" type="slidenum">
+              <a:rPr lang="es-ES" smtClean="0"/>
+              <a:t>13</a:t>
+            </a:fld>
+            <a:endParaRPr lang="es-ES"/>
+          </a:p>
+        </p:txBody>
+      </p:sp>
+    </p:spTree>
+    <p:extLst>
+      <p:ext uri="{BB962C8B-B14F-4D97-AF65-F5344CB8AC3E}">
+        <p14:creationId xmlns:p14="http://schemas.microsoft.com/office/powerpoint/2010/main" val="2605743071"/>
+      </p:ext>
+    </p:extLst>
+  </p:cSld>
+  <p:clrMapOvr>
+    <a:masterClrMapping/>
+  </p:clrMapOvr>
+</p:notes>
+</file>
+
 <file path=ppt/notesSlides/notesSlide2.xml><?xml version="1.0" encoding="utf-8"?>
 <p:notes xmlns:a="http://schemas.openxmlformats.org/drawingml/2006/main" xmlns:r="http://schemas.openxmlformats.org/officeDocument/2006/relationships" xmlns:p="http://schemas.openxmlformats.org/presentationml/2006/main">
   <p:cSld>
@@ -1578,6 +1797,114 @@
     <p:extLst>
       <p:ext uri="{BB962C8B-B14F-4D97-AF65-F5344CB8AC3E}">
         <p14:creationId xmlns:p14="http://schemas.microsoft.com/office/powerpoint/2010/main" val="2108796426"/>
+      </p:ext>
+    </p:extLst>
+  </p:cSld>
+  <p:clrMapOvr>
+    <a:masterClrMapping/>
+  </p:clrMapOvr>
+</p:notes>
+</file>
+
+<file path=ppt/notesSlides/notesSlide9.xml><?xml version="1.0" encoding="utf-8"?>
+<p:notes xmlns:a="http://schemas.openxmlformats.org/drawingml/2006/main" xmlns:r="http://schemas.openxmlformats.org/officeDocument/2006/relationships" xmlns:p="http://schemas.openxmlformats.org/presentationml/2006/main">
+  <p:cSld>
+    <p:spTree>
+      <p:nvGrpSpPr>
+        <p:cNvPr id="1" name="">
+          <a:extLst>
+            <a:ext uri="{FF2B5EF4-FFF2-40B4-BE49-F238E27FC236}">
+              <a16:creationId xmlns:a16="http://schemas.microsoft.com/office/drawing/2014/main" id="{C42B2B88-AFBE-F533-6FA5-06F0AFF52F0A}"/>
+            </a:ext>
+          </a:extLst>
+        </p:cNvPr>
+        <p:cNvGrpSpPr/>
+        <p:nvPr/>
+      </p:nvGrpSpPr>
+      <p:grpSpPr>
+        <a:xfrm>
+          <a:off x="0" y="0"/>
+          <a:ext cx="0" cy="0"/>
+          <a:chOff x="0" y="0"/>
+          <a:chExt cx="0" cy="0"/>
+        </a:xfrm>
+      </p:grpSpPr>
+      <p:sp>
+        <p:nvSpPr>
+          <p:cNvPr id="2" name="Marcador de imagen de diapositiva 1">
+            <a:extLst>
+              <a:ext uri="{FF2B5EF4-FFF2-40B4-BE49-F238E27FC236}">
+                <a16:creationId xmlns:a16="http://schemas.microsoft.com/office/drawing/2014/main" id="{8DF84A49-E0B8-ADB4-F35F-1236210B07EC}"/>
+              </a:ext>
+            </a:extLst>
+          </p:cNvPr>
+          <p:cNvSpPr>
+            <a:spLocks noGrp="1" noRot="1" noChangeAspect="1"/>
+          </p:cNvSpPr>
+          <p:nvPr>
+            <p:ph type="sldImg"/>
+          </p:nvPr>
+        </p:nvSpPr>
+        <p:spPr/>
+      </p:sp>
+      <p:sp>
+        <p:nvSpPr>
+          <p:cNvPr id="3" name="Marcador de notas 2">
+            <a:extLst>
+              <a:ext uri="{FF2B5EF4-FFF2-40B4-BE49-F238E27FC236}">
+                <a16:creationId xmlns:a16="http://schemas.microsoft.com/office/drawing/2014/main" id="{90CAC1C8-4561-6350-9B3D-50FE02FEFB3A}"/>
+              </a:ext>
+            </a:extLst>
+          </p:cNvPr>
+          <p:cNvSpPr>
+            <a:spLocks noGrp="1"/>
+          </p:cNvSpPr>
+          <p:nvPr>
+            <p:ph type="body" idx="1"/>
+          </p:nvPr>
+        </p:nvSpPr>
+        <p:spPr/>
+        <p:txBody>
+          <a:bodyPr/>
+          <a:lstStyle/>
+          <a:p>
+            <a:endParaRPr lang="es-ES" dirty="0"/>
+          </a:p>
+        </p:txBody>
+      </p:sp>
+      <p:sp>
+        <p:nvSpPr>
+          <p:cNvPr id="4" name="Marcador de número de diapositiva 3">
+            <a:extLst>
+              <a:ext uri="{FF2B5EF4-FFF2-40B4-BE49-F238E27FC236}">
+                <a16:creationId xmlns:a16="http://schemas.microsoft.com/office/drawing/2014/main" id="{CCE3D82E-CC69-30B8-C6F4-1692822276BB}"/>
+              </a:ext>
+            </a:extLst>
+          </p:cNvPr>
+          <p:cNvSpPr>
+            <a:spLocks noGrp="1"/>
+          </p:cNvSpPr>
+          <p:nvPr>
+            <p:ph type="sldNum" sz="quarter" idx="5"/>
+          </p:nvPr>
+        </p:nvSpPr>
+        <p:spPr/>
+        <p:txBody>
+          <a:bodyPr/>
+          <a:lstStyle/>
+          <a:p>
+            <a:fld id="{676223B9-C868-4436-87D9-1A3152E1157A}" type="slidenum">
+              <a:rPr lang="es-ES" smtClean="0"/>
+              <a:t>11</a:t>
+            </a:fld>
+            <a:endParaRPr lang="es-ES"/>
+          </a:p>
+        </p:txBody>
+      </p:sp>
+    </p:spTree>
+    <p:extLst>
+      <p:ext uri="{BB962C8B-B14F-4D97-AF65-F5344CB8AC3E}">
+        <p14:creationId xmlns:p14="http://schemas.microsoft.com/office/powerpoint/2010/main" val="50144766"/>
       </p:ext>
     </p:extLst>
   </p:cSld>
@@ -3471,8 +3798,8 @@
         </p:nvSpPr>
         <p:spPr>
           <a:xfrm>
-            <a:off x="609441" y="4860334"/>
-            <a:ext cx="11199971" cy="1200329"/>
+            <a:off x="608012" y="4903378"/>
+            <a:ext cx="11199971" cy="1754326"/>
           </a:xfrm>
           <a:prstGeom prst="rect">
             <a:avLst/>
@@ -3500,33 +3827,638 @@
                 <a:latin typeface="Arial" panose="020B0604020202020204" pitchFamily="34" charset="0"/>
                 <a:cs typeface="Arial" panose="020B0604020202020204" pitchFamily="34" charset="0"/>
               </a:rPr>
-              <a:t>Document all your results (neff, plot fields </a:t>
-            </a:r>
-            <a:r>
-              <a:rPr lang="en-US" sz="1200">
-                <a:latin typeface="Arial" panose="020B0604020202020204" pitchFamily="34" charset="0"/>
-                <a:cs typeface="Arial" panose="020B0604020202020204" pitchFamily="34" charset="0"/>
-              </a:rPr>
-              <a:t>of different modes, </a:t>
-            </a:r>
-            <a:r>
-              <a:rPr lang="en-US" sz="1200" dirty="0">
-                <a:latin typeface="Arial" panose="020B0604020202020204" pitchFamily="34" charset="0"/>
-                <a:cs typeface="Arial" panose="020B0604020202020204" pitchFamily="34" charset="0"/>
-              </a:rPr>
-              <a:t>comparison between </a:t>
-            </a:r>
-            <a:r>
-              <a:rPr lang="en-US" sz="1200">
-                <a:latin typeface="Arial" panose="020B0604020202020204" pitchFamily="34" charset="0"/>
-                <a:cs typeface="Arial" panose="020B0604020202020204" pitchFamily="34" charset="0"/>
-              </a:rPr>
-              <a:t>different polarizations…)</a:t>
-            </a:r>
-            <a:endParaRPr lang="en-US" sz="1200" dirty="0">
-              <a:latin typeface="Arial" panose="020B0604020202020204" pitchFamily="34" charset="0"/>
-              <a:cs typeface="Arial" panose="020B0604020202020204" pitchFamily="34" charset="0"/>
-            </a:endParaRPr>
+              <a:t>Los MMI se </a:t>
+            </a:r>
+            <a:r>
+              <a:rPr lang="en-US" sz="1200" dirty="0" err="1">
+                <a:latin typeface="Arial" panose="020B0604020202020204" pitchFamily="34" charset="0"/>
+                <a:cs typeface="Arial" panose="020B0604020202020204" pitchFamily="34" charset="0"/>
+              </a:rPr>
+              <a:t>caracterizan</a:t>
+            </a:r>
+            <a:r>
+              <a:rPr lang="en-US" sz="1200" dirty="0">
+                <a:latin typeface="Arial" panose="020B0604020202020204" pitchFamily="34" charset="0"/>
+                <a:cs typeface="Arial" panose="020B0604020202020204" pitchFamily="34" charset="0"/>
+              </a:rPr>
+              <a:t> </a:t>
+            </a:r>
+            <a:r>
+              <a:rPr lang="en-US" sz="1200" dirty="0" err="1">
+                <a:latin typeface="Arial" panose="020B0604020202020204" pitchFamily="34" charset="0"/>
+                <a:cs typeface="Arial" panose="020B0604020202020204" pitchFamily="34" charset="0"/>
+              </a:rPr>
+              <a:t>por</a:t>
+            </a:r>
+            <a:r>
+              <a:rPr lang="en-US" sz="1200" dirty="0">
+                <a:latin typeface="Arial" panose="020B0604020202020204" pitchFamily="34" charset="0"/>
+                <a:cs typeface="Arial" panose="020B0604020202020204" pitchFamily="34" charset="0"/>
+              </a:rPr>
+              <a:t> la replica de </a:t>
+            </a:r>
+            <a:r>
+              <a:rPr lang="en-US" sz="1200" dirty="0" err="1">
+                <a:latin typeface="Arial" panose="020B0604020202020204" pitchFamily="34" charset="0"/>
+                <a:cs typeface="Arial" panose="020B0604020202020204" pitchFamily="34" charset="0"/>
+              </a:rPr>
+              <a:t>autoimágenes</a:t>
+            </a:r>
+            <a:r>
+              <a:rPr lang="en-US" sz="1200" dirty="0">
+                <a:latin typeface="Arial" panose="020B0604020202020204" pitchFamily="34" charset="0"/>
+                <a:cs typeface="Arial" panose="020B0604020202020204" pitchFamily="34" charset="0"/>
+              </a:rPr>
+              <a:t> </a:t>
+            </a:r>
+            <a:r>
+              <a:rPr lang="en-US" sz="1200" dirty="0" err="1">
+                <a:latin typeface="Arial" panose="020B0604020202020204" pitchFamily="34" charset="0"/>
+                <a:cs typeface="Arial" panose="020B0604020202020204" pitchFamily="34" charset="0"/>
+              </a:rPr>
+              <a:t>por</a:t>
+            </a:r>
+            <a:r>
+              <a:rPr lang="en-US" sz="1200" dirty="0">
+                <a:latin typeface="Arial" panose="020B0604020202020204" pitchFamily="34" charset="0"/>
+                <a:cs typeface="Arial" panose="020B0604020202020204" pitchFamily="34" charset="0"/>
+              </a:rPr>
+              <a:t> medio de la </a:t>
+            </a:r>
+            <a:r>
+              <a:rPr lang="en-US" sz="1200" dirty="0" err="1">
+                <a:latin typeface="Arial" panose="020B0604020202020204" pitchFamily="34" charset="0"/>
+                <a:cs typeface="Arial" panose="020B0604020202020204" pitchFamily="34" charset="0"/>
+              </a:rPr>
+              <a:t>interferencia</a:t>
+            </a:r>
+            <a:r>
+              <a:rPr lang="en-US" sz="1200" dirty="0">
+                <a:latin typeface="Arial" panose="020B0604020202020204" pitchFamily="34" charset="0"/>
+                <a:cs typeface="Arial" panose="020B0604020202020204" pitchFamily="34" charset="0"/>
+              </a:rPr>
+              <a:t> entre </a:t>
+            </a:r>
+            <a:r>
+              <a:rPr lang="en-US" sz="1200" dirty="0" err="1">
+                <a:latin typeface="Arial" panose="020B0604020202020204" pitchFamily="34" charset="0"/>
+                <a:cs typeface="Arial" panose="020B0604020202020204" pitchFamily="34" charset="0"/>
+              </a:rPr>
+              <a:t>los</a:t>
+            </a:r>
+            <a:r>
+              <a:rPr lang="en-US" sz="1200" dirty="0">
+                <a:latin typeface="Arial" panose="020B0604020202020204" pitchFamily="34" charset="0"/>
+                <a:cs typeface="Arial" panose="020B0604020202020204" pitchFamily="34" charset="0"/>
+              </a:rPr>
+              <a:t> </a:t>
+            </a:r>
+            <a:r>
+              <a:rPr lang="en-US" sz="1200" dirty="0" err="1">
+                <a:latin typeface="Arial" panose="020B0604020202020204" pitchFamily="34" charset="0"/>
+                <a:cs typeface="Arial" panose="020B0604020202020204" pitchFamily="34" charset="0"/>
+              </a:rPr>
+              <a:t>modos</a:t>
+            </a:r>
+            <a:r>
+              <a:rPr lang="en-US" sz="1200" dirty="0">
+                <a:latin typeface="Arial" panose="020B0604020202020204" pitchFamily="34" charset="0"/>
+                <a:cs typeface="Arial" panose="020B0604020202020204" pitchFamily="34" charset="0"/>
+              </a:rPr>
+              <a:t>. Al ser de gran </a:t>
+            </a:r>
+            <a:r>
+              <a:rPr lang="en-US" sz="1200" dirty="0" err="1">
+                <a:latin typeface="Arial" panose="020B0604020202020204" pitchFamily="34" charset="0"/>
+                <a:cs typeface="Arial" panose="020B0604020202020204" pitchFamily="34" charset="0"/>
+              </a:rPr>
+              <a:t>tamaño</a:t>
+            </a:r>
+            <a:r>
+              <a:rPr lang="en-US" sz="1200" dirty="0">
+                <a:latin typeface="Arial" panose="020B0604020202020204" pitchFamily="34" charset="0"/>
+                <a:cs typeface="Arial" panose="020B0604020202020204" pitchFamily="34" charset="0"/>
+              </a:rPr>
+              <a:t> se </a:t>
+            </a:r>
+            <a:r>
+              <a:rPr lang="en-US" sz="1200" dirty="0" err="1">
+                <a:latin typeface="Arial" panose="020B0604020202020204" pitchFamily="34" charset="0"/>
+                <a:cs typeface="Arial" panose="020B0604020202020204" pitchFamily="34" charset="0"/>
+              </a:rPr>
+              <a:t>propagan</a:t>
+            </a:r>
+            <a:r>
+              <a:rPr lang="en-US" sz="1200" dirty="0">
+                <a:latin typeface="Arial" panose="020B0604020202020204" pitchFamily="34" charset="0"/>
+                <a:cs typeface="Arial" panose="020B0604020202020204" pitchFamily="34" charset="0"/>
+              </a:rPr>
+              <a:t> </a:t>
+            </a:r>
+            <a:r>
+              <a:rPr lang="en-US" sz="1200" dirty="0" err="1">
+                <a:latin typeface="Arial" panose="020B0604020202020204" pitchFamily="34" charset="0"/>
+                <a:cs typeface="Arial" panose="020B0604020202020204" pitchFamily="34" charset="0"/>
+              </a:rPr>
+              <a:t>una</a:t>
+            </a:r>
+            <a:r>
+              <a:rPr lang="en-US" sz="1200" dirty="0">
+                <a:latin typeface="Arial" panose="020B0604020202020204" pitchFamily="34" charset="0"/>
+                <a:cs typeface="Arial" panose="020B0604020202020204" pitchFamily="34" charset="0"/>
+              </a:rPr>
+              <a:t> gran </a:t>
+            </a:r>
+            <a:r>
+              <a:rPr lang="en-US" sz="1200" dirty="0" err="1">
+                <a:latin typeface="Arial" panose="020B0604020202020204" pitchFamily="34" charset="0"/>
+                <a:cs typeface="Arial" panose="020B0604020202020204" pitchFamily="34" charset="0"/>
+              </a:rPr>
+              <a:t>cantidad</a:t>
+            </a:r>
+            <a:r>
+              <a:rPr lang="en-US" sz="1200" dirty="0">
+                <a:latin typeface="Arial" panose="020B0604020202020204" pitchFamily="34" charset="0"/>
+                <a:cs typeface="Arial" panose="020B0604020202020204" pitchFamily="34" charset="0"/>
+              </a:rPr>
+              <a:t> de </a:t>
+            </a:r>
+            <a:r>
+              <a:rPr lang="en-US" sz="1200" dirty="0" err="1">
+                <a:latin typeface="Arial" panose="020B0604020202020204" pitchFamily="34" charset="0"/>
+                <a:cs typeface="Arial" panose="020B0604020202020204" pitchFamily="34" charset="0"/>
+              </a:rPr>
+              <a:t>modos</a:t>
+            </a:r>
+            <a:r>
+              <a:rPr lang="en-US" sz="1200" dirty="0">
+                <a:latin typeface="Arial" panose="020B0604020202020204" pitchFamily="34" charset="0"/>
+                <a:cs typeface="Arial" panose="020B0604020202020204" pitchFamily="34" charset="0"/>
+              </a:rPr>
+              <a:t>. Las </a:t>
+            </a:r>
+            <a:r>
+              <a:rPr lang="en-US" sz="1200" dirty="0" err="1">
+                <a:latin typeface="Arial" panose="020B0604020202020204" pitchFamily="34" charset="0"/>
+                <a:cs typeface="Arial" panose="020B0604020202020204" pitchFamily="34" charset="0"/>
+              </a:rPr>
+              <a:t>imágenes</a:t>
+            </a:r>
+            <a:r>
+              <a:rPr lang="en-US" sz="1200" dirty="0">
+                <a:latin typeface="Arial" panose="020B0604020202020204" pitchFamily="34" charset="0"/>
+                <a:cs typeface="Arial" panose="020B0604020202020204" pitchFamily="34" charset="0"/>
+              </a:rPr>
+              <a:t> </a:t>
+            </a:r>
+            <a:r>
+              <a:rPr lang="en-US" sz="1200" dirty="0" err="1">
+                <a:latin typeface="Arial" panose="020B0604020202020204" pitchFamily="34" charset="0"/>
+                <a:cs typeface="Arial" panose="020B0604020202020204" pitchFamily="34" charset="0"/>
+              </a:rPr>
+              <a:t>correspondientes</a:t>
+            </a:r>
+            <a:r>
+              <a:rPr lang="en-US" sz="1200" dirty="0">
+                <a:latin typeface="Arial" panose="020B0604020202020204" pitchFamily="34" charset="0"/>
+                <a:cs typeface="Arial" panose="020B0604020202020204" pitchFamily="34" charset="0"/>
+              </a:rPr>
+              <a:t> a </a:t>
+            </a:r>
+            <a:r>
+              <a:rPr lang="en-US" sz="1200" dirty="0" err="1">
+                <a:latin typeface="Arial" panose="020B0604020202020204" pitchFamily="34" charset="0"/>
+                <a:cs typeface="Arial" panose="020B0604020202020204" pitchFamily="34" charset="0"/>
+              </a:rPr>
+              <a:t>modos</a:t>
+            </a:r>
+            <a:r>
+              <a:rPr lang="en-US" sz="1200" dirty="0">
+                <a:latin typeface="Arial" panose="020B0604020202020204" pitchFamily="34" charset="0"/>
+                <a:cs typeface="Arial" panose="020B0604020202020204" pitchFamily="34" charset="0"/>
+              </a:rPr>
+              <a:t> TE, </a:t>
+            </a:r>
+            <a:r>
+              <a:rPr lang="en-US" sz="1200" dirty="0" err="1">
+                <a:latin typeface="Arial" panose="020B0604020202020204" pitchFamily="34" charset="0"/>
+                <a:cs typeface="Arial" panose="020B0604020202020204" pitchFamily="34" charset="0"/>
+              </a:rPr>
+              <a:t>correspondientes</a:t>
+            </a:r>
+            <a:r>
+              <a:rPr lang="en-US" sz="1200" dirty="0">
+                <a:latin typeface="Arial" panose="020B0604020202020204" pitchFamily="34" charset="0"/>
+                <a:cs typeface="Arial" panose="020B0604020202020204" pitchFamily="34" charset="0"/>
+              </a:rPr>
+              <a:t> a al </a:t>
+            </a:r>
+            <a:r>
+              <a:rPr lang="en-US" sz="1200" dirty="0" err="1">
+                <a:latin typeface="Arial" panose="020B0604020202020204" pitchFamily="34" charset="0"/>
+                <a:cs typeface="Arial" panose="020B0604020202020204" pitchFamily="34" charset="0"/>
+              </a:rPr>
+              <a:t>índice</a:t>
+            </a:r>
+            <a:r>
+              <a:rPr lang="en-US" sz="1200" dirty="0">
+                <a:latin typeface="Arial" panose="020B0604020202020204" pitchFamily="34" charset="0"/>
+                <a:cs typeface="Arial" panose="020B0604020202020204" pitchFamily="34" charset="0"/>
+              </a:rPr>
+              <a:t> 0,1 y </a:t>
+            </a:r>
+            <a:r>
+              <a:rPr lang="en-US" sz="1200" dirty="0" err="1">
+                <a:latin typeface="Arial" panose="020B0604020202020204" pitchFamily="34" charset="0"/>
+                <a:cs typeface="Arial" panose="020B0604020202020204" pitchFamily="34" charset="0"/>
+              </a:rPr>
+              <a:t>nos</a:t>
+            </a:r>
+            <a:r>
+              <a:rPr lang="en-US" sz="1200" dirty="0">
+                <a:latin typeface="Arial" panose="020B0604020202020204" pitchFamily="34" charset="0"/>
+                <a:cs typeface="Arial" panose="020B0604020202020204" pitchFamily="34" charset="0"/>
+              </a:rPr>
+              <a:t> </a:t>
+            </a:r>
+            <a:r>
+              <a:rPr lang="en-US" sz="1200" dirty="0" err="1">
+                <a:latin typeface="Arial" panose="020B0604020202020204" pitchFamily="34" charset="0"/>
+                <a:cs typeface="Arial" panose="020B0604020202020204" pitchFamily="34" charset="0"/>
+              </a:rPr>
+              <a:t>ayuda</a:t>
+            </a:r>
+            <a:r>
+              <a:rPr lang="en-US" sz="1200" dirty="0">
+                <a:latin typeface="Arial" panose="020B0604020202020204" pitchFamily="34" charset="0"/>
+                <a:cs typeface="Arial" panose="020B0604020202020204" pitchFamily="34" charset="0"/>
+              </a:rPr>
+              <a:t> a </a:t>
+            </a:r>
+            <a:r>
+              <a:rPr lang="en-US" sz="1200" dirty="0" err="1">
+                <a:latin typeface="Arial" panose="020B0604020202020204" pitchFamily="34" charset="0"/>
+                <a:cs typeface="Arial" panose="020B0604020202020204" pitchFamily="34" charset="0"/>
+              </a:rPr>
+              <a:t>comprender</a:t>
+            </a:r>
+            <a:r>
+              <a:rPr lang="en-US" sz="1200" dirty="0">
+                <a:latin typeface="Arial" panose="020B0604020202020204" pitchFamily="34" charset="0"/>
+                <a:cs typeface="Arial" panose="020B0604020202020204" pitchFamily="34" charset="0"/>
+              </a:rPr>
+              <a:t> a </a:t>
+            </a:r>
+            <a:r>
+              <a:rPr lang="en-US" sz="1200" dirty="0" err="1">
+                <a:latin typeface="Arial" panose="020B0604020202020204" pitchFamily="34" charset="0"/>
+                <a:cs typeface="Arial" panose="020B0604020202020204" pitchFamily="34" charset="0"/>
+              </a:rPr>
+              <a:t>primera</a:t>
+            </a:r>
+            <a:r>
+              <a:rPr lang="en-US" sz="1200" dirty="0">
+                <a:latin typeface="Arial" panose="020B0604020202020204" pitchFamily="34" charset="0"/>
+                <a:cs typeface="Arial" panose="020B0604020202020204" pitchFamily="34" charset="0"/>
+              </a:rPr>
+              <a:t> vista la </a:t>
+            </a:r>
+            <a:r>
+              <a:rPr lang="en-US" sz="1200" dirty="0" err="1">
+                <a:latin typeface="Arial" panose="020B0604020202020204" pitchFamily="34" charset="0"/>
+                <a:cs typeface="Arial" panose="020B0604020202020204" pitchFamily="34" charset="0"/>
+              </a:rPr>
+              <a:t>cantidad</a:t>
+            </a:r>
+            <a:r>
+              <a:rPr lang="en-US" sz="1200" dirty="0">
+                <a:latin typeface="Arial" panose="020B0604020202020204" pitchFamily="34" charset="0"/>
+                <a:cs typeface="Arial" panose="020B0604020202020204" pitchFamily="34" charset="0"/>
+              </a:rPr>
+              <a:t> de </a:t>
+            </a:r>
+            <a:r>
+              <a:rPr lang="en-US" sz="1200" dirty="0" err="1">
+                <a:latin typeface="Arial" panose="020B0604020202020204" pitchFamily="34" charset="0"/>
+                <a:cs typeface="Arial" panose="020B0604020202020204" pitchFamily="34" charset="0"/>
+              </a:rPr>
+              <a:t>modos</a:t>
+            </a:r>
+            <a:r>
+              <a:rPr lang="en-US" sz="1200" dirty="0">
+                <a:latin typeface="Arial" panose="020B0604020202020204" pitchFamily="34" charset="0"/>
+                <a:cs typeface="Arial" panose="020B0604020202020204" pitchFamily="34" charset="0"/>
+              </a:rPr>
+              <a:t> </a:t>
+            </a:r>
+            <a:r>
+              <a:rPr lang="en-US" sz="1200" dirty="0" err="1">
+                <a:latin typeface="Arial" panose="020B0604020202020204" pitchFamily="34" charset="0"/>
+                <a:cs typeface="Arial" panose="020B0604020202020204" pitchFamily="34" charset="0"/>
+              </a:rPr>
+              <a:t>que</a:t>
+            </a:r>
+            <a:r>
+              <a:rPr lang="en-US" sz="1200" dirty="0">
+                <a:latin typeface="Arial" panose="020B0604020202020204" pitchFamily="34" charset="0"/>
+                <a:cs typeface="Arial" panose="020B0604020202020204" pitchFamily="34" charset="0"/>
+              </a:rPr>
+              <a:t> </a:t>
+            </a:r>
+            <a:r>
+              <a:rPr lang="en-US" sz="1200" dirty="0" err="1">
+                <a:latin typeface="Arial" panose="020B0604020202020204" pitchFamily="34" charset="0"/>
+                <a:cs typeface="Arial" panose="020B0604020202020204" pitchFamily="34" charset="0"/>
+              </a:rPr>
+              <a:t>puede</a:t>
+            </a:r>
+            <a:r>
+              <a:rPr lang="en-US" sz="1200" dirty="0">
+                <a:latin typeface="Arial" panose="020B0604020202020204" pitchFamily="34" charset="0"/>
+                <a:cs typeface="Arial" panose="020B0604020202020204" pitchFamily="34" charset="0"/>
+              </a:rPr>
+              <a:t> </a:t>
+            </a:r>
+            <a:r>
+              <a:rPr lang="en-US" sz="1200" dirty="0" err="1">
+                <a:latin typeface="Arial" panose="020B0604020202020204" pitchFamily="34" charset="0"/>
+                <a:cs typeface="Arial" panose="020B0604020202020204" pitchFamily="34" charset="0"/>
+              </a:rPr>
+              <a:t>contener</a:t>
+            </a:r>
+            <a:r>
+              <a:rPr lang="en-US" sz="1200" dirty="0">
+                <a:latin typeface="Arial" panose="020B0604020202020204" pitchFamily="34" charset="0"/>
+                <a:cs typeface="Arial" panose="020B0604020202020204" pitchFamily="34" charset="0"/>
+              </a:rPr>
+              <a:t>. De </a:t>
+            </a:r>
+            <a:r>
+              <a:rPr lang="en-US" sz="1200" dirty="0" err="1">
+                <a:latin typeface="Arial" panose="020B0604020202020204" pitchFamily="34" charset="0"/>
+                <a:cs typeface="Arial" panose="020B0604020202020204" pitchFamily="34" charset="0"/>
+              </a:rPr>
+              <a:t>hecho</a:t>
+            </a:r>
+            <a:r>
+              <a:rPr lang="en-US" sz="1200" dirty="0">
+                <a:latin typeface="Arial" panose="020B0604020202020204" pitchFamily="34" charset="0"/>
+                <a:cs typeface="Arial" panose="020B0604020202020204" pitchFamily="34" charset="0"/>
+              </a:rPr>
+              <a:t> </a:t>
+            </a:r>
+            <a:r>
+              <a:rPr lang="en-US" sz="1200" dirty="0" err="1">
+                <a:latin typeface="Arial" panose="020B0604020202020204" pitchFamily="34" charset="0"/>
+                <a:cs typeface="Arial" panose="020B0604020202020204" pitchFamily="34" charset="0"/>
+              </a:rPr>
+              <a:t>en</a:t>
+            </a:r>
+            <a:r>
+              <a:rPr lang="en-US" sz="1200" dirty="0">
+                <a:latin typeface="Arial" panose="020B0604020202020204" pitchFamily="34" charset="0"/>
+                <a:cs typeface="Arial" panose="020B0604020202020204" pitchFamily="34" charset="0"/>
+              </a:rPr>
+              <a:t> la </a:t>
+            </a:r>
+            <a:r>
+              <a:rPr lang="en-US" sz="1200" dirty="0" err="1">
+                <a:latin typeface="Arial" panose="020B0604020202020204" pitchFamily="34" charset="0"/>
+                <a:cs typeface="Arial" panose="020B0604020202020204" pitchFamily="34" charset="0"/>
+              </a:rPr>
+              <a:t>siguiente</a:t>
+            </a:r>
+            <a:r>
+              <a:rPr lang="en-US" sz="1200" dirty="0">
+                <a:latin typeface="Arial" panose="020B0604020202020204" pitchFamily="34" charset="0"/>
+                <a:cs typeface="Arial" panose="020B0604020202020204" pitchFamily="34" charset="0"/>
+              </a:rPr>
+              <a:t> </a:t>
+            </a:r>
+            <a:r>
+              <a:rPr lang="en-US" sz="1200" dirty="0" err="1">
+                <a:latin typeface="Arial" panose="020B0604020202020204" pitchFamily="34" charset="0"/>
+                <a:cs typeface="Arial" panose="020B0604020202020204" pitchFamily="34" charset="0"/>
+              </a:rPr>
+              <a:t>diapositiva</a:t>
+            </a:r>
+            <a:r>
+              <a:rPr lang="en-US" sz="1200" dirty="0">
+                <a:latin typeface="Arial" panose="020B0604020202020204" pitchFamily="34" charset="0"/>
+                <a:cs typeface="Arial" panose="020B0604020202020204" pitchFamily="34" charset="0"/>
+              </a:rPr>
+              <a:t>, se </a:t>
+            </a:r>
+            <a:r>
+              <a:rPr lang="en-US" sz="1200" dirty="0" err="1">
+                <a:latin typeface="Arial" panose="020B0604020202020204" pitchFamily="34" charset="0"/>
+                <a:cs typeface="Arial" panose="020B0604020202020204" pitchFamily="34" charset="0"/>
+              </a:rPr>
+              <a:t>muestra</a:t>
+            </a:r>
+            <a:r>
+              <a:rPr lang="en-US" sz="1200" dirty="0">
+                <a:latin typeface="Arial" panose="020B0604020202020204" pitchFamily="34" charset="0"/>
+                <a:cs typeface="Arial" panose="020B0604020202020204" pitchFamily="34" charset="0"/>
+              </a:rPr>
+              <a:t> la </a:t>
+            </a:r>
+            <a:r>
+              <a:rPr lang="en-US" sz="1200" dirty="0" err="1">
+                <a:latin typeface="Arial" panose="020B0604020202020204" pitchFamily="34" charset="0"/>
+                <a:cs typeface="Arial" panose="020B0604020202020204" pitchFamily="34" charset="0"/>
+              </a:rPr>
+              <a:t>cantidad</a:t>
+            </a:r>
+            <a:r>
+              <a:rPr lang="en-US" sz="1200" dirty="0">
+                <a:latin typeface="Arial" panose="020B0604020202020204" pitchFamily="34" charset="0"/>
+                <a:cs typeface="Arial" panose="020B0604020202020204" pitchFamily="34" charset="0"/>
+              </a:rPr>
+              <a:t> de </a:t>
+            </a:r>
+            <a:r>
+              <a:rPr lang="en-US" sz="1200" dirty="0" err="1">
+                <a:latin typeface="Arial" panose="020B0604020202020204" pitchFamily="34" charset="0"/>
+                <a:cs typeface="Arial" panose="020B0604020202020204" pitchFamily="34" charset="0"/>
+              </a:rPr>
+              <a:t>modos</a:t>
+            </a:r>
+            <a:r>
+              <a:rPr lang="en-US" sz="1200" dirty="0">
+                <a:latin typeface="Arial" panose="020B0604020202020204" pitchFamily="34" charset="0"/>
+                <a:cs typeface="Arial" panose="020B0604020202020204" pitchFamily="34" charset="0"/>
+              </a:rPr>
+              <a:t> </a:t>
+            </a:r>
+            <a:r>
+              <a:rPr lang="en-US" sz="1200" dirty="0" err="1">
+                <a:latin typeface="Arial" panose="020B0604020202020204" pitchFamily="34" charset="0"/>
+                <a:cs typeface="Arial" panose="020B0604020202020204" pitchFamily="34" charset="0"/>
+              </a:rPr>
+              <a:t>totales</a:t>
+            </a:r>
+            <a:r>
+              <a:rPr lang="en-US" sz="1200" dirty="0">
+                <a:latin typeface="Arial" panose="020B0604020202020204" pitchFamily="34" charset="0"/>
+                <a:cs typeface="Arial" panose="020B0604020202020204" pitchFamily="34" charset="0"/>
+              </a:rPr>
+              <a:t>, </a:t>
+            </a:r>
+            <a:r>
+              <a:rPr lang="en-US" sz="1200" dirty="0" err="1">
+                <a:latin typeface="Arial" panose="020B0604020202020204" pitchFamily="34" charset="0"/>
+                <a:cs typeface="Arial" panose="020B0604020202020204" pitchFamily="34" charset="0"/>
+              </a:rPr>
+              <a:t>que</a:t>
+            </a:r>
+            <a:r>
+              <a:rPr lang="en-US" sz="1200" dirty="0">
+                <a:latin typeface="Arial" panose="020B0604020202020204" pitchFamily="34" charset="0"/>
+                <a:cs typeface="Arial" panose="020B0604020202020204" pitchFamily="34" charset="0"/>
+              </a:rPr>
+              <a:t> son </a:t>
+            </a:r>
+            <a:r>
+              <a:rPr lang="en-US" sz="1200" dirty="0" err="1">
+                <a:latin typeface="Arial" panose="020B0604020202020204" pitchFamily="34" charset="0"/>
+                <a:cs typeface="Arial" panose="020B0604020202020204" pitchFamily="34" charset="0"/>
+              </a:rPr>
+              <a:t>todos</a:t>
+            </a:r>
+            <a:r>
+              <a:rPr lang="en-US" sz="1200" dirty="0">
+                <a:latin typeface="Arial" panose="020B0604020202020204" pitchFamily="34" charset="0"/>
+                <a:cs typeface="Arial" panose="020B0604020202020204" pitchFamily="34" charset="0"/>
+              </a:rPr>
+              <a:t> </a:t>
+            </a:r>
+            <a:r>
+              <a:rPr lang="en-US" sz="1200" dirty="0" err="1">
+                <a:latin typeface="Arial" panose="020B0604020202020204" pitchFamily="34" charset="0"/>
+                <a:cs typeface="Arial" panose="020B0604020202020204" pitchFamily="34" charset="0"/>
+              </a:rPr>
+              <a:t>aquellos</a:t>
+            </a:r>
+            <a:r>
+              <a:rPr lang="en-US" sz="1200" dirty="0">
+                <a:latin typeface="Arial" panose="020B0604020202020204" pitchFamily="34" charset="0"/>
+                <a:cs typeface="Arial" panose="020B0604020202020204" pitchFamily="34" charset="0"/>
+              </a:rPr>
+              <a:t> </a:t>
+            </a:r>
+            <a:r>
+              <a:rPr lang="en-US" sz="1200" dirty="0" err="1">
+                <a:latin typeface="Arial" panose="020B0604020202020204" pitchFamily="34" charset="0"/>
+                <a:cs typeface="Arial" panose="020B0604020202020204" pitchFamily="34" charset="0"/>
+              </a:rPr>
+              <a:t>que</a:t>
+            </a:r>
+            <a:r>
+              <a:rPr lang="en-US" sz="1200" dirty="0">
+                <a:latin typeface="Arial" panose="020B0604020202020204" pitchFamily="34" charset="0"/>
+                <a:cs typeface="Arial" panose="020B0604020202020204" pitchFamily="34" charset="0"/>
+              </a:rPr>
+              <a:t> </a:t>
+            </a:r>
+            <a:r>
+              <a:rPr lang="en-US" sz="1200" dirty="0" err="1">
+                <a:latin typeface="Arial" panose="020B0604020202020204" pitchFamily="34" charset="0"/>
+                <a:cs typeface="Arial" panose="020B0604020202020204" pitchFamily="34" charset="0"/>
+              </a:rPr>
+              <a:t>tengan</a:t>
+            </a:r>
+            <a:r>
+              <a:rPr lang="en-US" sz="1200" dirty="0">
+                <a:latin typeface="Arial" panose="020B0604020202020204" pitchFamily="34" charset="0"/>
+                <a:cs typeface="Arial" panose="020B0604020202020204" pitchFamily="34" charset="0"/>
+              </a:rPr>
+              <a:t> un </a:t>
+            </a:r>
+            <a:r>
+              <a:rPr lang="en-US" sz="1200" dirty="0" err="1">
+                <a:latin typeface="Arial" panose="020B0604020202020204" pitchFamily="34" charset="0"/>
+                <a:cs typeface="Arial" panose="020B0604020202020204" pitchFamily="34" charset="0"/>
+              </a:rPr>
+              <a:t>índice</a:t>
+            </a:r>
+            <a:r>
+              <a:rPr lang="en-US" sz="1200" dirty="0">
+                <a:latin typeface="Arial" panose="020B0604020202020204" pitchFamily="34" charset="0"/>
+                <a:cs typeface="Arial" panose="020B0604020202020204" pitchFamily="34" charset="0"/>
+              </a:rPr>
+              <a:t> </a:t>
+            </a:r>
+            <a:r>
+              <a:rPr lang="en-US" sz="1200" dirty="0" err="1">
+                <a:latin typeface="Arial" panose="020B0604020202020204" pitchFamily="34" charset="0"/>
+                <a:cs typeface="Arial" panose="020B0604020202020204" pitchFamily="34" charset="0"/>
+              </a:rPr>
+              <a:t>efectivo</a:t>
+            </a:r>
+            <a:r>
+              <a:rPr lang="en-US" sz="1200" dirty="0">
+                <a:latin typeface="Arial" panose="020B0604020202020204" pitchFamily="34" charset="0"/>
+                <a:cs typeface="Arial" panose="020B0604020202020204" pitchFamily="34" charset="0"/>
+              </a:rPr>
+              <a:t> </a:t>
+            </a:r>
+            <a:r>
+              <a:rPr lang="en-US" sz="1200" dirty="0" err="1">
+                <a:latin typeface="Arial" panose="020B0604020202020204" pitchFamily="34" charset="0"/>
+                <a:cs typeface="Arial" panose="020B0604020202020204" pitchFamily="34" charset="0"/>
+              </a:rPr>
+              <a:t>por</a:t>
+            </a:r>
+            <a:r>
+              <a:rPr lang="en-US" sz="1200" dirty="0">
+                <a:latin typeface="Arial" panose="020B0604020202020204" pitchFamily="34" charset="0"/>
+                <a:cs typeface="Arial" panose="020B0604020202020204" pitchFamily="34" charset="0"/>
+              </a:rPr>
+              <a:t> </a:t>
+            </a:r>
+            <a:r>
+              <a:rPr lang="en-US" sz="1200" dirty="0" err="1">
+                <a:latin typeface="Arial" panose="020B0604020202020204" pitchFamily="34" charset="0"/>
+                <a:cs typeface="Arial" panose="020B0604020202020204" pitchFamily="34" charset="0"/>
+              </a:rPr>
+              <a:t>encima</a:t>
+            </a:r>
+            <a:r>
+              <a:rPr lang="en-US" sz="1200" dirty="0">
+                <a:latin typeface="Arial" panose="020B0604020202020204" pitchFamily="34" charset="0"/>
+                <a:cs typeface="Arial" panose="020B0604020202020204" pitchFamily="34" charset="0"/>
+              </a:rPr>
+              <a:t> del cladding, </a:t>
+            </a:r>
+            <a:r>
+              <a:rPr lang="en-US" sz="1200" dirty="0" err="1">
+                <a:latin typeface="Arial" panose="020B0604020202020204" pitchFamily="34" charset="0"/>
+                <a:cs typeface="Arial" panose="020B0604020202020204" pitchFamily="34" charset="0"/>
+              </a:rPr>
+              <a:t>que</a:t>
+            </a:r>
+            <a:r>
+              <a:rPr lang="en-US" sz="1200" dirty="0">
+                <a:latin typeface="Arial" panose="020B0604020202020204" pitchFamily="34" charset="0"/>
+                <a:cs typeface="Arial" panose="020B0604020202020204" pitchFamily="34" charset="0"/>
+              </a:rPr>
+              <a:t> es de </a:t>
+            </a:r>
+            <a:r>
+              <a:rPr lang="en-US" sz="1200" dirty="0" err="1">
+                <a:latin typeface="Arial" panose="020B0604020202020204" pitchFamily="34" charset="0"/>
+                <a:cs typeface="Arial" panose="020B0604020202020204" pitchFamily="34" charset="0"/>
+              </a:rPr>
+              <a:t>alrededor</a:t>
+            </a:r>
+            <a:r>
+              <a:rPr lang="en-US" sz="1200" dirty="0">
+                <a:latin typeface="Arial" panose="020B0604020202020204" pitchFamily="34" charset="0"/>
+                <a:cs typeface="Arial" panose="020B0604020202020204" pitchFamily="34" charset="0"/>
+              </a:rPr>
+              <a:t> de 1.44.</a:t>
+            </a:r>
           </a:p>
           <a:p>
             <a:pPr algn="just"/>
@@ -3565,6 +4497,126 @@
           </a:p>
         </p:txBody>
       </p:sp>
+      <p:pic>
+        <p:nvPicPr>
+          <p:cNvPr id="6" name="Imagen 5" descr="Interfaz de usuario gráfica, Aplicación, Word&#10;&#10;El contenido generado por IA puede ser incorrecto.">
+            <a:extLst>
+              <a:ext uri="{FF2B5EF4-FFF2-40B4-BE49-F238E27FC236}">
+                <a16:creationId xmlns:a16="http://schemas.microsoft.com/office/drawing/2014/main" id="{FA5EB026-0DB9-10CC-CAAB-2133E01A0A44}"/>
+              </a:ext>
+            </a:extLst>
+          </p:cNvPr>
+          <p:cNvPicPr>
+            <a:picLocks noChangeAspect="1"/>
+          </p:cNvPicPr>
+          <p:nvPr/>
+        </p:nvPicPr>
+        <p:blipFill>
+          <a:blip r:embed="rId5"/>
+          <a:stretch>
+            <a:fillRect/>
+          </a:stretch>
+        </p:blipFill>
+        <p:spPr>
+          <a:xfrm>
+            <a:off x="608012" y="1009948"/>
+            <a:ext cx="3119567" cy="2266652"/>
+          </a:xfrm>
+          <a:prstGeom prst="rect">
+            <a:avLst/>
+          </a:prstGeom>
+        </p:spPr>
+      </p:pic>
+      <p:pic>
+        <p:nvPicPr>
+          <p:cNvPr id="8" name="Imagen 7" descr="Interfaz de usuario gráfica, Word&#10;&#10;El contenido generado por IA puede ser incorrecto.">
+            <a:extLst>
+              <a:ext uri="{FF2B5EF4-FFF2-40B4-BE49-F238E27FC236}">
+                <a16:creationId xmlns:a16="http://schemas.microsoft.com/office/drawing/2014/main" id="{035CD8B0-26E9-5EDB-2EDF-AA9F3A3B9C05}"/>
+              </a:ext>
+            </a:extLst>
+          </p:cNvPr>
+          <p:cNvPicPr>
+            <a:picLocks noChangeAspect="1"/>
+          </p:cNvPicPr>
+          <p:nvPr/>
+        </p:nvPicPr>
+        <p:blipFill>
+          <a:blip r:embed="rId6"/>
+          <a:stretch>
+            <a:fillRect/>
+          </a:stretch>
+        </p:blipFill>
+        <p:spPr>
+          <a:xfrm>
+            <a:off x="4343400" y="1073407"/>
+            <a:ext cx="3121505" cy="2203193"/>
+          </a:xfrm>
+          <a:prstGeom prst="rect">
+            <a:avLst/>
+          </a:prstGeom>
+        </p:spPr>
+      </p:pic>
+      <p:pic>
+        <p:nvPicPr>
+          <p:cNvPr id="10" name="Imagen 9" descr="Interfaz de usuario gráfica, Aplicación&#10;&#10;El contenido generado por IA puede ser incorrecto.">
+            <a:extLst>
+              <a:ext uri="{FF2B5EF4-FFF2-40B4-BE49-F238E27FC236}">
+                <a16:creationId xmlns:a16="http://schemas.microsoft.com/office/drawing/2014/main" id="{3F3FF10B-6C4F-633A-81DD-FB844A482D76}"/>
+              </a:ext>
+            </a:extLst>
+          </p:cNvPr>
+          <p:cNvPicPr>
+            <a:picLocks noChangeAspect="1"/>
+          </p:cNvPicPr>
+          <p:nvPr/>
+        </p:nvPicPr>
+        <p:blipFill>
+          <a:blip r:embed="rId7"/>
+          <a:stretch>
+            <a:fillRect/>
+          </a:stretch>
+        </p:blipFill>
+        <p:spPr>
+          <a:xfrm>
+            <a:off x="7954927" y="1024007"/>
+            <a:ext cx="3213038" cy="2218526"/>
+          </a:xfrm>
+          <a:prstGeom prst="rect">
+            <a:avLst/>
+          </a:prstGeom>
+        </p:spPr>
+      </p:pic>
+      <p:pic>
+        <p:nvPicPr>
+          <p:cNvPr id="12" name="Imagen 11" descr="Texto&#10;&#10;El contenido generado por IA puede ser incorrecto.">
+            <a:extLst>
+              <a:ext uri="{FF2B5EF4-FFF2-40B4-BE49-F238E27FC236}">
+                <a16:creationId xmlns:a16="http://schemas.microsoft.com/office/drawing/2014/main" id="{1465DDA4-B361-95CF-47C3-A7DF719052C0}"/>
+              </a:ext>
+            </a:extLst>
+          </p:cNvPr>
+          <p:cNvPicPr>
+            <a:picLocks noChangeAspect="1"/>
+          </p:cNvPicPr>
+          <p:nvPr/>
+        </p:nvPicPr>
+        <p:blipFill>
+          <a:blip r:embed="rId8"/>
+          <a:stretch>
+            <a:fillRect/>
+          </a:stretch>
+        </p:blipFill>
+        <p:spPr>
+          <a:xfrm>
+            <a:off x="633412" y="3328120"/>
+            <a:ext cx="8202170" cy="1257475"/>
+          </a:xfrm>
+          <a:prstGeom prst="rect">
+            <a:avLst/>
+          </a:prstGeom>
+        </p:spPr>
+      </p:pic>
     </p:spTree>
     <p:extLst>
       <p:ext uri="{BB962C8B-B14F-4D97-AF65-F5344CB8AC3E}">
@@ -3583,6 +4635,2332 @@
   <p:cSld>
     <p:spTree>
       <p:nvGrpSpPr>
+        <p:cNvPr id="1" name="">
+          <a:extLst>
+            <a:ext uri="{FF2B5EF4-FFF2-40B4-BE49-F238E27FC236}">
+              <a16:creationId xmlns:a16="http://schemas.microsoft.com/office/drawing/2014/main" id="{5479C3DF-5152-5C28-897E-3ED37CEB2D56}"/>
+            </a:ext>
+          </a:extLst>
+        </p:cNvPr>
+        <p:cNvGrpSpPr/>
+        <p:nvPr/>
+      </p:nvGrpSpPr>
+      <p:grpSpPr>
+        <a:xfrm>
+          <a:off x="0" y="0"/>
+          <a:ext cx="0" cy="0"/>
+          <a:chOff x="0" y="0"/>
+          <a:chExt cx="0" cy="0"/>
+        </a:xfrm>
+      </p:grpSpPr>
+      <p:sp>
+        <p:nvSpPr>
+          <p:cNvPr id="16" name="object 16">
+            <a:extLst>
+              <a:ext uri="{FF2B5EF4-FFF2-40B4-BE49-F238E27FC236}">
+                <a16:creationId xmlns:a16="http://schemas.microsoft.com/office/drawing/2014/main" id="{3114E14B-F648-6920-5950-B939AD4413B6}"/>
+              </a:ext>
+            </a:extLst>
+          </p:cNvPr>
+          <p:cNvSpPr txBox="1">
+            <a:spLocks noGrp="1"/>
+          </p:cNvSpPr>
+          <p:nvPr>
+            <p:ph type="title"/>
+          </p:nvPr>
+        </p:nvSpPr>
+        <p:spPr>
+          <a:xfrm>
+            <a:off x="685800" y="408883"/>
+            <a:ext cx="10994410" cy="397545"/>
+          </a:xfrm>
+          <a:prstGeom prst="rect">
+            <a:avLst/>
+          </a:prstGeom>
+        </p:spPr>
+        <p:txBody>
+          <a:bodyPr vert="horz" wrap="square" lIns="0" tIns="12700" rIns="0" bIns="0" rtlCol="0">
+            <a:spAutoFit/>
+          </a:bodyPr>
+          <a:lstStyle/>
+          <a:p>
+            <a:pPr marL="12700">
+              <a:lnSpc>
+                <a:spcPct val="100000"/>
+              </a:lnSpc>
+              <a:spcBef>
+                <a:spcPts val="100"/>
+              </a:spcBef>
+            </a:pPr>
+            <a:r>
+              <a:rPr lang="en-US" sz="2500" dirty="0"/>
+              <a:t>Learning outcome #2 – Multimode Interference (MMI) Coupler cross-section</a:t>
+            </a:r>
+            <a:endParaRPr lang="en-US" sz="2500" b="0" dirty="0">
+              <a:latin typeface="+mj-lt"/>
+              <a:cs typeface="Lucida Sans"/>
+            </a:endParaRPr>
+          </a:p>
+        </p:txBody>
+      </p:sp>
+      <p:pic>
+        <p:nvPicPr>
+          <p:cNvPr id="83" name="Gráfico 82">
+            <a:extLst>
+              <a:ext uri="{FF2B5EF4-FFF2-40B4-BE49-F238E27FC236}">
+                <a16:creationId xmlns:a16="http://schemas.microsoft.com/office/drawing/2014/main" id="{59A6388A-B489-BA84-890C-026E2B988F95}"/>
+              </a:ext>
+            </a:extLst>
+          </p:cNvPr>
+          <p:cNvPicPr>
+            <a:picLocks noChangeAspect="1"/>
+          </p:cNvPicPr>
+          <p:nvPr/>
+        </p:nvPicPr>
+        <p:blipFill>
+          <a:blip r:embed="rId3">
+            <a:extLst>
+              <a:ext uri="{96DAC541-7B7A-43D3-8B79-37D633B846F1}">
+                <asvg:svgBlip xmlns:asvg="http://schemas.microsoft.com/office/drawing/2016/SVG/main" r:embed="rId4"/>
+              </a:ext>
+            </a:extLst>
+          </a:blip>
+          <a:stretch>
+            <a:fillRect/>
+          </a:stretch>
+        </p:blipFill>
+        <p:spPr>
+          <a:xfrm>
+            <a:off x="5045006" y="6356057"/>
+            <a:ext cx="6409575" cy="363174"/>
+          </a:xfrm>
+          <a:prstGeom prst="rect">
+            <a:avLst/>
+          </a:prstGeom>
+        </p:spPr>
+      </p:pic>
+      <p:sp>
+        <p:nvSpPr>
+          <p:cNvPr id="84" name="Marcador de número de diapositiva 83">
+            <a:extLst>
+              <a:ext uri="{FF2B5EF4-FFF2-40B4-BE49-F238E27FC236}">
+                <a16:creationId xmlns:a16="http://schemas.microsoft.com/office/drawing/2014/main" id="{859A2540-058D-F57C-A2C2-B9A17E34F865}"/>
+              </a:ext>
+            </a:extLst>
+          </p:cNvPr>
+          <p:cNvSpPr>
+            <a:spLocks noGrp="1"/>
+          </p:cNvSpPr>
+          <p:nvPr>
+            <p:ph type="sldNum" sz="quarter" idx="7"/>
+          </p:nvPr>
+        </p:nvSpPr>
+        <p:spPr/>
+        <p:txBody>
+          <a:bodyPr/>
+          <a:lstStyle/>
+          <a:p>
+            <a:fld id="{B6F15528-21DE-4FAA-801E-634DDDAF4B2B}" type="slidenum">
+              <a:rPr lang="es-ES" smtClean="0"/>
+              <a:t>11</a:t>
+            </a:fld>
+            <a:endParaRPr lang="es-ES"/>
+          </a:p>
+        </p:txBody>
+      </p:sp>
+      <p:sp>
+        <p:nvSpPr>
+          <p:cNvPr id="3" name="Marcador de pie de página 2">
+            <a:extLst>
+              <a:ext uri="{FF2B5EF4-FFF2-40B4-BE49-F238E27FC236}">
+                <a16:creationId xmlns:a16="http://schemas.microsoft.com/office/drawing/2014/main" id="{B4902674-FF7E-F050-6B20-D56854906AA9}"/>
+              </a:ext>
+            </a:extLst>
+          </p:cNvPr>
+          <p:cNvSpPr>
+            <a:spLocks noGrp="1"/>
+          </p:cNvSpPr>
+          <p:nvPr>
+            <p:ph type="ftr" sz="quarter" idx="5"/>
+          </p:nvPr>
+        </p:nvSpPr>
+        <p:spPr/>
+        <p:txBody>
+          <a:bodyPr/>
+          <a:lstStyle/>
+          <a:p>
+            <a:pPr marL="12700">
+              <a:spcBef>
+                <a:spcPts val="15"/>
+              </a:spcBef>
+            </a:pPr>
+            <a:r>
+              <a:rPr lang="es-ES" spc="-5"/>
+              <a:t>LAB 0.2. COUPLERS</a:t>
+            </a:r>
+            <a:endParaRPr lang="es-ES" spc="-5" dirty="0"/>
+          </a:p>
+        </p:txBody>
+      </p:sp>
+      <p:sp>
+        <p:nvSpPr>
+          <p:cNvPr id="4" name="Marcador de texto 2">
+            <a:extLst>
+              <a:ext uri="{FF2B5EF4-FFF2-40B4-BE49-F238E27FC236}">
+                <a16:creationId xmlns:a16="http://schemas.microsoft.com/office/drawing/2014/main" id="{31B9BE38-81B3-8F74-EBA3-2D16488A0F3D}"/>
+              </a:ext>
+            </a:extLst>
+          </p:cNvPr>
+          <p:cNvSpPr txBox="1">
+            <a:spLocks/>
+          </p:cNvSpPr>
+          <p:nvPr/>
+        </p:nvSpPr>
+        <p:spPr>
+          <a:xfrm>
+            <a:off x="608012" y="1295400"/>
+            <a:ext cx="11048999" cy="4958137"/>
+          </a:xfrm>
+          <a:prstGeom prst="rect">
+            <a:avLst/>
+          </a:prstGeom>
+        </p:spPr>
+        <p:txBody>
+          <a:bodyPr>
+            <a:normAutofit/>
+          </a:bodyPr>
+          <a:lstStyle>
+            <a:lvl1pPr marL="0">
+              <a:defRPr>
+                <a:latin typeface="+mn-lt"/>
+                <a:ea typeface="+mn-ea"/>
+                <a:cs typeface="+mn-cs"/>
+              </a:defRPr>
+            </a:lvl1pPr>
+            <a:lvl2pPr marL="457200">
+              <a:defRPr>
+                <a:latin typeface="+mn-lt"/>
+                <a:ea typeface="+mn-ea"/>
+                <a:cs typeface="+mn-cs"/>
+              </a:defRPr>
+            </a:lvl2pPr>
+            <a:lvl3pPr marL="914400">
+              <a:defRPr>
+                <a:latin typeface="+mn-lt"/>
+                <a:ea typeface="+mn-ea"/>
+                <a:cs typeface="+mn-cs"/>
+              </a:defRPr>
+            </a:lvl3pPr>
+            <a:lvl4pPr marL="1371600">
+              <a:defRPr>
+                <a:latin typeface="+mn-lt"/>
+                <a:ea typeface="+mn-ea"/>
+                <a:cs typeface="+mn-cs"/>
+              </a:defRPr>
+            </a:lvl4pPr>
+            <a:lvl5pPr marL="1828800">
+              <a:defRPr>
+                <a:latin typeface="+mn-lt"/>
+                <a:ea typeface="+mn-ea"/>
+                <a:cs typeface="+mn-cs"/>
+              </a:defRPr>
+            </a:lvl5pPr>
+            <a:lvl6pPr marL="2286000">
+              <a:defRPr>
+                <a:latin typeface="+mn-lt"/>
+                <a:ea typeface="+mn-ea"/>
+                <a:cs typeface="+mn-cs"/>
+              </a:defRPr>
+            </a:lvl6pPr>
+            <a:lvl7pPr marL="2743200">
+              <a:defRPr>
+                <a:latin typeface="+mn-lt"/>
+                <a:ea typeface="+mn-ea"/>
+                <a:cs typeface="+mn-cs"/>
+              </a:defRPr>
+            </a:lvl7pPr>
+            <a:lvl8pPr marL="3200400">
+              <a:defRPr>
+                <a:latin typeface="+mn-lt"/>
+                <a:ea typeface="+mn-ea"/>
+                <a:cs typeface="+mn-cs"/>
+              </a:defRPr>
+            </a:lvl8pPr>
+            <a:lvl9pPr marL="3657600">
+              <a:defRPr>
+                <a:latin typeface="+mn-lt"/>
+                <a:ea typeface="+mn-ea"/>
+                <a:cs typeface="+mn-cs"/>
+              </a:defRPr>
+            </a:lvl9pPr>
+          </a:lstStyle>
+          <a:p>
+            <a:pPr algn="just"/>
+            <a:endParaRPr lang="en-US" sz="2000" b="1" i="1" u="sng" dirty="0"/>
+          </a:p>
+          <a:p>
+            <a:pPr algn="just"/>
+            <a:endParaRPr lang="en-US" sz="2000" kern="0" dirty="0">
+              <a:solidFill>
+                <a:sysClr val="windowText" lastClr="000000"/>
+              </a:solidFill>
+            </a:endParaRPr>
+          </a:p>
+        </p:txBody>
+      </p:sp>
+      <p:sp>
+        <p:nvSpPr>
+          <p:cNvPr id="2" name="CuadroTexto 1">
+            <a:extLst>
+              <a:ext uri="{FF2B5EF4-FFF2-40B4-BE49-F238E27FC236}">
+                <a16:creationId xmlns:a16="http://schemas.microsoft.com/office/drawing/2014/main" id="{AA84280D-068F-A002-ADF9-6B048D49759C}"/>
+              </a:ext>
+            </a:extLst>
+          </p:cNvPr>
+          <p:cNvSpPr txBox="1"/>
+          <p:nvPr/>
+        </p:nvSpPr>
+        <p:spPr>
+          <a:xfrm>
+            <a:off x="608012" y="4903378"/>
+            <a:ext cx="11199971" cy="1938992"/>
+          </a:xfrm>
+          <a:prstGeom prst="rect">
+            <a:avLst/>
+          </a:prstGeom>
+          <a:solidFill>
+            <a:schemeClr val="bg1">
+              <a:lumMod val="95000"/>
+            </a:schemeClr>
+          </a:solidFill>
+          <a:ln w="28575">
+            <a:solidFill>
+              <a:srgbClr val="E0700D"/>
+            </a:solidFill>
+          </a:ln>
+        </p:spPr>
+        <p:txBody>
+          <a:bodyPr wrap="square" rtlCol="0">
+            <a:spAutoFit/>
+          </a:bodyPr>
+          <a:lstStyle/>
+          <a:p>
+            <a:pPr algn="just"/>
+            <a:r>
+              <a:rPr lang="en-US" sz="1200" dirty="0">
+                <a:latin typeface="Arial" panose="020B0604020202020204" pitchFamily="34" charset="0"/>
+                <a:cs typeface="Arial" panose="020B0604020202020204" pitchFamily="34" charset="0"/>
+              </a:rPr>
+              <a:t>Los MMI se </a:t>
+            </a:r>
+            <a:r>
+              <a:rPr lang="en-US" sz="1200" dirty="0" err="1">
+                <a:latin typeface="Arial" panose="020B0604020202020204" pitchFamily="34" charset="0"/>
+                <a:cs typeface="Arial" panose="020B0604020202020204" pitchFamily="34" charset="0"/>
+              </a:rPr>
+              <a:t>caracterizan</a:t>
+            </a:r>
+            <a:r>
+              <a:rPr lang="en-US" sz="1200" dirty="0">
+                <a:latin typeface="Arial" panose="020B0604020202020204" pitchFamily="34" charset="0"/>
+                <a:cs typeface="Arial" panose="020B0604020202020204" pitchFamily="34" charset="0"/>
+              </a:rPr>
+              <a:t> </a:t>
+            </a:r>
+            <a:r>
+              <a:rPr lang="en-US" sz="1200" dirty="0" err="1">
+                <a:latin typeface="Arial" panose="020B0604020202020204" pitchFamily="34" charset="0"/>
+                <a:cs typeface="Arial" panose="020B0604020202020204" pitchFamily="34" charset="0"/>
+              </a:rPr>
+              <a:t>por</a:t>
+            </a:r>
+            <a:r>
+              <a:rPr lang="en-US" sz="1200" dirty="0">
+                <a:latin typeface="Arial" panose="020B0604020202020204" pitchFamily="34" charset="0"/>
+                <a:cs typeface="Arial" panose="020B0604020202020204" pitchFamily="34" charset="0"/>
+              </a:rPr>
+              <a:t> la replica de </a:t>
+            </a:r>
+            <a:r>
+              <a:rPr lang="en-US" sz="1200" dirty="0" err="1">
+                <a:latin typeface="Arial" panose="020B0604020202020204" pitchFamily="34" charset="0"/>
+                <a:cs typeface="Arial" panose="020B0604020202020204" pitchFamily="34" charset="0"/>
+              </a:rPr>
+              <a:t>autoimágenes</a:t>
+            </a:r>
+            <a:r>
+              <a:rPr lang="en-US" sz="1200" dirty="0">
+                <a:latin typeface="Arial" panose="020B0604020202020204" pitchFamily="34" charset="0"/>
+                <a:cs typeface="Arial" panose="020B0604020202020204" pitchFamily="34" charset="0"/>
+              </a:rPr>
+              <a:t> </a:t>
+            </a:r>
+            <a:r>
+              <a:rPr lang="en-US" sz="1200" dirty="0" err="1">
+                <a:latin typeface="Arial" panose="020B0604020202020204" pitchFamily="34" charset="0"/>
+                <a:cs typeface="Arial" panose="020B0604020202020204" pitchFamily="34" charset="0"/>
+              </a:rPr>
+              <a:t>por</a:t>
+            </a:r>
+            <a:r>
+              <a:rPr lang="en-US" sz="1200" dirty="0">
+                <a:latin typeface="Arial" panose="020B0604020202020204" pitchFamily="34" charset="0"/>
+                <a:cs typeface="Arial" panose="020B0604020202020204" pitchFamily="34" charset="0"/>
+              </a:rPr>
+              <a:t> medio de la </a:t>
+            </a:r>
+            <a:r>
+              <a:rPr lang="en-US" sz="1200" dirty="0" err="1">
+                <a:latin typeface="Arial" panose="020B0604020202020204" pitchFamily="34" charset="0"/>
+                <a:cs typeface="Arial" panose="020B0604020202020204" pitchFamily="34" charset="0"/>
+              </a:rPr>
+              <a:t>interferencia</a:t>
+            </a:r>
+            <a:r>
+              <a:rPr lang="en-US" sz="1200" dirty="0">
+                <a:latin typeface="Arial" panose="020B0604020202020204" pitchFamily="34" charset="0"/>
+                <a:cs typeface="Arial" panose="020B0604020202020204" pitchFamily="34" charset="0"/>
+              </a:rPr>
+              <a:t> entre </a:t>
+            </a:r>
+            <a:r>
+              <a:rPr lang="en-US" sz="1200" dirty="0" err="1">
+                <a:latin typeface="Arial" panose="020B0604020202020204" pitchFamily="34" charset="0"/>
+                <a:cs typeface="Arial" panose="020B0604020202020204" pitchFamily="34" charset="0"/>
+              </a:rPr>
+              <a:t>los</a:t>
+            </a:r>
+            <a:r>
+              <a:rPr lang="en-US" sz="1200" dirty="0">
+                <a:latin typeface="Arial" panose="020B0604020202020204" pitchFamily="34" charset="0"/>
+                <a:cs typeface="Arial" panose="020B0604020202020204" pitchFamily="34" charset="0"/>
+              </a:rPr>
+              <a:t> </a:t>
+            </a:r>
+            <a:r>
+              <a:rPr lang="en-US" sz="1200" dirty="0" err="1">
+                <a:latin typeface="Arial" panose="020B0604020202020204" pitchFamily="34" charset="0"/>
+                <a:cs typeface="Arial" panose="020B0604020202020204" pitchFamily="34" charset="0"/>
+              </a:rPr>
+              <a:t>modos</a:t>
+            </a:r>
+            <a:r>
+              <a:rPr lang="en-US" sz="1200" dirty="0">
+                <a:latin typeface="Arial" panose="020B0604020202020204" pitchFamily="34" charset="0"/>
+                <a:cs typeface="Arial" panose="020B0604020202020204" pitchFamily="34" charset="0"/>
+              </a:rPr>
+              <a:t>. Al ser de gran </a:t>
+            </a:r>
+            <a:r>
+              <a:rPr lang="en-US" sz="1200" dirty="0" err="1">
+                <a:latin typeface="Arial" panose="020B0604020202020204" pitchFamily="34" charset="0"/>
+                <a:cs typeface="Arial" panose="020B0604020202020204" pitchFamily="34" charset="0"/>
+              </a:rPr>
+              <a:t>tamaño</a:t>
+            </a:r>
+            <a:r>
+              <a:rPr lang="en-US" sz="1200" dirty="0">
+                <a:latin typeface="Arial" panose="020B0604020202020204" pitchFamily="34" charset="0"/>
+                <a:cs typeface="Arial" panose="020B0604020202020204" pitchFamily="34" charset="0"/>
+              </a:rPr>
+              <a:t> se </a:t>
+            </a:r>
+            <a:r>
+              <a:rPr lang="en-US" sz="1200" dirty="0" err="1">
+                <a:latin typeface="Arial" panose="020B0604020202020204" pitchFamily="34" charset="0"/>
+                <a:cs typeface="Arial" panose="020B0604020202020204" pitchFamily="34" charset="0"/>
+              </a:rPr>
+              <a:t>propagan</a:t>
+            </a:r>
+            <a:r>
+              <a:rPr lang="en-US" sz="1200" dirty="0">
+                <a:latin typeface="Arial" panose="020B0604020202020204" pitchFamily="34" charset="0"/>
+                <a:cs typeface="Arial" panose="020B0604020202020204" pitchFamily="34" charset="0"/>
+              </a:rPr>
+              <a:t> </a:t>
+            </a:r>
+            <a:r>
+              <a:rPr lang="en-US" sz="1200" dirty="0" err="1">
+                <a:latin typeface="Arial" panose="020B0604020202020204" pitchFamily="34" charset="0"/>
+                <a:cs typeface="Arial" panose="020B0604020202020204" pitchFamily="34" charset="0"/>
+              </a:rPr>
+              <a:t>una</a:t>
+            </a:r>
+            <a:r>
+              <a:rPr lang="en-US" sz="1200" dirty="0">
+                <a:latin typeface="Arial" panose="020B0604020202020204" pitchFamily="34" charset="0"/>
+                <a:cs typeface="Arial" panose="020B0604020202020204" pitchFamily="34" charset="0"/>
+              </a:rPr>
+              <a:t> gran </a:t>
+            </a:r>
+            <a:r>
+              <a:rPr lang="en-US" sz="1200" dirty="0" err="1">
+                <a:latin typeface="Arial" panose="020B0604020202020204" pitchFamily="34" charset="0"/>
+                <a:cs typeface="Arial" panose="020B0604020202020204" pitchFamily="34" charset="0"/>
+              </a:rPr>
+              <a:t>cantidad</a:t>
+            </a:r>
+            <a:r>
+              <a:rPr lang="en-US" sz="1200" dirty="0">
+                <a:latin typeface="Arial" panose="020B0604020202020204" pitchFamily="34" charset="0"/>
+                <a:cs typeface="Arial" panose="020B0604020202020204" pitchFamily="34" charset="0"/>
+              </a:rPr>
+              <a:t> de </a:t>
+            </a:r>
+            <a:r>
+              <a:rPr lang="en-US" sz="1200" dirty="0" err="1">
+                <a:latin typeface="Arial" panose="020B0604020202020204" pitchFamily="34" charset="0"/>
+                <a:cs typeface="Arial" panose="020B0604020202020204" pitchFamily="34" charset="0"/>
+              </a:rPr>
+              <a:t>modos</a:t>
+            </a:r>
+            <a:r>
+              <a:rPr lang="en-US" sz="1200" dirty="0">
+                <a:latin typeface="Arial" panose="020B0604020202020204" pitchFamily="34" charset="0"/>
+                <a:cs typeface="Arial" panose="020B0604020202020204" pitchFamily="34" charset="0"/>
+              </a:rPr>
+              <a:t>. Las </a:t>
+            </a:r>
+            <a:r>
+              <a:rPr lang="en-US" sz="1200" dirty="0" err="1">
+                <a:latin typeface="Arial" panose="020B0604020202020204" pitchFamily="34" charset="0"/>
+                <a:cs typeface="Arial" panose="020B0604020202020204" pitchFamily="34" charset="0"/>
+              </a:rPr>
+              <a:t>imágenes</a:t>
+            </a:r>
+            <a:r>
+              <a:rPr lang="en-US" sz="1200" dirty="0">
+                <a:latin typeface="Arial" panose="020B0604020202020204" pitchFamily="34" charset="0"/>
+                <a:cs typeface="Arial" panose="020B0604020202020204" pitchFamily="34" charset="0"/>
+              </a:rPr>
+              <a:t> </a:t>
+            </a:r>
+            <a:r>
+              <a:rPr lang="en-US" sz="1200" dirty="0" err="1">
+                <a:latin typeface="Arial" panose="020B0604020202020204" pitchFamily="34" charset="0"/>
+                <a:cs typeface="Arial" panose="020B0604020202020204" pitchFamily="34" charset="0"/>
+              </a:rPr>
+              <a:t>correspondientes</a:t>
+            </a:r>
+            <a:r>
+              <a:rPr lang="en-US" sz="1200" dirty="0">
+                <a:latin typeface="Arial" panose="020B0604020202020204" pitchFamily="34" charset="0"/>
+                <a:cs typeface="Arial" panose="020B0604020202020204" pitchFamily="34" charset="0"/>
+              </a:rPr>
+              <a:t> a </a:t>
+            </a:r>
+            <a:r>
+              <a:rPr lang="en-US" sz="1200" dirty="0" err="1">
+                <a:latin typeface="Arial" panose="020B0604020202020204" pitchFamily="34" charset="0"/>
+                <a:cs typeface="Arial" panose="020B0604020202020204" pitchFamily="34" charset="0"/>
+              </a:rPr>
+              <a:t>modos</a:t>
+            </a:r>
+            <a:r>
+              <a:rPr lang="en-US" sz="1200" dirty="0">
+                <a:latin typeface="Arial" panose="020B0604020202020204" pitchFamily="34" charset="0"/>
+                <a:cs typeface="Arial" panose="020B0604020202020204" pitchFamily="34" charset="0"/>
+              </a:rPr>
+              <a:t> TE, </a:t>
+            </a:r>
+            <a:r>
+              <a:rPr lang="en-US" sz="1200" dirty="0" err="1">
+                <a:latin typeface="Arial" panose="020B0604020202020204" pitchFamily="34" charset="0"/>
+                <a:cs typeface="Arial" panose="020B0604020202020204" pitchFamily="34" charset="0"/>
+              </a:rPr>
+              <a:t>correspondientes</a:t>
+            </a:r>
+            <a:r>
+              <a:rPr lang="en-US" sz="1200" dirty="0">
+                <a:latin typeface="Arial" panose="020B0604020202020204" pitchFamily="34" charset="0"/>
+                <a:cs typeface="Arial" panose="020B0604020202020204" pitchFamily="34" charset="0"/>
+              </a:rPr>
+              <a:t> a al </a:t>
+            </a:r>
+            <a:r>
+              <a:rPr lang="en-US" sz="1200" dirty="0" err="1">
+                <a:latin typeface="Arial" panose="020B0604020202020204" pitchFamily="34" charset="0"/>
+                <a:cs typeface="Arial" panose="020B0604020202020204" pitchFamily="34" charset="0"/>
+              </a:rPr>
+              <a:t>índice</a:t>
+            </a:r>
+            <a:r>
+              <a:rPr lang="en-US" sz="1200" dirty="0">
+                <a:latin typeface="Arial" panose="020B0604020202020204" pitchFamily="34" charset="0"/>
+                <a:cs typeface="Arial" panose="020B0604020202020204" pitchFamily="34" charset="0"/>
+              </a:rPr>
+              <a:t> 0,1 y </a:t>
+            </a:r>
+            <a:r>
+              <a:rPr lang="en-US" sz="1200" dirty="0" err="1">
+                <a:latin typeface="Arial" panose="020B0604020202020204" pitchFamily="34" charset="0"/>
+                <a:cs typeface="Arial" panose="020B0604020202020204" pitchFamily="34" charset="0"/>
+              </a:rPr>
+              <a:t>nos</a:t>
+            </a:r>
+            <a:r>
+              <a:rPr lang="en-US" sz="1200" dirty="0">
+                <a:latin typeface="Arial" panose="020B0604020202020204" pitchFamily="34" charset="0"/>
+                <a:cs typeface="Arial" panose="020B0604020202020204" pitchFamily="34" charset="0"/>
+              </a:rPr>
+              <a:t> </a:t>
+            </a:r>
+            <a:r>
+              <a:rPr lang="en-US" sz="1200" dirty="0" err="1">
+                <a:latin typeface="Arial" panose="020B0604020202020204" pitchFamily="34" charset="0"/>
+                <a:cs typeface="Arial" panose="020B0604020202020204" pitchFamily="34" charset="0"/>
+              </a:rPr>
+              <a:t>ayuda</a:t>
+            </a:r>
+            <a:r>
+              <a:rPr lang="en-US" sz="1200" dirty="0">
+                <a:latin typeface="Arial" panose="020B0604020202020204" pitchFamily="34" charset="0"/>
+                <a:cs typeface="Arial" panose="020B0604020202020204" pitchFamily="34" charset="0"/>
+              </a:rPr>
+              <a:t> a </a:t>
+            </a:r>
+            <a:r>
+              <a:rPr lang="en-US" sz="1200" dirty="0" err="1">
+                <a:latin typeface="Arial" panose="020B0604020202020204" pitchFamily="34" charset="0"/>
+                <a:cs typeface="Arial" panose="020B0604020202020204" pitchFamily="34" charset="0"/>
+              </a:rPr>
+              <a:t>comprender</a:t>
+            </a:r>
+            <a:r>
+              <a:rPr lang="en-US" sz="1200" dirty="0">
+                <a:latin typeface="Arial" panose="020B0604020202020204" pitchFamily="34" charset="0"/>
+                <a:cs typeface="Arial" panose="020B0604020202020204" pitchFamily="34" charset="0"/>
+              </a:rPr>
+              <a:t> a </a:t>
+            </a:r>
+            <a:r>
+              <a:rPr lang="en-US" sz="1200" dirty="0" err="1">
+                <a:latin typeface="Arial" panose="020B0604020202020204" pitchFamily="34" charset="0"/>
+                <a:cs typeface="Arial" panose="020B0604020202020204" pitchFamily="34" charset="0"/>
+              </a:rPr>
+              <a:t>primera</a:t>
+            </a:r>
+            <a:r>
+              <a:rPr lang="en-US" sz="1200" dirty="0">
+                <a:latin typeface="Arial" panose="020B0604020202020204" pitchFamily="34" charset="0"/>
+                <a:cs typeface="Arial" panose="020B0604020202020204" pitchFamily="34" charset="0"/>
+              </a:rPr>
+              <a:t> vista la </a:t>
+            </a:r>
+            <a:r>
+              <a:rPr lang="en-US" sz="1200" dirty="0" err="1">
+                <a:latin typeface="Arial" panose="020B0604020202020204" pitchFamily="34" charset="0"/>
+                <a:cs typeface="Arial" panose="020B0604020202020204" pitchFamily="34" charset="0"/>
+              </a:rPr>
+              <a:t>cantidad</a:t>
+            </a:r>
+            <a:r>
+              <a:rPr lang="en-US" sz="1200" dirty="0">
+                <a:latin typeface="Arial" panose="020B0604020202020204" pitchFamily="34" charset="0"/>
+                <a:cs typeface="Arial" panose="020B0604020202020204" pitchFamily="34" charset="0"/>
+              </a:rPr>
+              <a:t> de </a:t>
+            </a:r>
+            <a:r>
+              <a:rPr lang="en-US" sz="1200" dirty="0" err="1">
+                <a:latin typeface="Arial" panose="020B0604020202020204" pitchFamily="34" charset="0"/>
+                <a:cs typeface="Arial" panose="020B0604020202020204" pitchFamily="34" charset="0"/>
+              </a:rPr>
+              <a:t>modos</a:t>
+            </a:r>
+            <a:r>
+              <a:rPr lang="en-US" sz="1200" dirty="0">
+                <a:latin typeface="Arial" panose="020B0604020202020204" pitchFamily="34" charset="0"/>
+                <a:cs typeface="Arial" panose="020B0604020202020204" pitchFamily="34" charset="0"/>
+              </a:rPr>
+              <a:t> </a:t>
+            </a:r>
+            <a:r>
+              <a:rPr lang="en-US" sz="1200" dirty="0" err="1">
+                <a:latin typeface="Arial" panose="020B0604020202020204" pitchFamily="34" charset="0"/>
+                <a:cs typeface="Arial" panose="020B0604020202020204" pitchFamily="34" charset="0"/>
+              </a:rPr>
+              <a:t>que</a:t>
+            </a:r>
+            <a:r>
+              <a:rPr lang="en-US" sz="1200" dirty="0">
+                <a:latin typeface="Arial" panose="020B0604020202020204" pitchFamily="34" charset="0"/>
+                <a:cs typeface="Arial" panose="020B0604020202020204" pitchFamily="34" charset="0"/>
+              </a:rPr>
+              <a:t> </a:t>
+            </a:r>
+            <a:r>
+              <a:rPr lang="en-US" sz="1200" dirty="0" err="1">
+                <a:latin typeface="Arial" panose="020B0604020202020204" pitchFamily="34" charset="0"/>
+                <a:cs typeface="Arial" panose="020B0604020202020204" pitchFamily="34" charset="0"/>
+              </a:rPr>
+              <a:t>puede</a:t>
+            </a:r>
+            <a:r>
+              <a:rPr lang="en-US" sz="1200" dirty="0">
+                <a:latin typeface="Arial" panose="020B0604020202020204" pitchFamily="34" charset="0"/>
+                <a:cs typeface="Arial" panose="020B0604020202020204" pitchFamily="34" charset="0"/>
+              </a:rPr>
+              <a:t> </a:t>
+            </a:r>
+            <a:r>
+              <a:rPr lang="en-US" sz="1200" dirty="0" err="1">
+                <a:latin typeface="Arial" panose="020B0604020202020204" pitchFamily="34" charset="0"/>
+                <a:cs typeface="Arial" panose="020B0604020202020204" pitchFamily="34" charset="0"/>
+              </a:rPr>
+              <a:t>contener</a:t>
+            </a:r>
+            <a:r>
+              <a:rPr lang="en-US" sz="1200" dirty="0">
+                <a:latin typeface="Arial" panose="020B0604020202020204" pitchFamily="34" charset="0"/>
+                <a:cs typeface="Arial" panose="020B0604020202020204" pitchFamily="34" charset="0"/>
+              </a:rPr>
+              <a:t>. De </a:t>
+            </a:r>
+            <a:r>
+              <a:rPr lang="en-US" sz="1200" dirty="0" err="1">
+                <a:latin typeface="Arial" panose="020B0604020202020204" pitchFamily="34" charset="0"/>
+                <a:cs typeface="Arial" panose="020B0604020202020204" pitchFamily="34" charset="0"/>
+              </a:rPr>
+              <a:t>hecho</a:t>
+            </a:r>
+            <a:r>
+              <a:rPr lang="en-US" sz="1200" dirty="0">
+                <a:latin typeface="Arial" panose="020B0604020202020204" pitchFamily="34" charset="0"/>
+                <a:cs typeface="Arial" panose="020B0604020202020204" pitchFamily="34" charset="0"/>
+              </a:rPr>
+              <a:t> </a:t>
+            </a:r>
+            <a:r>
+              <a:rPr lang="en-US" sz="1200" dirty="0" err="1">
+                <a:latin typeface="Arial" panose="020B0604020202020204" pitchFamily="34" charset="0"/>
+                <a:cs typeface="Arial" panose="020B0604020202020204" pitchFamily="34" charset="0"/>
+              </a:rPr>
+              <a:t>en</a:t>
+            </a:r>
+            <a:r>
+              <a:rPr lang="en-US" sz="1200" dirty="0">
+                <a:latin typeface="Arial" panose="020B0604020202020204" pitchFamily="34" charset="0"/>
+                <a:cs typeface="Arial" panose="020B0604020202020204" pitchFamily="34" charset="0"/>
+              </a:rPr>
+              <a:t> la </a:t>
+            </a:r>
+            <a:r>
+              <a:rPr lang="en-US" sz="1200" dirty="0" err="1">
+                <a:latin typeface="Arial" panose="020B0604020202020204" pitchFamily="34" charset="0"/>
+                <a:cs typeface="Arial" panose="020B0604020202020204" pitchFamily="34" charset="0"/>
+              </a:rPr>
+              <a:t>siguiente</a:t>
+            </a:r>
+            <a:r>
+              <a:rPr lang="en-US" sz="1200" dirty="0">
+                <a:latin typeface="Arial" panose="020B0604020202020204" pitchFamily="34" charset="0"/>
+                <a:cs typeface="Arial" panose="020B0604020202020204" pitchFamily="34" charset="0"/>
+              </a:rPr>
+              <a:t> </a:t>
+            </a:r>
+            <a:r>
+              <a:rPr lang="en-US" sz="1200" dirty="0" err="1">
+                <a:latin typeface="Arial" panose="020B0604020202020204" pitchFamily="34" charset="0"/>
+                <a:cs typeface="Arial" panose="020B0604020202020204" pitchFamily="34" charset="0"/>
+              </a:rPr>
+              <a:t>diapositiva</a:t>
+            </a:r>
+            <a:r>
+              <a:rPr lang="en-US" sz="1200" dirty="0">
+                <a:latin typeface="Arial" panose="020B0604020202020204" pitchFamily="34" charset="0"/>
+                <a:cs typeface="Arial" panose="020B0604020202020204" pitchFamily="34" charset="0"/>
+              </a:rPr>
+              <a:t>, se </a:t>
+            </a:r>
+            <a:r>
+              <a:rPr lang="en-US" sz="1200" dirty="0" err="1">
+                <a:latin typeface="Arial" panose="020B0604020202020204" pitchFamily="34" charset="0"/>
+                <a:cs typeface="Arial" panose="020B0604020202020204" pitchFamily="34" charset="0"/>
+              </a:rPr>
+              <a:t>muestra</a:t>
+            </a:r>
+            <a:r>
+              <a:rPr lang="en-US" sz="1200" dirty="0">
+                <a:latin typeface="Arial" panose="020B0604020202020204" pitchFamily="34" charset="0"/>
+                <a:cs typeface="Arial" panose="020B0604020202020204" pitchFamily="34" charset="0"/>
+              </a:rPr>
+              <a:t> la </a:t>
+            </a:r>
+            <a:r>
+              <a:rPr lang="en-US" sz="1200" dirty="0" err="1">
+                <a:latin typeface="Arial" panose="020B0604020202020204" pitchFamily="34" charset="0"/>
+                <a:cs typeface="Arial" panose="020B0604020202020204" pitchFamily="34" charset="0"/>
+              </a:rPr>
+              <a:t>cantidad</a:t>
+            </a:r>
+            <a:r>
+              <a:rPr lang="en-US" sz="1200" dirty="0">
+                <a:latin typeface="Arial" panose="020B0604020202020204" pitchFamily="34" charset="0"/>
+                <a:cs typeface="Arial" panose="020B0604020202020204" pitchFamily="34" charset="0"/>
+              </a:rPr>
+              <a:t> de </a:t>
+            </a:r>
+            <a:r>
+              <a:rPr lang="en-US" sz="1200" dirty="0" err="1">
+                <a:latin typeface="Arial" panose="020B0604020202020204" pitchFamily="34" charset="0"/>
+                <a:cs typeface="Arial" panose="020B0604020202020204" pitchFamily="34" charset="0"/>
+              </a:rPr>
+              <a:t>modos</a:t>
+            </a:r>
+            <a:r>
+              <a:rPr lang="en-US" sz="1200" dirty="0">
+                <a:latin typeface="Arial" panose="020B0604020202020204" pitchFamily="34" charset="0"/>
+                <a:cs typeface="Arial" panose="020B0604020202020204" pitchFamily="34" charset="0"/>
+              </a:rPr>
+              <a:t> </a:t>
+            </a:r>
+            <a:r>
+              <a:rPr lang="en-US" sz="1200" dirty="0" err="1">
+                <a:latin typeface="Arial" panose="020B0604020202020204" pitchFamily="34" charset="0"/>
+                <a:cs typeface="Arial" panose="020B0604020202020204" pitchFamily="34" charset="0"/>
+              </a:rPr>
+              <a:t>totales</a:t>
+            </a:r>
+            <a:r>
+              <a:rPr lang="en-US" sz="1200" dirty="0">
+                <a:latin typeface="Arial" panose="020B0604020202020204" pitchFamily="34" charset="0"/>
+                <a:cs typeface="Arial" panose="020B0604020202020204" pitchFamily="34" charset="0"/>
+              </a:rPr>
+              <a:t>, </a:t>
+            </a:r>
+            <a:r>
+              <a:rPr lang="en-US" sz="1200" dirty="0" err="1">
+                <a:latin typeface="Arial" panose="020B0604020202020204" pitchFamily="34" charset="0"/>
+                <a:cs typeface="Arial" panose="020B0604020202020204" pitchFamily="34" charset="0"/>
+              </a:rPr>
+              <a:t>que</a:t>
+            </a:r>
+            <a:r>
+              <a:rPr lang="en-US" sz="1200" dirty="0">
+                <a:latin typeface="Arial" panose="020B0604020202020204" pitchFamily="34" charset="0"/>
+                <a:cs typeface="Arial" panose="020B0604020202020204" pitchFamily="34" charset="0"/>
+              </a:rPr>
+              <a:t> son </a:t>
+            </a:r>
+            <a:r>
+              <a:rPr lang="en-US" sz="1200" dirty="0" err="1">
+                <a:latin typeface="Arial" panose="020B0604020202020204" pitchFamily="34" charset="0"/>
+                <a:cs typeface="Arial" panose="020B0604020202020204" pitchFamily="34" charset="0"/>
+              </a:rPr>
+              <a:t>todos</a:t>
+            </a:r>
+            <a:r>
+              <a:rPr lang="en-US" sz="1200" dirty="0">
+                <a:latin typeface="Arial" panose="020B0604020202020204" pitchFamily="34" charset="0"/>
+                <a:cs typeface="Arial" panose="020B0604020202020204" pitchFamily="34" charset="0"/>
+              </a:rPr>
+              <a:t> </a:t>
+            </a:r>
+            <a:r>
+              <a:rPr lang="en-US" sz="1200" dirty="0" err="1">
+                <a:latin typeface="Arial" panose="020B0604020202020204" pitchFamily="34" charset="0"/>
+                <a:cs typeface="Arial" panose="020B0604020202020204" pitchFamily="34" charset="0"/>
+              </a:rPr>
+              <a:t>aquellos</a:t>
+            </a:r>
+            <a:r>
+              <a:rPr lang="en-US" sz="1200" dirty="0">
+                <a:latin typeface="Arial" panose="020B0604020202020204" pitchFamily="34" charset="0"/>
+                <a:cs typeface="Arial" panose="020B0604020202020204" pitchFamily="34" charset="0"/>
+              </a:rPr>
+              <a:t> </a:t>
+            </a:r>
+            <a:r>
+              <a:rPr lang="en-US" sz="1200" dirty="0" err="1">
+                <a:latin typeface="Arial" panose="020B0604020202020204" pitchFamily="34" charset="0"/>
+                <a:cs typeface="Arial" panose="020B0604020202020204" pitchFamily="34" charset="0"/>
+              </a:rPr>
+              <a:t>que</a:t>
+            </a:r>
+            <a:r>
+              <a:rPr lang="en-US" sz="1200" dirty="0">
+                <a:latin typeface="Arial" panose="020B0604020202020204" pitchFamily="34" charset="0"/>
+                <a:cs typeface="Arial" panose="020B0604020202020204" pitchFamily="34" charset="0"/>
+              </a:rPr>
+              <a:t> </a:t>
+            </a:r>
+            <a:r>
+              <a:rPr lang="en-US" sz="1200" dirty="0" err="1">
+                <a:latin typeface="Arial" panose="020B0604020202020204" pitchFamily="34" charset="0"/>
+                <a:cs typeface="Arial" panose="020B0604020202020204" pitchFamily="34" charset="0"/>
+              </a:rPr>
+              <a:t>tengan</a:t>
+            </a:r>
+            <a:r>
+              <a:rPr lang="en-US" sz="1200" dirty="0">
+                <a:latin typeface="Arial" panose="020B0604020202020204" pitchFamily="34" charset="0"/>
+                <a:cs typeface="Arial" panose="020B0604020202020204" pitchFamily="34" charset="0"/>
+              </a:rPr>
+              <a:t> un </a:t>
+            </a:r>
+            <a:r>
+              <a:rPr lang="en-US" sz="1200" dirty="0" err="1">
+                <a:latin typeface="Arial" panose="020B0604020202020204" pitchFamily="34" charset="0"/>
+                <a:cs typeface="Arial" panose="020B0604020202020204" pitchFamily="34" charset="0"/>
+              </a:rPr>
+              <a:t>índice</a:t>
+            </a:r>
+            <a:r>
+              <a:rPr lang="en-US" sz="1200" dirty="0">
+                <a:latin typeface="Arial" panose="020B0604020202020204" pitchFamily="34" charset="0"/>
+                <a:cs typeface="Arial" panose="020B0604020202020204" pitchFamily="34" charset="0"/>
+              </a:rPr>
+              <a:t> </a:t>
+            </a:r>
+            <a:r>
+              <a:rPr lang="en-US" sz="1200" dirty="0" err="1">
+                <a:latin typeface="Arial" panose="020B0604020202020204" pitchFamily="34" charset="0"/>
+                <a:cs typeface="Arial" panose="020B0604020202020204" pitchFamily="34" charset="0"/>
+              </a:rPr>
+              <a:t>efectivo</a:t>
+            </a:r>
+            <a:r>
+              <a:rPr lang="en-US" sz="1200" dirty="0">
+                <a:latin typeface="Arial" panose="020B0604020202020204" pitchFamily="34" charset="0"/>
+                <a:cs typeface="Arial" panose="020B0604020202020204" pitchFamily="34" charset="0"/>
+              </a:rPr>
+              <a:t> </a:t>
+            </a:r>
+            <a:r>
+              <a:rPr lang="en-US" sz="1200" dirty="0" err="1">
+                <a:latin typeface="Arial" panose="020B0604020202020204" pitchFamily="34" charset="0"/>
+                <a:cs typeface="Arial" panose="020B0604020202020204" pitchFamily="34" charset="0"/>
+              </a:rPr>
+              <a:t>por</a:t>
+            </a:r>
+            <a:r>
+              <a:rPr lang="en-US" sz="1200" dirty="0">
+                <a:latin typeface="Arial" panose="020B0604020202020204" pitchFamily="34" charset="0"/>
+                <a:cs typeface="Arial" panose="020B0604020202020204" pitchFamily="34" charset="0"/>
+              </a:rPr>
+              <a:t> </a:t>
+            </a:r>
+            <a:r>
+              <a:rPr lang="en-US" sz="1200" dirty="0" err="1">
+                <a:latin typeface="Arial" panose="020B0604020202020204" pitchFamily="34" charset="0"/>
+                <a:cs typeface="Arial" panose="020B0604020202020204" pitchFamily="34" charset="0"/>
+              </a:rPr>
+              <a:t>encima</a:t>
+            </a:r>
+            <a:r>
+              <a:rPr lang="en-US" sz="1200" dirty="0">
+                <a:latin typeface="Arial" panose="020B0604020202020204" pitchFamily="34" charset="0"/>
+                <a:cs typeface="Arial" panose="020B0604020202020204" pitchFamily="34" charset="0"/>
+              </a:rPr>
+              <a:t> del cladding, </a:t>
+            </a:r>
+            <a:r>
+              <a:rPr lang="en-US" sz="1200" dirty="0" err="1">
+                <a:latin typeface="Arial" panose="020B0604020202020204" pitchFamily="34" charset="0"/>
+                <a:cs typeface="Arial" panose="020B0604020202020204" pitchFamily="34" charset="0"/>
+              </a:rPr>
+              <a:t>que</a:t>
+            </a:r>
+            <a:r>
+              <a:rPr lang="en-US" sz="1200" dirty="0">
+                <a:latin typeface="Arial" panose="020B0604020202020204" pitchFamily="34" charset="0"/>
+                <a:cs typeface="Arial" panose="020B0604020202020204" pitchFamily="34" charset="0"/>
+              </a:rPr>
+              <a:t> es de </a:t>
+            </a:r>
+            <a:r>
+              <a:rPr lang="en-US" sz="1200" dirty="0" err="1">
+                <a:latin typeface="Arial" panose="020B0604020202020204" pitchFamily="34" charset="0"/>
+                <a:cs typeface="Arial" panose="020B0604020202020204" pitchFamily="34" charset="0"/>
+              </a:rPr>
+              <a:t>alrededor</a:t>
+            </a:r>
+            <a:r>
+              <a:rPr lang="en-US" sz="1200" dirty="0">
+                <a:latin typeface="Arial" panose="020B0604020202020204" pitchFamily="34" charset="0"/>
+                <a:cs typeface="Arial" panose="020B0604020202020204" pitchFamily="34" charset="0"/>
+              </a:rPr>
+              <a:t> de 1.44.</a:t>
+            </a:r>
+          </a:p>
+          <a:p>
+            <a:pPr algn="just"/>
+            <a:endParaRPr lang="en-US" sz="1200" dirty="0">
+              <a:latin typeface="Arial" panose="020B0604020202020204" pitchFamily="34" charset="0"/>
+              <a:cs typeface="Arial" panose="020B0604020202020204" pitchFamily="34" charset="0"/>
+            </a:endParaRPr>
+          </a:p>
+          <a:p>
+            <a:pPr algn="just"/>
+            <a:endParaRPr lang="en-US" sz="1200" dirty="0">
+              <a:latin typeface="Arial" panose="020B0604020202020204" pitchFamily="34" charset="0"/>
+              <a:cs typeface="Arial" panose="020B0604020202020204" pitchFamily="34" charset="0"/>
+            </a:endParaRPr>
+          </a:p>
+          <a:p>
+            <a:pPr algn="just"/>
+            <a:endParaRPr lang="en-US" sz="1200" dirty="0">
+              <a:latin typeface="Arial" panose="020B0604020202020204" pitchFamily="34" charset="0"/>
+              <a:cs typeface="Arial" panose="020B0604020202020204" pitchFamily="34" charset="0"/>
+            </a:endParaRPr>
+          </a:p>
+          <a:p>
+            <a:pPr algn="just"/>
+            <a:endParaRPr lang="en-US" sz="1200" dirty="0">
+              <a:latin typeface="Arial" panose="020B0604020202020204" pitchFamily="34" charset="0"/>
+              <a:cs typeface="Arial" panose="020B0604020202020204" pitchFamily="34" charset="0"/>
+            </a:endParaRPr>
+          </a:p>
+          <a:p>
+            <a:pPr algn="just"/>
+            <a:endParaRPr lang="en-US" sz="1200" dirty="0">
+              <a:latin typeface="Arial" panose="020B0604020202020204" pitchFamily="34" charset="0"/>
+              <a:cs typeface="Arial" panose="020B0604020202020204" pitchFamily="34" charset="0"/>
+            </a:endParaRPr>
+          </a:p>
+          <a:p>
+            <a:pPr algn="just"/>
+            <a:endParaRPr lang="en-US" sz="1200" dirty="0">
+              <a:latin typeface="Arial" panose="020B0604020202020204" pitchFamily="34" charset="0"/>
+              <a:cs typeface="Arial" panose="020B0604020202020204" pitchFamily="34" charset="0"/>
+            </a:endParaRPr>
+          </a:p>
+        </p:txBody>
+      </p:sp>
+      <p:pic>
+        <p:nvPicPr>
+          <p:cNvPr id="6" name="Imagen 5" descr="Interfaz de usuario gráfica, Aplicación, Word&#10;&#10;El contenido generado por IA puede ser incorrecto.">
+            <a:extLst>
+              <a:ext uri="{FF2B5EF4-FFF2-40B4-BE49-F238E27FC236}">
+                <a16:creationId xmlns:a16="http://schemas.microsoft.com/office/drawing/2014/main" id="{57882ACE-8FAC-5F67-8EA3-8A4E74CA006F}"/>
+              </a:ext>
+            </a:extLst>
+          </p:cNvPr>
+          <p:cNvPicPr>
+            <a:picLocks noChangeAspect="1"/>
+          </p:cNvPicPr>
+          <p:nvPr/>
+        </p:nvPicPr>
+        <p:blipFill>
+          <a:blip r:embed="rId5"/>
+          <a:stretch>
+            <a:fillRect/>
+          </a:stretch>
+        </p:blipFill>
+        <p:spPr>
+          <a:xfrm>
+            <a:off x="608012" y="1009948"/>
+            <a:ext cx="3119567" cy="2266652"/>
+          </a:xfrm>
+          <a:prstGeom prst="rect">
+            <a:avLst/>
+          </a:prstGeom>
+        </p:spPr>
+      </p:pic>
+      <p:pic>
+        <p:nvPicPr>
+          <p:cNvPr id="8" name="Imagen 7" descr="Interfaz de usuario gráfica, Word&#10;&#10;El contenido generado por IA puede ser incorrecto.">
+            <a:extLst>
+              <a:ext uri="{FF2B5EF4-FFF2-40B4-BE49-F238E27FC236}">
+                <a16:creationId xmlns:a16="http://schemas.microsoft.com/office/drawing/2014/main" id="{E063E233-7685-49A7-56E8-9296DAA8210D}"/>
+              </a:ext>
+            </a:extLst>
+          </p:cNvPr>
+          <p:cNvPicPr>
+            <a:picLocks noChangeAspect="1"/>
+          </p:cNvPicPr>
+          <p:nvPr/>
+        </p:nvPicPr>
+        <p:blipFill>
+          <a:blip r:embed="rId6"/>
+          <a:stretch>
+            <a:fillRect/>
+          </a:stretch>
+        </p:blipFill>
+        <p:spPr>
+          <a:xfrm>
+            <a:off x="4343400" y="1073407"/>
+            <a:ext cx="3121505" cy="2203193"/>
+          </a:xfrm>
+          <a:prstGeom prst="rect">
+            <a:avLst/>
+          </a:prstGeom>
+        </p:spPr>
+      </p:pic>
+      <p:pic>
+        <p:nvPicPr>
+          <p:cNvPr id="10" name="Imagen 9" descr="Interfaz de usuario gráfica, Aplicación&#10;&#10;El contenido generado por IA puede ser incorrecto.">
+            <a:extLst>
+              <a:ext uri="{FF2B5EF4-FFF2-40B4-BE49-F238E27FC236}">
+                <a16:creationId xmlns:a16="http://schemas.microsoft.com/office/drawing/2014/main" id="{BC844408-22BF-A0B3-5CC7-1AE012D3C6A4}"/>
+              </a:ext>
+            </a:extLst>
+          </p:cNvPr>
+          <p:cNvPicPr>
+            <a:picLocks noChangeAspect="1"/>
+          </p:cNvPicPr>
+          <p:nvPr/>
+        </p:nvPicPr>
+        <p:blipFill>
+          <a:blip r:embed="rId7"/>
+          <a:stretch>
+            <a:fillRect/>
+          </a:stretch>
+        </p:blipFill>
+        <p:spPr>
+          <a:xfrm>
+            <a:off x="7954927" y="1024007"/>
+            <a:ext cx="3213038" cy="2218526"/>
+          </a:xfrm>
+          <a:prstGeom prst="rect">
+            <a:avLst/>
+          </a:prstGeom>
+        </p:spPr>
+      </p:pic>
+      <p:pic>
+        <p:nvPicPr>
+          <p:cNvPr id="12" name="Imagen 11" descr="Texto&#10;&#10;El contenido generado por IA puede ser incorrecto.">
+            <a:extLst>
+              <a:ext uri="{FF2B5EF4-FFF2-40B4-BE49-F238E27FC236}">
+                <a16:creationId xmlns:a16="http://schemas.microsoft.com/office/drawing/2014/main" id="{89DA6B2C-0C0A-7D6B-2553-BC460674EA66}"/>
+              </a:ext>
+            </a:extLst>
+          </p:cNvPr>
+          <p:cNvPicPr>
+            <a:picLocks noChangeAspect="1"/>
+          </p:cNvPicPr>
+          <p:nvPr/>
+        </p:nvPicPr>
+        <p:blipFill>
+          <a:blip r:embed="rId8"/>
+          <a:stretch>
+            <a:fillRect/>
+          </a:stretch>
+        </p:blipFill>
+        <p:spPr>
+          <a:xfrm>
+            <a:off x="633412" y="3328120"/>
+            <a:ext cx="8202170" cy="1257475"/>
+          </a:xfrm>
+          <a:prstGeom prst="rect">
+            <a:avLst/>
+          </a:prstGeom>
+        </p:spPr>
+      </p:pic>
+    </p:spTree>
+    <p:extLst>
+      <p:ext uri="{BB962C8B-B14F-4D97-AF65-F5344CB8AC3E}">
+        <p14:creationId xmlns:p14="http://schemas.microsoft.com/office/powerpoint/2010/main" val="884340404"/>
+      </p:ext>
+    </p:extLst>
+  </p:cSld>
+  <p:clrMapOvr>
+    <a:masterClrMapping/>
+  </p:clrMapOvr>
+</p:sld>
+</file>
+
+<file path=ppt/slides/slide12.xml><?xml version="1.0" encoding="utf-8"?>
+<p:sld xmlns:a="http://schemas.openxmlformats.org/drawingml/2006/main" xmlns:r="http://schemas.openxmlformats.org/officeDocument/2006/relationships" xmlns:p="http://schemas.openxmlformats.org/presentationml/2006/main">
+  <p:cSld>
+    <p:spTree>
+      <p:nvGrpSpPr>
+        <p:cNvPr id="1" name="">
+          <a:extLst>
+            <a:ext uri="{FF2B5EF4-FFF2-40B4-BE49-F238E27FC236}">
+              <a16:creationId xmlns:a16="http://schemas.microsoft.com/office/drawing/2014/main" id="{9971F110-022E-068B-CC43-2207276847EF}"/>
+            </a:ext>
+          </a:extLst>
+        </p:cNvPr>
+        <p:cNvGrpSpPr/>
+        <p:nvPr/>
+      </p:nvGrpSpPr>
+      <p:grpSpPr>
+        <a:xfrm>
+          <a:off x="0" y="0"/>
+          <a:ext cx="0" cy="0"/>
+          <a:chOff x="0" y="0"/>
+          <a:chExt cx="0" cy="0"/>
+        </a:xfrm>
+      </p:grpSpPr>
+      <p:sp>
+        <p:nvSpPr>
+          <p:cNvPr id="16" name="object 16">
+            <a:extLst>
+              <a:ext uri="{FF2B5EF4-FFF2-40B4-BE49-F238E27FC236}">
+                <a16:creationId xmlns:a16="http://schemas.microsoft.com/office/drawing/2014/main" id="{E8D2ECC0-C9FD-7E56-6516-B614CB202787}"/>
+              </a:ext>
+            </a:extLst>
+          </p:cNvPr>
+          <p:cNvSpPr txBox="1">
+            <a:spLocks noGrp="1"/>
+          </p:cNvSpPr>
+          <p:nvPr>
+            <p:ph type="title"/>
+          </p:nvPr>
+        </p:nvSpPr>
+        <p:spPr>
+          <a:xfrm>
+            <a:off x="685800" y="408883"/>
+            <a:ext cx="10994410" cy="397545"/>
+          </a:xfrm>
+          <a:prstGeom prst="rect">
+            <a:avLst/>
+          </a:prstGeom>
+        </p:spPr>
+        <p:txBody>
+          <a:bodyPr vert="horz" wrap="square" lIns="0" tIns="12700" rIns="0" bIns="0" rtlCol="0">
+            <a:spAutoFit/>
+          </a:bodyPr>
+          <a:lstStyle/>
+          <a:p>
+            <a:pPr marL="12700">
+              <a:lnSpc>
+                <a:spcPct val="100000"/>
+              </a:lnSpc>
+              <a:spcBef>
+                <a:spcPts val="100"/>
+              </a:spcBef>
+            </a:pPr>
+            <a:r>
+              <a:rPr lang="en-US" sz="2500" dirty="0"/>
+              <a:t>Learning outcome #2 – Multimode Interference (MMI) Coupler cross-section</a:t>
+            </a:r>
+            <a:endParaRPr lang="en-US" sz="2500" b="0" dirty="0">
+              <a:latin typeface="+mj-lt"/>
+              <a:cs typeface="Lucida Sans"/>
+            </a:endParaRPr>
+          </a:p>
+        </p:txBody>
+      </p:sp>
+      <p:pic>
+        <p:nvPicPr>
+          <p:cNvPr id="83" name="Gráfico 82">
+            <a:extLst>
+              <a:ext uri="{FF2B5EF4-FFF2-40B4-BE49-F238E27FC236}">
+                <a16:creationId xmlns:a16="http://schemas.microsoft.com/office/drawing/2014/main" id="{90FAF690-4D4D-1D71-20D0-E1B4C4AC1A74}"/>
+              </a:ext>
+            </a:extLst>
+          </p:cNvPr>
+          <p:cNvPicPr>
+            <a:picLocks noChangeAspect="1"/>
+          </p:cNvPicPr>
+          <p:nvPr/>
+        </p:nvPicPr>
+        <p:blipFill>
+          <a:blip r:embed="rId3">
+            <a:extLst>
+              <a:ext uri="{96DAC541-7B7A-43D3-8B79-37D633B846F1}">
+                <asvg:svgBlip xmlns:asvg="http://schemas.microsoft.com/office/drawing/2016/SVG/main" r:embed="rId4"/>
+              </a:ext>
+            </a:extLst>
+          </a:blip>
+          <a:stretch>
+            <a:fillRect/>
+          </a:stretch>
+        </p:blipFill>
+        <p:spPr>
+          <a:xfrm>
+            <a:off x="5045006" y="6356057"/>
+            <a:ext cx="6409575" cy="363174"/>
+          </a:xfrm>
+          <a:prstGeom prst="rect">
+            <a:avLst/>
+          </a:prstGeom>
+        </p:spPr>
+      </p:pic>
+      <p:sp>
+        <p:nvSpPr>
+          <p:cNvPr id="84" name="Marcador de número de diapositiva 83">
+            <a:extLst>
+              <a:ext uri="{FF2B5EF4-FFF2-40B4-BE49-F238E27FC236}">
+                <a16:creationId xmlns:a16="http://schemas.microsoft.com/office/drawing/2014/main" id="{B97C2AD5-3150-0B0D-AA15-D5211B49F395}"/>
+              </a:ext>
+            </a:extLst>
+          </p:cNvPr>
+          <p:cNvSpPr>
+            <a:spLocks noGrp="1"/>
+          </p:cNvSpPr>
+          <p:nvPr>
+            <p:ph type="sldNum" sz="quarter" idx="7"/>
+          </p:nvPr>
+        </p:nvSpPr>
+        <p:spPr/>
+        <p:txBody>
+          <a:bodyPr/>
+          <a:lstStyle/>
+          <a:p>
+            <a:fld id="{B6F15528-21DE-4FAA-801E-634DDDAF4B2B}" type="slidenum">
+              <a:rPr lang="es-ES" smtClean="0"/>
+              <a:t>12</a:t>
+            </a:fld>
+            <a:endParaRPr lang="es-ES"/>
+          </a:p>
+        </p:txBody>
+      </p:sp>
+      <p:sp>
+        <p:nvSpPr>
+          <p:cNvPr id="3" name="Marcador de pie de página 2">
+            <a:extLst>
+              <a:ext uri="{FF2B5EF4-FFF2-40B4-BE49-F238E27FC236}">
+                <a16:creationId xmlns:a16="http://schemas.microsoft.com/office/drawing/2014/main" id="{A9888B22-3101-015F-9E7E-4B4B029D67C4}"/>
+              </a:ext>
+            </a:extLst>
+          </p:cNvPr>
+          <p:cNvSpPr>
+            <a:spLocks noGrp="1"/>
+          </p:cNvSpPr>
+          <p:nvPr>
+            <p:ph type="ftr" sz="quarter" idx="5"/>
+          </p:nvPr>
+        </p:nvSpPr>
+        <p:spPr/>
+        <p:txBody>
+          <a:bodyPr/>
+          <a:lstStyle/>
+          <a:p>
+            <a:pPr marL="12700">
+              <a:spcBef>
+                <a:spcPts val="15"/>
+              </a:spcBef>
+            </a:pPr>
+            <a:r>
+              <a:rPr lang="es-ES" spc="-5"/>
+              <a:t>LAB 0.2. COUPLERS</a:t>
+            </a:r>
+            <a:endParaRPr lang="es-ES" spc="-5" dirty="0"/>
+          </a:p>
+        </p:txBody>
+      </p:sp>
+      <p:sp>
+        <p:nvSpPr>
+          <p:cNvPr id="4" name="Marcador de texto 2">
+            <a:extLst>
+              <a:ext uri="{FF2B5EF4-FFF2-40B4-BE49-F238E27FC236}">
+                <a16:creationId xmlns:a16="http://schemas.microsoft.com/office/drawing/2014/main" id="{4DFC99FA-7158-789D-3A10-1BF8F8C58668}"/>
+              </a:ext>
+            </a:extLst>
+          </p:cNvPr>
+          <p:cNvSpPr txBox="1">
+            <a:spLocks/>
+          </p:cNvSpPr>
+          <p:nvPr/>
+        </p:nvSpPr>
+        <p:spPr>
+          <a:xfrm>
+            <a:off x="608012" y="1295400"/>
+            <a:ext cx="11048999" cy="4958137"/>
+          </a:xfrm>
+          <a:prstGeom prst="rect">
+            <a:avLst/>
+          </a:prstGeom>
+        </p:spPr>
+        <p:txBody>
+          <a:bodyPr>
+            <a:normAutofit/>
+          </a:bodyPr>
+          <a:lstStyle>
+            <a:lvl1pPr marL="0">
+              <a:defRPr>
+                <a:latin typeface="+mn-lt"/>
+                <a:ea typeface="+mn-ea"/>
+                <a:cs typeface="+mn-cs"/>
+              </a:defRPr>
+            </a:lvl1pPr>
+            <a:lvl2pPr marL="457200">
+              <a:defRPr>
+                <a:latin typeface="+mn-lt"/>
+                <a:ea typeface="+mn-ea"/>
+                <a:cs typeface="+mn-cs"/>
+              </a:defRPr>
+            </a:lvl2pPr>
+            <a:lvl3pPr marL="914400">
+              <a:defRPr>
+                <a:latin typeface="+mn-lt"/>
+                <a:ea typeface="+mn-ea"/>
+                <a:cs typeface="+mn-cs"/>
+              </a:defRPr>
+            </a:lvl3pPr>
+            <a:lvl4pPr marL="1371600">
+              <a:defRPr>
+                <a:latin typeface="+mn-lt"/>
+                <a:ea typeface="+mn-ea"/>
+                <a:cs typeface="+mn-cs"/>
+              </a:defRPr>
+            </a:lvl4pPr>
+            <a:lvl5pPr marL="1828800">
+              <a:defRPr>
+                <a:latin typeface="+mn-lt"/>
+                <a:ea typeface="+mn-ea"/>
+                <a:cs typeface="+mn-cs"/>
+              </a:defRPr>
+            </a:lvl5pPr>
+            <a:lvl6pPr marL="2286000">
+              <a:defRPr>
+                <a:latin typeface="+mn-lt"/>
+                <a:ea typeface="+mn-ea"/>
+                <a:cs typeface="+mn-cs"/>
+              </a:defRPr>
+            </a:lvl6pPr>
+            <a:lvl7pPr marL="2743200">
+              <a:defRPr>
+                <a:latin typeface="+mn-lt"/>
+                <a:ea typeface="+mn-ea"/>
+                <a:cs typeface="+mn-cs"/>
+              </a:defRPr>
+            </a:lvl7pPr>
+            <a:lvl8pPr marL="3200400">
+              <a:defRPr>
+                <a:latin typeface="+mn-lt"/>
+                <a:ea typeface="+mn-ea"/>
+                <a:cs typeface="+mn-cs"/>
+              </a:defRPr>
+            </a:lvl8pPr>
+            <a:lvl9pPr marL="3657600">
+              <a:defRPr>
+                <a:latin typeface="+mn-lt"/>
+                <a:ea typeface="+mn-ea"/>
+                <a:cs typeface="+mn-cs"/>
+              </a:defRPr>
+            </a:lvl9pPr>
+          </a:lstStyle>
+          <a:p>
+            <a:pPr algn="just"/>
+            <a:endParaRPr lang="en-US" sz="2000" b="1" i="1" u="sng" dirty="0"/>
+          </a:p>
+          <a:p>
+            <a:pPr algn="just"/>
+            <a:endParaRPr lang="en-US" sz="2000" kern="0" dirty="0">
+              <a:solidFill>
+                <a:sysClr val="windowText" lastClr="000000"/>
+              </a:solidFill>
+            </a:endParaRPr>
+          </a:p>
+        </p:txBody>
+      </p:sp>
+      <p:sp>
+        <p:nvSpPr>
+          <p:cNvPr id="2" name="CuadroTexto 1">
+            <a:extLst>
+              <a:ext uri="{FF2B5EF4-FFF2-40B4-BE49-F238E27FC236}">
+                <a16:creationId xmlns:a16="http://schemas.microsoft.com/office/drawing/2014/main" id="{29AE18A2-248D-0741-00E1-25B713E809F2}"/>
+              </a:ext>
+            </a:extLst>
+          </p:cNvPr>
+          <p:cNvSpPr txBox="1"/>
+          <p:nvPr/>
+        </p:nvSpPr>
+        <p:spPr>
+          <a:xfrm>
+            <a:off x="608012" y="4903378"/>
+            <a:ext cx="11199971" cy="1384995"/>
+          </a:xfrm>
+          <a:prstGeom prst="rect">
+            <a:avLst/>
+          </a:prstGeom>
+          <a:solidFill>
+            <a:schemeClr val="bg1">
+              <a:lumMod val="95000"/>
+            </a:schemeClr>
+          </a:solidFill>
+          <a:ln w="28575">
+            <a:solidFill>
+              <a:srgbClr val="E0700D"/>
+            </a:solidFill>
+          </a:ln>
+        </p:spPr>
+        <p:txBody>
+          <a:bodyPr wrap="square" rtlCol="0">
+            <a:spAutoFit/>
+          </a:bodyPr>
+          <a:lstStyle/>
+          <a:p>
+            <a:pPr algn="just"/>
+            <a:r>
+              <a:rPr lang="en-US" sz="1200" dirty="0">
+                <a:latin typeface="Arial" panose="020B0604020202020204" pitchFamily="34" charset="0"/>
+                <a:cs typeface="Arial" panose="020B0604020202020204" pitchFamily="34" charset="0"/>
+              </a:rPr>
+              <a:t>He </a:t>
+            </a:r>
+            <a:r>
+              <a:rPr lang="en-US" sz="1200" dirty="0" err="1">
+                <a:latin typeface="Arial" panose="020B0604020202020204" pitchFamily="34" charset="0"/>
+                <a:cs typeface="Arial" panose="020B0604020202020204" pitchFamily="34" charset="0"/>
+              </a:rPr>
+              <a:t>simulado</a:t>
+            </a:r>
+            <a:r>
+              <a:rPr lang="en-US" sz="1200" dirty="0">
+                <a:latin typeface="Arial" panose="020B0604020202020204" pitchFamily="34" charset="0"/>
+                <a:cs typeface="Arial" panose="020B0604020202020204" pitchFamily="34" charset="0"/>
+              </a:rPr>
+              <a:t> 35 </a:t>
+            </a:r>
+            <a:r>
+              <a:rPr lang="en-US" sz="1200" dirty="0" err="1">
+                <a:latin typeface="Arial" panose="020B0604020202020204" pitchFamily="34" charset="0"/>
+                <a:cs typeface="Arial" panose="020B0604020202020204" pitchFamily="34" charset="0"/>
+              </a:rPr>
+              <a:t>modos</a:t>
+            </a:r>
+            <a:r>
+              <a:rPr lang="en-US" sz="1200" dirty="0">
+                <a:latin typeface="Arial" panose="020B0604020202020204" pitchFamily="34" charset="0"/>
+                <a:cs typeface="Arial" panose="020B0604020202020204" pitchFamily="34" charset="0"/>
+              </a:rPr>
+              <a:t>, y </a:t>
+            </a:r>
+            <a:r>
+              <a:rPr lang="en-US" sz="1200" dirty="0" err="1">
+                <a:latin typeface="Arial" panose="020B0604020202020204" pitchFamily="34" charset="0"/>
+                <a:cs typeface="Arial" panose="020B0604020202020204" pitchFamily="34" charset="0"/>
+              </a:rPr>
+              <a:t>vemos</a:t>
+            </a:r>
+            <a:r>
+              <a:rPr lang="en-US" sz="1200" dirty="0">
+                <a:latin typeface="Arial" panose="020B0604020202020204" pitchFamily="34" charset="0"/>
+                <a:cs typeface="Arial" panose="020B0604020202020204" pitchFamily="34" charset="0"/>
+              </a:rPr>
+              <a:t> </a:t>
+            </a:r>
+            <a:r>
+              <a:rPr lang="en-US" sz="1200" dirty="0" err="1">
+                <a:latin typeface="Arial" panose="020B0604020202020204" pitchFamily="34" charset="0"/>
+                <a:cs typeface="Arial" panose="020B0604020202020204" pitchFamily="34" charset="0"/>
+              </a:rPr>
+              <a:t>que</a:t>
+            </a:r>
+            <a:r>
+              <a:rPr lang="en-US" sz="1200" dirty="0">
+                <a:latin typeface="Arial" panose="020B0604020202020204" pitchFamily="34" charset="0"/>
+                <a:cs typeface="Arial" panose="020B0604020202020204" pitchFamily="34" charset="0"/>
+              </a:rPr>
+              <a:t> </a:t>
+            </a:r>
+            <a:r>
+              <a:rPr lang="en-US" sz="1200" dirty="0" err="1">
+                <a:latin typeface="Arial" panose="020B0604020202020204" pitchFamily="34" charset="0"/>
+                <a:cs typeface="Arial" panose="020B0604020202020204" pitchFamily="34" charset="0"/>
+              </a:rPr>
+              <a:t>el</a:t>
+            </a:r>
+            <a:r>
+              <a:rPr lang="en-US" sz="1200" dirty="0">
+                <a:latin typeface="Arial" panose="020B0604020202020204" pitchFamily="34" charset="0"/>
+                <a:cs typeface="Arial" panose="020B0604020202020204" pitchFamily="34" charset="0"/>
+              </a:rPr>
+              <a:t> </a:t>
+            </a:r>
+            <a:r>
+              <a:rPr lang="en-US" sz="1200" dirty="0" err="1">
+                <a:latin typeface="Arial" panose="020B0604020202020204" pitchFamily="34" charset="0"/>
+                <a:cs typeface="Arial" panose="020B0604020202020204" pitchFamily="34" charset="0"/>
+              </a:rPr>
+              <a:t>último</a:t>
+            </a:r>
+            <a:r>
+              <a:rPr lang="en-US" sz="1200" dirty="0">
+                <a:latin typeface="Arial" panose="020B0604020202020204" pitchFamily="34" charset="0"/>
+                <a:cs typeface="Arial" panose="020B0604020202020204" pitchFamily="34" charset="0"/>
+              </a:rPr>
+              <a:t> </a:t>
+            </a:r>
+            <a:r>
+              <a:rPr lang="en-US" sz="1200" dirty="0" err="1">
+                <a:latin typeface="Arial" panose="020B0604020202020204" pitchFamily="34" charset="0"/>
+                <a:cs typeface="Arial" panose="020B0604020202020204" pitchFamily="34" charset="0"/>
+              </a:rPr>
+              <a:t>que</a:t>
+            </a:r>
+            <a:r>
+              <a:rPr lang="en-US" sz="1200" dirty="0">
+                <a:latin typeface="Arial" panose="020B0604020202020204" pitchFamily="34" charset="0"/>
+                <a:cs typeface="Arial" panose="020B0604020202020204" pitchFamily="34" charset="0"/>
+              </a:rPr>
+              <a:t> </a:t>
+            </a:r>
+            <a:r>
+              <a:rPr lang="en-US" sz="1200" dirty="0" err="1">
+                <a:latin typeface="Arial" panose="020B0604020202020204" pitchFamily="34" charset="0"/>
+                <a:cs typeface="Arial" panose="020B0604020202020204" pitchFamily="34" charset="0"/>
+              </a:rPr>
+              <a:t>tiene</a:t>
+            </a:r>
+            <a:r>
+              <a:rPr lang="en-US" sz="1200" dirty="0">
+                <a:latin typeface="Arial" panose="020B0604020202020204" pitchFamily="34" charset="0"/>
+                <a:cs typeface="Arial" panose="020B0604020202020204" pitchFamily="34" charset="0"/>
+              </a:rPr>
+              <a:t> un </a:t>
+            </a:r>
+            <a:r>
+              <a:rPr lang="en-US" sz="1200" dirty="0" err="1">
+                <a:latin typeface="Arial" panose="020B0604020202020204" pitchFamily="34" charset="0"/>
+                <a:cs typeface="Arial" panose="020B0604020202020204" pitchFamily="34" charset="0"/>
+              </a:rPr>
+              <a:t>indice</a:t>
+            </a:r>
+            <a:r>
+              <a:rPr lang="en-US" sz="1200" dirty="0">
+                <a:latin typeface="Arial" panose="020B0604020202020204" pitchFamily="34" charset="0"/>
+                <a:cs typeface="Arial" panose="020B0604020202020204" pitchFamily="34" charset="0"/>
+              </a:rPr>
+              <a:t> superior a 1.44 es </a:t>
+            </a:r>
+            <a:r>
+              <a:rPr lang="en-US" sz="1200" dirty="0" err="1">
+                <a:latin typeface="Arial" panose="020B0604020202020204" pitchFamily="34" charset="0"/>
+                <a:cs typeface="Arial" panose="020B0604020202020204" pitchFamily="34" charset="0"/>
+              </a:rPr>
+              <a:t>el</a:t>
+            </a:r>
+            <a:r>
+              <a:rPr lang="en-US" sz="1200" dirty="0">
+                <a:latin typeface="Arial" panose="020B0604020202020204" pitchFamily="34" charset="0"/>
+                <a:cs typeface="Arial" panose="020B0604020202020204" pitchFamily="34" charset="0"/>
+              </a:rPr>
+              <a:t> </a:t>
+            </a:r>
+            <a:r>
+              <a:rPr lang="en-US" sz="1200" dirty="0" err="1">
+                <a:latin typeface="Arial" panose="020B0604020202020204" pitchFamily="34" charset="0"/>
+                <a:cs typeface="Arial" panose="020B0604020202020204" pitchFamily="34" charset="0"/>
+              </a:rPr>
+              <a:t>señalado</a:t>
+            </a:r>
+            <a:r>
+              <a:rPr lang="en-US" sz="1200" dirty="0">
+                <a:latin typeface="Arial" panose="020B0604020202020204" pitchFamily="34" charset="0"/>
+                <a:cs typeface="Arial" panose="020B0604020202020204" pitchFamily="34" charset="0"/>
+              </a:rPr>
+              <a:t>. Por lo </a:t>
+            </a:r>
+            <a:r>
+              <a:rPr lang="en-US" sz="1200" dirty="0" err="1">
+                <a:latin typeface="Arial" panose="020B0604020202020204" pitchFamily="34" charset="0"/>
+                <a:cs typeface="Arial" panose="020B0604020202020204" pitchFamily="34" charset="0"/>
+              </a:rPr>
+              <a:t>que</a:t>
+            </a:r>
+            <a:r>
+              <a:rPr lang="en-US" sz="1200" dirty="0">
+                <a:latin typeface="Arial" panose="020B0604020202020204" pitchFamily="34" charset="0"/>
+                <a:cs typeface="Arial" panose="020B0604020202020204" pitchFamily="34" charset="0"/>
+              </a:rPr>
+              <a:t> </a:t>
+            </a:r>
+            <a:r>
+              <a:rPr lang="en-US" sz="1200" dirty="0" err="1">
+                <a:latin typeface="Arial" panose="020B0604020202020204" pitchFamily="34" charset="0"/>
+                <a:cs typeface="Arial" panose="020B0604020202020204" pitchFamily="34" charset="0"/>
+              </a:rPr>
+              <a:t>tiene</a:t>
+            </a:r>
+            <a:r>
+              <a:rPr lang="en-US" sz="1200" dirty="0">
+                <a:latin typeface="Arial" panose="020B0604020202020204" pitchFamily="34" charset="0"/>
+                <a:cs typeface="Arial" panose="020B0604020202020204" pitchFamily="34" charset="0"/>
+              </a:rPr>
+              <a:t> 28 </a:t>
+            </a:r>
+            <a:r>
+              <a:rPr lang="en-US" sz="1200" dirty="0" err="1">
+                <a:latin typeface="Arial" panose="020B0604020202020204" pitchFamily="34" charset="0"/>
+                <a:cs typeface="Arial" panose="020B0604020202020204" pitchFamily="34" charset="0"/>
+              </a:rPr>
+              <a:t>modos</a:t>
+            </a:r>
+            <a:r>
+              <a:rPr lang="en-US" sz="1200" dirty="0">
+                <a:latin typeface="Arial" panose="020B0604020202020204" pitchFamily="34" charset="0"/>
+                <a:cs typeface="Arial" panose="020B0604020202020204" pitchFamily="34" charset="0"/>
+              </a:rPr>
+              <a:t> </a:t>
+            </a:r>
+            <a:r>
+              <a:rPr lang="en-US" sz="1200" dirty="0" err="1">
+                <a:latin typeface="Arial" panose="020B0604020202020204" pitchFamily="34" charset="0"/>
+                <a:cs typeface="Arial" panose="020B0604020202020204" pitchFamily="34" charset="0"/>
+              </a:rPr>
+              <a:t>que</a:t>
+            </a:r>
+            <a:r>
+              <a:rPr lang="en-US" sz="1200" dirty="0">
+                <a:latin typeface="Arial" panose="020B0604020202020204" pitchFamily="34" charset="0"/>
+                <a:cs typeface="Arial" panose="020B0604020202020204" pitchFamily="34" charset="0"/>
+              </a:rPr>
+              <a:t> se </a:t>
+            </a:r>
+            <a:r>
+              <a:rPr lang="en-US" sz="1200" dirty="0" err="1">
+                <a:latin typeface="Arial" panose="020B0604020202020204" pitchFamily="34" charset="0"/>
+                <a:cs typeface="Arial" panose="020B0604020202020204" pitchFamily="34" charset="0"/>
+              </a:rPr>
+              <a:t>propagan</a:t>
+            </a:r>
+            <a:r>
+              <a:rPr lang="en-US" sz="1200" dirty="0">
+                <a:latin typeface="Arial" panose="020B0604020202020204" pitchFamily="34" charset="0"/>
+                <a:cs typeface="Arial" panose="020B0604020202020204" pitchFamily="34" charset="0"/>
+              </a:rPr>
+              <a:t>. </a:t>
+            </a:r>
+          </a:p>
+          <a:p>
+            <a:pPr algn="just"/>
+            <a:endParaRPr lang="en-US" sz="1200" dirty="0">
+              <a:latin typeface="Arial" panose="020B0604020202020204" pitchFamily="34" charset="0"/>
+              <a:cs typeface="Arial" panose="020B0604020202020204" pitchFamily="34" charset="0"/>
+            </a:endParaRPr>
+          </a:p>
+          <a:p>
+            <a:pPr algn="just"/>
+            <a:r>
+              <a:rPr lang="en-US" sz="1200" dirty="0">
+                <a:latin typeface="Arial" panose="020B0604020202020204" pitchFamily="34" charset="0"/>
+                <a:cs typeface="Arial" panose="020B0604020202020204" pitchFamily="34" charset="0"/>
+              </a:rPr>
+              <a:t>	</a:t>
+            </a:r>
+          </a:p>
+          <a:p>
+            <a:pPr algn="just"/>
+            <a:endParaRPr lang="en-US" sz="1200" dirty="0">
+              <a:latin typeface="Arial" panose="020B0604020202020204" pitchFamily="34" charset="0"/>
+              <a:cs typeface="Arial" panose="020B0604020202020204" pitchFamily="34" charset="0"/>
+            </a:endParaRPr>
+          </a:p>
+          <a:p>
+            <a:pPr algn="just"/>
+            <a:endParaRPr lang="en-US" sz="1200" dirty="0">
+              <a:latin typeface="Arial" panose="020B0604020202020204" pitchFamily="34" charset="0"/>
+              <a:cs typeface="Arial" panose="020B0604020202020204" pitchFamily="34" charset="0"/>
+            </a:endParaRPr>
+          </a:p>
+          <a:p>
+            <a:pPr algn="just"/>
+            <a:endParaRPr lang="en-US" sz="1200" dirty="0">
+              <a:latin typeface="Arial" panose="020B0604020202020204" pitchFamily="34" charset="0"/>
+              <a:cs typeface="Arial" panose="020B0604020202020204" pitchFamily="34" charset="0"/>
+            </a:endParaRPr>
+          </a:p>
+          <a:p>
+            <a:pPr algn="just"/>
+            <a:endParaRPr lang="en-US" sz="1200" dirty="0">
+              <a:latin typeface="Arial" panose="020B0604020202020204" pitchFamily="34" charset="0"/>
+              <a:cs typeface="Arial" panose="020B0604020202020204" pitchFamily="34" charset="0"/>
+            </a:endParaRPr>
+          </a:p>
+        </p:txBody>
+      </p:sp>
+      <p:pic>
+        <p:nvPicPr>
+          <p:cNvPr id="7" name="Imagen 6" descr="Texto&#10;&#10;El contenido generado por IA puede ser incorrecto.">
+            <a:extLst>
+              <a:ext uri="{FF2B5EF4-FFF2-40B4-BE49-F238E27FC236}">
+                <a16:creationId xmlns:a16="http://schemas.microsoft.com/office/drawing/2014/main" id="{C586736E-65CD-9FAD-18C0-AD8B6899C008}"/>
+              </a:ext>
+            </a:extLst>
+          </p:cNvPr>
+          <p:cNvPicPr>
+            <a:picLocks noChangeAspect="1"/>
+          </p:cNvPicPr>
+          <p:nvPr/>
+        </p:nvPicPr>
+        <p:blipFill>
+          <a:blip r:embed="rId5"/>
+          <a:stretch>
+            <a:fillRect/>
+          </a:stretch>
+        </p:blipFill>
+        <p:spPr>
+          <a:xfrm>
+            <a:off x="2733026" y="890475"/>
+            <a:ext cx="5996569" cy="3693887"/>
+          </a:xfrm>
+          <a:prstGeom prst="rect">
+            <a:avLst/>
+          </a:prstGeom>
+        </p:spPr>
+      </p:pic>
+      <p:sp>
+        <p:nvSpPr>
+          <p:cNvPr id="5" name="Rectángulo 4">
+            <a:extLst>
+              <a:ext uri="{FF2B5EF4-FFF2-40B4-BE49-F238E27FC236}">
+                <a16:creationId xmlns:a16="http://schemas.microsoft.com/office/drawing/2014/main" id="{AA13555D-B206-9A4A-2432-2E0AF05E3C82}"/>
+              </a:ext>
+            </a:extLst>
+          </p:cNvPr>
+          <p:cNvSpPr/>
+          <p:nvPr/>
+        </p:nvSpPr>
+        <p:spPr>
+          <a:xfrm>
+            <a:off x="5638800" y="3276600"/>
+            <a:ext cx="2133600" cy="228600"/>
+          </a:xfrm>
+          <a:prstGeom prst="rect">
+            <a:avLst/>
+          </a:prstGeom>
+          <a:noFill/>
+          <a:ln>
+            <a:solidFill>
+              <a:srgbClr val="FF0000"/>
+            </a:solidFill>
+          </a:ln>
+        </p:spPr>
+        <p:style>
+          <a:lnRef idx="2">
+            <a:schemeClr val="accent1">
+              <a:shade val="15000"/>
+            </a:schemeClr>
+          </a:lnRef>
+          <a:fillRef idx="1">
+            <a:schemeClr val="accent1"/>
+          </a:fillRef>
+          <a:effectRef idx="0">
+            <a:schemeClr val="accent1"/>
+          </a:effectRef>
+          <a:fontRef idx="minor">
+            <a:schemeClr val="lt1"/>
+          </a:fontRef>
+        </p:style>
+        <p:txBody>
+          <a:bodyPr rtlCol="0" anchor="ctr"/>
+          <a:lstStyle/>
+          <a:p>
+            <a:pPr algn="ctr"/>
+            <a:endParaRPr lang="es-ES"/>
+          </a:p>
+        </p:txBody>
+      </p:sp>
+    </p:spTree>
+    <p:extLst>
+      <p:ext uri="{BB962C8B-B14F-4D97-AF65-F5344CB8AC3E}">
+        <p14:creationId xmlns:p14="http://schemas.microsoft.com/office/powerpoint/2010/main" val="2182166031"/>
+      </p:ext>
+    </p:extLst>
+  </p:cSld>
+  <p:clrMapOvr>
+    <a:masterClrMapping/>
+  </p:clrMapOvr>
+</p:sld>
+</file>
+
+<file path=ppt/slides/slide13.xml><?xml version="1.0" encoding="utf-8"?>
+<p:sld xmlns:a="http://schemas.openxmlformats.org/drawingml/2006/main" xmlns:r="http://schemas.openxmlformats.org/officeDocument/2006/relationships" xmlns:p="http://schemas.openxmlformats.org/presentationml/2006/main">
+  <p:cSld>
+    <p:spTree>
+      <p:nvGrpSpPr>
+        <p:cNvPr id="1" name="">
+          <a:extLst>
+            <a:ext uri="{FF2B5EF4-FFF2-40B4-BE49-F238E27FC236}">
+              <a16:creationId xmlns:a16="http://schemas.microsoft.com/office/drawing/2014/main" id="{8B4DAF43-ABE2-BC78-562B-CD016382062D}"/>
+            </a:ext>
+          </a:extLst>
+        </p:cNvPr>
+        <p:cNvGrpSpPr/>
+        <p:nvPr/>
+      </p:nvGrpSpPr>
+      <p:grpSpPr>
+        <a:xfrm>
+          <a:off x="0" y="0"/>
+          <a:ext cx="0" cy="0"/>
+          <a:chOff x="0" y="0"/>
+          <a:chExt cx="0" cy="0"/>
+        </a:xfrm>
+      </p:grpSpPr>
+      <p:sp>
+        <p:nvSpPr>
+          <p:cNvPr id="16" name="object 16">
+            <a:extLst>
+              <a:ext uri="{FF2B5EF4-FFF2-40B4-BE49-F238E27FC236}">
+                <a16:creationId xmlns:a16="http://schemas.microsoft.com/office/drawing/2014/main" id="{E7C14D95-5B6A-9E67-E1BD-B6C350CBB58E}"/>
+              </a:ext>
+            </a:extLst>
+          </p:cNvPr>
+          <p:cNvSpPr txBox="1">
+            <a:spLocks noGrp="1"/>
+          </p:cNvSpPr>
+          <p:nvPr>
+            <p:ph type="title"/>
+          </p:nvPr>
+        </p:nvSpPr>
+        <p:spPr>
+          <a:xfrm>
+            <a:off x="685800" y="408883"/>
+            <a:ext cx="10994410" cy="397545"/>
+          </a:xfrm>
+          <a:prstGeom prst="rect">
+            <a:avLst/>
+          </a:prstGeom>
+        </p:spPr>
+        <p:txBody>
+          <a:bodyPr vert="horz" wrap="square" lIns="0" tIns="12700" rIns="0" bIns="0" rtlCol="0">
+            <a:spAutoFit/>
+          </a:bodyPr>
+          <a:lstStyle/>
+          <a:p>
+            <a:pPr marL="12700">
+              <a:lnSpc>
+                <a:spcPct val="100000"/>
+              </a:lnSpc>
+              <a:spcBef>
+                <a:spcPts val="100"/>
+              </a:spcBef>
+            </a:pPr>
+            <a:r>
+              <a:rPr lang="en-US" sz="2500" dirty="0"/>
+              <a:t>Learning outcome #2 – Multimode Interference (MMI) Coupler cross-section</a:t>
+            </a:r>
+            <a:endParaRPr lang="en-US" sz="2500" b="0" dirty="0">
+              <a:latin typeface="+mj-lt"/>
+              <a:cs typeface="Lucida Sans"/>
+            </a:endParaRPr>
+          </a:p>
+        </p:txBody>
+      </p:sp>
+      <p:pic>
+        <p:nvPicPr>
+          <p:cNvPr id="83" name="Gráfico 82">
+            <a:extLst>
+              <a:ext uri="{FF2B5EF4-FFF2-40B4-BE49-F238E27FC236}">
+                <a16:creationId xmlns:a16="http://schemas.microsoft.com/office/drawing/2014/main" id="{92AB7265-B7F7-D3D6-72A1-8A2E5DAE6277}"/>
+              </a:ext>
+            </a:extLst>
+          </p:cNvPr>
+          <p:cNvPicPr>
+            <a:picLocks noChangeAspect="1"/>
+          </p:cNvPicPr>
+          <p:nvPr/>
+        </p:nvPicPr>
+        <p:blipFill>
+          <a:blip r:embed="rId3">
+            <a:extLst>
+              <a:ext uri="{96DAC541-7B7A-43D3-8B79-37D633B846F1}">
+                <asvg:svgBlip xmlns:asvg="http://schemas.microsoft.com/office/drawing/2016/SVG/main" r:embed="rId4"/>
+              </a:ext>
+            </a:extLst>
+          </a:blip>
+          <a:stretch>
+            <a:fillRect/>
+          </a:stretch>
+        </p:blipFill>
+        <p:spPr>
+          <a:xfrm>
+            <a:off x="5045006" y="6356057"/>
+            <a:ext cx="6409575" cy="363174"/>
+          </a:xfrm>
+          <a:prstGeom prst="rect">
+            <a:avLst/>
+          </a:prstGeom>
+        </p:spPr>
+      </p:pic>
+      <p:sp>
+        <p:nvSpPr>
+          <p:cNvPr id="84" name="Marcador de número de diapositiva 83">
+            <a:extLst>
+              <a:ext uri="{FF2B5EF4-FFF2-40B4-BE49-F238E27FC236}">
+                <a16:creationId xmlns:a16="http://schemas.microsoft.com/office/drawing/2014/main" id="{82DC5A9A-9286-2BD5-0120-2455328E0446}"/>
+              </a:ext>
+            </a:extLst>
+          </p:cNvPr>
+          <p:cNvSpPr>
+            <a:spLocks noGrp="1"/>
+          </p:cNvSpPr>
+          <p:nvPr>
+            <p:ph type="sldNum" sz="quarter" idx="7"/>
+          </p:nvPr>
+        </p:nvSpPr>
+        <p:spPr/>
+        <p:txBody>
+          <a:bodyPr/>
+          <a:lstStyle/>
+          <a:p>
+            <a:fld id="{B6F15528-21DE-4FAA-801E-634DDDAF4B2B}" type="slidenum">
+              <a:rPr lang="es-ES" smtClean="0"/>
+              <a:t>13</a:t>
+            </a:fld>
+            <a:endParaRPr lang="es-ES"/>
+          </a:p>
+        </p:txBody>
+      </p:sp>
+      <p:sp>
+        <p:nvSpPr>
+          <p:cNvPr id="3" name="Marcador de pie de página 2">
+            <a:extLst>
+              <a:ext uri="{FF2B5EF4-FFF2-40B4-BE49-F238E27FC236}">
+                <a16:creationId xmlns:a16="http://schemas.microsoft.com/office/drawing/2014/main" id="{57FC0E2E-AF5D-C62F-3223-6156977A4BE0}"/>
+              </a:ext>
+            </a:extLst>
+          </p:cNvPr>
+          <p:cNvSpPr>
+            <a:spLocks noGrp="1"/>
+          </p:cNvSpPr>
+          <p:nvPr>
+            <p:ph type="ftr" sz="quarter" idx="5"/>
+          </p:nvPr>
+        </p:nvSpPr>
+        <p:spPr/>
+        <p:txBody>
+          <a:bodyPr/>
+          <a:lstStyle/>
+          <a:p>
+            <a:pPr marL="12700">
+              <a:spcBef>
+                <a:spcPts val="15"/>
+              </a:spcBef>
+            </a:pPr>
+            <a:r>
+              <a:rPr lang="es-ES" spc="-5"/>
+              <a:t>LAB 0.2. COUPLERS</a:t>
+            </a:r>
+            <a:endParaRPr lang="es-ES" spc="-5" dirty="0"/>
+          </a:p>
+        </p:txBody>
+      </p:sp>
+      <p:sp>
+        <p:nvSpPr>
+          <p:cNvPr id="4" name="Marcador de texto 2">
+            <a:extLst>
+              <a:ext uri="{FF2B5EF4-FFF2-40B4-BE49-F238E27FC236}">
+                <a16:creationId xmlns:a16="http://schemas.microsoft.com/office/drawing/2014/main" id="{E7D6679C-1F49-FA83-5F6C-B17D1C8DB944}"/>
+              </a:ext>
+            </a:extLst>
+          </p:cNvPr>
+          <p:cNvSpPr txBox="1">
+            <a:spLocks/>
+          </p:cNvSpPr>
+          <p:nvPr/>
+        </p:nvSpPr>
+        <p:spPr>
+          <a:xfrm>
+            <a:off x="608012" y="1295400"/>
+            <a:ext cx="11048999" cy="4958137"/>
+          </a:xfrm>
+          <a:prstGeom prst="rect">
+            <a:avLst/>
+          </a:prstGeom>
+        </p:spPr>
+        <p:txBody>
+          <a:bodyPr>
+            <a:normAutofit/>
+          </a:bodyPr>
+          <a:lstStyle>
+            <a:lvl1pPr marL="0">
+              <a:defRPr>
+                <a:latin typeface="+mn-lt"/>
+                <a:ea typeface="+mn-ea"/>
+                <a:cs typeface="+mn-cs"/>
+              </a:defRPr>
+            </a:lvl1pPr>
+            <a:lvl2pPr marL="457200">
+              <a:defRPr>
+                <a:latin typeface="+mn-lt"/>
+                <a:ea typeface="+mn-ea"/>
+                <a:cs typeface="+mn-cs"/>
+              </a:defRPr>
+            </a:lvl2pPr>
+            <a:lvl3pPr marL="914400">
+              <a:defRPr>
+                <a:latin typeface="+mn-lt"/>
+                <a:ea typeface="+mn-ea"/>
+                <a:cs typeface="+mn-cs"/>
+              </a:defRPr>
+            </a:lvl3pPr>
+            <a:lvl4pPr marL="1371600">
+              <a:defRPr>
+                <a:latin typeface="+mn-lt"/>
+                <a:ea typeface="+mn-ea"/>
+                <a:cs typeface="+mn-cs"/>
+              </a:defRPr>
+            </a:lvl4pPr>
+            <a:lvl5pPr marL="1828800">
+              <a:defRPr>
+                <a:latin typeface="+mn-lt"/>
+                <a:ea typeface="+mn-ea"/>
+                <a:cs typeface="+mn-cs"/>
+              </a:defRPr>
+            </a:lvl5pPr>
+            <a:lvl6pPr marL="2286000">
+              <a:defRPr>
+                <a:latin typeface="+mn-lt"/>
+                <a:ea typeface="+mn-ea"/>
+                <a:cs typeface="+mn-cs"/>
+              </a:defRPr>
+            </a:lvl6pPr>
+            <a:lvl7pPr marL="2743200">
+              <a:defRPr>
+                <a:latin typeface="+mn-lt"/>
+                <a:ea typeface="+mn-ea"/>
+                <a:cs typeface="+mn-cs"/>
+              </a:defRPr>
+            </a:lvl7pPr>
+            <a:lvl8pPr marL="3200400">
+              <a:defRPr>
+                <a:latin typeface="+mn-lt"/>
+                <a:ea typeface="+mn-ea"/>
+                <a:cs typeface="+mn-cs"/>
+              </a:defRPr>
+            </a:lvl8pPr>
+            <a:lvl9pPr marL="3657600">
+              <a:defRPr>
+                <a:latin typeface="+mn-lt"/>
+                <a:ea typeface="+mn-ea"/>
+                <a:cs typeface="+mn-cs"/>
+              </a:defRPr>
+            </a:lvl9pPr>
+          </a:lstStyle>
+          <a:p>
+            <a:pPr algn="just"/>
+            <a:endParaRPr lang="en-US" sz="2000" b="1" i="1" u="sng" dirty="0"/>
+          </a:p>
+          <a:p>
+            <a:pPr algn="just"/>
+            <a:endParaRPr lang="en-US" sz="2000" kern="0" dirty="0">
+              <a:solidFill>
+                <a:sysClr val="windowText" lastClr="000000"/>
+              </a:solidFill>
+            </a:endParaRPr>
+          </a:p>
+        </p:txBody>
+      </p:sp>
+      <p:sp>
+        <p:nvSpPr>
+          <p:cNvPr id="2" name="CuadroTexto 1">
+            <a:extLst>
+              <a:ext uri="{FF2B5EF4-FFF2-40B4-BE49-F238E27FC236}">
+                <a16:creationId xmlns:a16="http://schemas.microsoft.com/office/drawing/2014/main" id="{8A1E3F15-2560-F57E-4034-4AAAD3D0AFC7}"/>
+              </a:ext>
+            </a:extLst>
+          </p:cNvPr>
+          <p:cNvSpPr txBox="1"/>
+          <p:nvPr/>
+        </p:nvSpPr>
+        <p:spPr>
+          <a:xfrm>
+            <a:off x="608012" y="2719084"/>
+            <a:ext cx="11199971" cy="1384995"/>
+          </a:xfrm>
+          <a:prstGeom prst="rect">
+            <a:avLst/>
+          </a:prstGeom>
+          <a:solidFill>
+            <a:schemeClr val="bg1">
+              <a:lumMod val="95000"/>
+            </a:schemeClr>
+          </a:solidFill>
+          <a:ln w="28575">
+            <a:solidFill>
+              <a:srgbClr val="E0700D"/>
+            </a:solidFill>
+          </a:ln>
+        </p:spPr>
+        <p:txBody>
+          <a:bodyPr wrap="square" rtlCol="0">
+            <a:spAutoFit/>
+          </a:bodyPr>
+          <a:lstStyle/>
+          <a:p>
+            <a:pPr algn="just"/>
+            <a:r>
+              <a:rPr lang="en-US" sz="1200" dirty="0" err="1">
+                <a:latin typeface="Arial" panose="020B0604020202020204" pitchFamily="34" charset="0"/>
+                <a:cs typeface="Arial" panose="020B0604020202020204" pitchFamily="34" charset="0"/>
+              </a:rPr>
+              <a:t>Hemos</a:t>
+            </a:r>
+            <a:r>
+              <a:rPr lang="en-US" sz="1200" dirty="0">
+                <a:latin typeface="Arial" panose="020B0604020202020204" pitchFamily="34" charset="0"/>
+                <a:cs typeface="Arial" panose="020B0604020202020204" pitchFamily="34" charset="0"/>
+              </a:rPr>
+              <a:t> </a:t>
+            </a:r>
+            <a:r>
+              <a:rPr lang="en-US" sz="1200" dirty="0" err="1">
+                <a:latin typeface="Arial" panose="020B0604020202020204" pitchFamily="34" charset="0"/>
+                <a:cs typeface="Arial" panose="020B0604020202020204" pitchFamily="34" charset="0"/>
+              </a:rPr>
+              <a:t>calculado</a:t>
+            </a:r>
+            <a:r>
+              <a:rPr lang="en-US" sz="1200" dirty="0">
+                <a:latin typeface="Arial" panose="020B0604020202020204" pitchFamily="34" charset="0"/>
+                <a:cs typeface="Arial" panose="020B0604020202020204" pitchFamily="34" charset="0"/>
+              </a:rPr>
+              <a:t> la </a:t>
+            </a:r>
+            <a:r>
+              <a:rPr lang="en-US" sz="1200" dirty="0" err="1">
+                <a:latin typeface="Arial" panose="020B0604020202020204" pitchFamily="34" charset="0"/>
+                <a:cs typeface="Arial" panose="020B0604020202020204" pitchFamily="34" charset="0"/>
+              </a:rPr>
+              <a:t>distancia</a:t>
+            </a:r>
+            <a:r>
+              <a:rPr lang="en-US" sz="1200" dirty="0">
+                <a:latin typeface="Arial" panose="020B0604020202020204" pitchFamily="34" charset="0"/>
+                <a:cs typeface="Arial" panose="020B0604020202020204" pitchFamily="34" charset="0"/>
+              </a:rPr>
+              <a:t> de </a:t>
+            </a:r>
+            <a:r>
+              <a:rPr lang="en-US" sz="1200" dirty="0" err="1">
+                <a:latin typeface="Arial" panose="020B0604020202020204" pitchFamily="34" charset="0"/>
+                <a:cs typeface="Arial" panose="020B0604020202020204" pitchFamily="34" charset="0"/>
+              </a:rPr>
+              <a:t>autoimagen</a:t>
+            </a:r>
+            <a:r>
+              <a:rPr lang="en-US" sz="1200" dirty="0">
+                <a:latin typeface="Arial" panose="020B0604020202020204" pitchFamily="34" charset="0"/>
+                <a:cs typeface="Arial" panose="020B0604020202020204" pitchFamily="34" charset="0"/>
+              </a:rPr>
+              <a:t>, </a:t>
+            </a:r>
+            <a:r>
+              <a:rPr lang="en-US" sz="1200" dirty="0" err="1">
+                <a:latin typeface="Arial" panose="020B0604020202020204" pitchFamily="34" charset="0"/>
+                <a:cs typeface="Arial" panose="020B0604020202020204" pitchFamily="34" charset="0"/>
+              </a:rPr>
+              <a:t>que</a:t>
+            </a:r>
+            <a:r>
+              <a:rPr lang="en-US" sz="1200" dirty="0">
+                <a:latin typeface="Arial" panose="020B0604020202020204" pitchFamily="34" charset="0"/>
+                <a:cs typeface="Arial" panose="020B0604020202020204" pitchFamily="34" charset="0"/>
+              </a:rPr>
+              <a:t> es a la </a:t>
+            </a:r>
+            <a:r>
+              <a:rPr lang="en-US" sz="1200" dirty="0" err="1">
+                <a:latin typeface="Arial" panose="020B0604020202020204" pitchFamily="34" charset="0"/>
+                <a:cs typeface="Arial" panose="020B0604020202020204" pitchFamily="34" charset="0"/>
+              </a:rPr>
+              <a:t>cual</a:t>
+            </a:r>
+            <a:r>
+              <a:rPr lang="en-US" sz="1200" dirty="0">
+                <a:latin typeface="Arial" panose="020B0604020202020204" pitchFamily="34" charset="0"/>
+                <a:cs typeface="Arial" panose="020B0604020202020204" pitchFamily="34" charset="0"/>
+              </a:rPr>
+              <a:t> se </a:t>
+            </a:r>
+            <a:r>
+              <a:rPr lang="en-US" sz="1200" dirty="0" err="1">
+                <a:latin typeface="Arial" panose="020B0604020202020204" pitchFamily="34" charset="0"/>
+                <a:cs typeface="Arial" panose="020B0604020202020204" pitchFamily="34" charset="0"/>
+              </a:rPr>
+              <a:t>producirán</a:t>
+            </a:r>
+            <a:r>
+              <a:rPr lang="en-US" sz="1200" dirty="0">
+                <a:latin typeface="Arial" panose="020B0604020202020204" pitchFamily="34" charset="0"/>
+                <a:cs typeface="Arial" panose="020B0604020202020204" pitchFamily="34" charset="0"/>
+              </a:rPr>
+              <a:t> las replicas.  </a:t>
+            </a:r>
+          </a:p>
+          <a:p>
+            <a:pPr algn="just"/>
+            <a:endParaRPr lang="en-US" sz="1200" dirty="0">
+              <a:latin typeface="Arial" panose="020B0604020202020204" pitchFamily="34" charset="0"/>
+              <a:cs typeface="Arial" panose="020B0604020202020204" pitchFamily="34" charset="0"/>
+            </a:endParaRPr>
+          </a:p>
+          <a:p>
+            <a:pPr algn="just"/>
+            <a:r>
+              <a:rPr lang="en-US" sz="1200" dirty="0">
+                <a:latin typeface="Arial" panose="020B0604020202020204" pitchFamily="34" charset="0"/>
+                <a:cs typeface="Arial" panose="020B0604020202020204" pitchFamily="34" charset="0"/>
+              </a:rPr>
+              <a:t>	</a:t>
+            </a:r>
+          </a:p>
+          <a:p>
+            <a:pPr algn="just"/>
+            <a:endParaRPr lang="en-US" sz="1200" dirty="0">
+              <a:latin typeface="Arial" panose="020B0604020202020204" pitchFamily="34" charset="0"/>
+              <a:cs typeface="Arial" panose="020B0604020202020204" pitchFamily="34" charset="0"/>
+            </a:endParaRPr>
+          </a:p>
+          <a:p>
+            <a:pPr algn="just"/>
+            <a:endParaRPr lang="en-US" sz="1200" dirty="0">
+              <a:latin typeface="Arial" panose="020B0604020202020204" pitchFamily="34" charset="0"/>
+              <a:cs typeface="Arial" panose="020B0604020202020204" pitchFamily="34" charset="0"/>
+            </a:endParaRPr>
+          </a:p>
+          <a:p>
+            <a:pPr algn="just"/>
+            <a:endParaRPr lang="en-US" sz="1200" dirty="0">
+              <a:latin typeface="Arial" panose="020B0604020202020204" pitchFamily="34" charset="0"/>
+              <a:cs typeface="Arial" panose="020B0604020202020204" pitchFamily="34" charset="0"/>
+            </a:endParaRPr>
+          </a:p>
+          <a:p>
+            <a:pPr algn="just"/>
+            <a:endParaRPr lang="en-US" sz="1200" dirty="0">
+              <a:latin typeface="Arial" panose="020B0604020202020204" pitchFamily="34" charset="0"/>
+              <a:cs typeface="Arial" panose="020B0604020202020204" pitchFamily="34" charset="0"/>
+            </a:endParaRPr>
+          </a:p>
+        </p:txBody>
+      </p:sp>
+      <p:pic>
+        <p:nvPicPr>
+          <p:cNvPr id="8" name="Imagen 7">
+            <a:extLst>
+              <a:ext uri="{FF2B5EF4-FFF2-40B4-BE49-F238E27FC236}">
+                <a16:creationId xmlns:a16="http://schemas.microsoft.com/office/drawing/2014/main" id="{A44D2520-4F4C-BF8D-577A-AFB7A99B9C84}"/>
+              </a:ext>
+            </a:extLst>
+          </p:cNvPr>
+          <p:cNvPicPr>
+            <a:picLocks noChangeAspect="1"/>
+          </p:cNvPicPr>
+          <p:nvPr/>
+        </p:nvPicPr>
+        <p:blipFill>
+          <a:blip r:embed="rId5"/>
+          <a:stretch>
+            <a:fillRect/>
+          </a:stretch>
+        </p:blipFill>
+        <p:spPr>
+          <a:xfrm>
+            <a:off x="4419600" y="1611674"/>
+            <a:ext cx="2467319" cy="342948"/>
+          </a:xfrm>
+          <a:prstGeom prst="rect">
+            <a:avLst/>
+          </a:prstGeom>
+        </p:spPr>
+      </p:pic>
+    </p:spTree>
+    <p:extLst>
+      <p:ext uri="{BB962C8B-B14F-4D97-AF65-F5344CB8AC3E}">
+        <p14:creationId xmlns:p14="http://schemas.microsoft.com/office/powerpoint/2010/main" val="1565930768"/>
+      </p:ext>
+    </p:extLst>
+  </p:cSld>
+  <p:clrMapOvr>
+    <a:masterClrMapping/>
+  </p:clrMapOvr>
+</p:sld>
+</file>
+
+<file path=ppt/slides/slide14.xml><?xml version="1.0" encoding="utf-8"?>
+<p:sld xmlns:a="http://schemas.openxmlformats.org/drawingml/2006/main" xmlns:r="http://schemas.openxmlformats.org/officeDocument/2006/relationships" xmlns:p="http://schemas.openxmlformats.org/presentationml/2006/main">
+  <p:cSld>
+    <p:spTree>
+      <p:nvGrpSpPr>
         <p:cNvPr id="1" name=""/>
         <p:cNvGrpSpPr/>
         <p:nvPr/>
@@ -3717,7 +7095,7 @@
           <a:p>
             <a:fld id="{B6F15528-21DE-4FAA-801E-634DDDAF4B2B}" type="slidenum">
               <a:rPr lang="es-ES" smtClean="0"/>
-              <a:t>11</a:t>
+              <a:t>14</a:t>
             </a:fld>
             <a:endParaRPr lang="es-ES"/>
           </a:p>
